--- a/output/Module02_V09_Updated.pptx
+++ b/output/Module02_V09_Updated.pptx
@@ -3131,13 +3131,15 @@
           </a:bodyPr>
           <a:lstStyle/>
           <a:p>
-            <a:pPr algn="l" rtl="0"/>
+            <a:pPr algn="r" rtl="0"/>
             <a:r>
               <a:rPr sz="2800" b="1">
                 <a:solidFill>
                   <a:srgbClr val="1F4E79"/>
                 </a:solidFill>
                 <a:latin typeface="Calibri"/>
+                <a:cs typeface="Arial"/>
+                <a:ea typeface="Calibri"/>
               </a:rPr>
               <a:t>Module 02  |  V09</a:t>
             </a:r>
@@ -3173,6 +3175,8 @@
                   <a:srgbClr val="1F3B5C"/>
                 </a:solidFill>
                 <a:latin typeface="Arial"/>
+                <a:cs typeface="Arial"/>
+                <a:ea typeface="Calibri"/>
               </a:rPr>
               <a:t>قواعد البيانات المتجهية + RAG التطبيقي</a:t>
             </a:r>
@@ -3201,13 +3205,15 @@
           </a:bodyPr>
           <a:lstStyle/>
           <a:p>
-            <a:pPr algn="l" rtl="0"/>
+            <a:pPr algn="r" rtl="0"/>
             <a:r>
               <a:rPr sz="3000" b="0">
                 <a:solidFill>
                   <a:srgbClr val="333333"/>
                 </a:solidFill>
                 <a:latin typeface="Calibri"/>
+                <a:cs typeface="Arial"/>
+                <a:ea typeface="Calibri"/>
               </a:rPr>
               <a:t>Vector Databases + Applied RAG</a:t>
             </a:r>
@@ -3243,6 +3249,8 @@
                   <a:srgbClr val="666666"/>
                 </a:solidFill>
                 <a:latin typeface="Arial"/>
+                <a:cs typeface="Arial"/>
+                <a:ea typeface="Calibri"/>
               </a:rPr>
               <a:t>Module 02 — Data &amp; AI Engineering Track  |  الوحدة الثانية</a:t>
             </a:r>
@@ -3271,13 +3279,15 @@
           </a:bodyPr>
           <a:lstStyle/>
           <a:p>
-            <a:pPr algn="l" rtl="0"/>
+            <a:pPr algn="r" rtl="0"/>
             <a:r>
               <a:rPr sz="1400" b="0">
                 <a:solidFill>
                   <a:srgbClr val="666666"/>
                 </a:solidFill>
                 <a:latin typeface="Calibri"/>
+                <a:cs typeface="Arial"/>
+                <a:ea typeface="Calibri"/>
               </a:rPr>
               <a:t>Light theme  |  Bilingual AR/EN  |  Ready to present</a:t>
             </a:r>
@@ -3313,6 +3323,8 @@
                   <a:srgbClr val="666666"/>
                 </a:solidFill>
                 <a:latin typeface="Arial"/>
+                <a:cs typeface="Arial"/>
+                <a:ea typeface="Calibri"/>
               </a:rPr>
               <a:t>Module 02 — Data &amp; AI Engineering Track  |  الوحدة الثانية</a:t>
             </a:r>
@@ -3348,6 +3360,8 @@
                   <a:srgbClr val="666666"/>
                 </a:solidFill>
                 <a:latin typeface="Calibri"/>
+                <a:cs typeface="Arial"/>
+                <a:ea typeface="Calibri"/>
               </a:rPr>
               <a:t>V09  •  1/14</a:t>
             </a:r>
@@ -3383,6 +3397,8 @@
                   <a:srgbClr val="666666"/>
                 </a:solidFill>
                 <a:latin typeface="Arial"/>
+                <a:cs typeface="Arial"/>
+                <a:ea typeface="Calibri"/>
               </a:rPr>
               <a:t>Module 02 — Data &amp; AI Engineering Track  |  الوحدة الثانية</a:t>
             </a:r>
@@ -3418,6 +3434,8 @@
                   <a:srgbClr val="666666"/>
                 </a:solidFill>
                 <a:latin typeface="Calibri"/>
+                <a:cs typeface="Arial"/>
+                <a:ea typeface="Calibri"/>
               </a:rPr>
               <a:t>09_  •  1/14</a:t>
             </a:r>
@@ -3453,6 +3471,8 @@
                   <a:srgbClr val="666666"/>
                 </a:solidFill>
                 <a:latin typeface="Arial"/>
+                <a:cs typeface="Arial"/>
+                <a:ea typeface="Calibri"/>
               </a:rPr>
               <a:t>Module 02 — Data &amp; AI Engineering Track  |  الوحدة الثانية</a:t>
             </a:r>
@@ -3488,6 +3508,8 @@
                   <a:srgbClr val="666666"/>
                 </a:solidFill>
                 <a:latin typeface="Calibri"/>
+                <a:cs typeface="Arial"/>
+                <a:ea typeface="Calibri"/>
               </a:rPr>
               <a:t>09_  •  1/14</a:t>
             </a:r>
@@ -3549,6 +3571,8 @@
                   <a:srgbClr val="1F3B5C"/>
                 </a:solidFill>
                 <a:latin typeface="Arial"/>
+                <a:cs typeface="Arial"/>
+                <a:ea typeface="Calibri"/>
               </a:rPr>
               <a:t>مثلث تقييم RAG / RAG Evaluation Triad</a:t>
             </a:r>
@@ -3650,6 +3674,8 @@
                   <a:srgbClr val="333333"/>
                 </a:solidFill>
                 <a:latin typeface="Arial"/>
+                <a:cs typeface="Arial"/>
+                <a:ea typeface="Calibri"/>
               </a:rPr>
               <a:t>الوفاء بالمصدر</a:t>
             </a:r>
@@ -3662,6 +3688,8 @@
                   <a:srgbClr val="666666"/>
                 </a:solidFill>
                 <a:latin typeface="Calibri"/>
+                <a:cs typeface="Arial"/>
+                <a:ea typeface="Calibri"/>
               </a:rPr>
               <a:t>Faithfulness</a:t>
             </a:r>
@@ -3717,6 +3745,8 @@
                   <a:srgbClr val="333333"/>
                 </a:solidFill>
                 <a:latin typeface="Arial"/>
+                <a:cs typeface="Arial"/>
+                <a:ea typeface="Calibri"/>
               </a:rPr>
               <a:t>ملاءمة الإجابة</a:t>
             </a:r>
@@ -3729,6 +3759,8 @@
                   <a:srgbClr val="666666"/>
                 </a:solidFill>
                 <a:latin typeface="Calibri"/>
+                <a:cs typeface="Arial"/>
+                <a:ea typeface="Calibri"/>
               </a:rPr>
               <a:t>Answer Relevancy</a:t>
             </a:r>
@@ -3784,6 +3816,8 @@
                   <a:srgbClr val="333333"/>
                 </a:solidFill>
                 <a:latin typeface="Arial"/>
+                <a:cs typeface="Arial"/>
+                <a:ea typeface="Calibri"/>
               </a:rPr>
               <a:t>دقة السياق</a:t>
             </a:r>
@@ -3796,6 +3830,8 @@
                   <a:srgbClr val="666666"/>
                 </a:solidFill>
                 <a:latin typeface="Calibri"/>
+                <a:cs typeface="Arial"/>
+                <a:ea typeface="Calibri"/>
               </a:rPr>
               <a:t>Context Precision</a:t>
             </a:r>
@@ -3831,6 +3867,8 @@
                   <a:srgbClr val="666666"/>
                 </a:solidFill>
                 <a:latin typeface="Arial"/>
+                <a:cs typeface="Arial"/>
+                <a:ea typeface="Calibri"/>
               </a:rPr>
               <a:t>يُقاس بإطار RAGAS — الوفاء يمنع الهلوسة والملاءمة تجعل الإجابة نافعة.</a:t>
             </a:r>
@@ -3838,6 +3876,11 @@
           <a:p>
             <a:pPr algn="r" rtl="0"/>
             <a:r>
+              <a:rPr>
+                <a:latin typeface="Calibri"/>
+                <a:cs typeface="Arial"/>
+                <a:ea typeface="Calibri"/>
+              </a:rPr>
               <a:t>Measured with RAGAS — faithfulness prevents hallucination; relevancy keeps answers useful.</a:t>
             </a:r>
           </a:p>
@@ -3872,6 +3915,8 @@
                   <a:srgbClr val="666666"/>
                 </a:solidFill>
                 <a:latin typeface="Arial"/>
+                <a:cs typeface="Arial"/>
+                <a:ea typeface="Calibri"/>
               </a:rPr>
               <a:t>Module 02 — Data &amp; AI Engineering Track  |  الوحدة الثانية</a:t>
             </a:r>
@@ -3907,6 +3952,8 @@
                   <a:srgbClr val="666666"/>
                 </a:solidFill>
                 <a:latin typeface="Calibri"/>
+                <a:cs typeface="Arial"/>
+                <a:ea typeface="Calibri"/>
               </a:rPr>
               <a:t>09_  •  10/14</a:t>
             </a:r>
@@ -3942,6 +3989,8 @@
                   <a:srgbClr val="666666"/>
                 </a:solidFill>
                 <a:latin typeface="Arial"/>
+                <a:cs typeface="Arial"/>
+                <a:ea typeface="Calibri"/>
               </a:rPr>
               <a:t>Module 02 — Data &amp; AI Engineering Track  |  الوحدة الثانية</a:t>
             </a:r>
@@ -3977,6 +4026,8 @@
                   <a:srgbClr val="666666"/>
                 </a:solidFill>
                 <a:latin typeface="Calibri"/>
+                <a:cs typeface="Arial"/>
+                <a:ea typeface="Calibri"/>
               </a:rPr>
               <a:t>09_  •  10/14</a:t>
             </a:r>
@@ -4084,6 +4135,8 @@
                   <a:srgbClr val="1F3B5C"/>
                 </a:solidFill>
                 <a:latin typeface="Arial"/>
+                <a:cs typeface="Arial"/>
+                <a:ea typeface="Calibri"/>
               </a:rPr>
               <a:t>الأخطاء الشائعة / Common Pitfalls</a:t>
             </a:r>
@@ -4126,12 +4179,14 @@
                   <a:srgbClr val="333333"/>
                 </a:solidFill>
                 <a:latin typeface="Arial"/>
+                <a:cs typeface="Arial"/>
+                <a:ea typeface="Calibri"/>
               </a:rPr>
               <a:t>• تقسيم يكسر الجداول أو الأكواد؛ إهمال إعادة الترتيب فيضيع الأكثر ملاءمة.</a:t>
             </a:r>
           </a:p>
           <a:p>
-            <a:pPr algn="l" rtl="0">
+            <a:pPr algn="r" rtl="0">
               <a:spcBef>
                 <a:spcPts val="200"/>
               </a:spcBef>
@@ -4145,6 +4200,8 @@
                   <a:srgbClr val="666666"/>
                 </a:solidFill>
                 <a:latin typeface="Calibri"/>
+                <a:cs typeface="Arial"/>
+                <a:ea typeface="Calibri"/>
               </a:rPr>
               <a:t>• Chunking that breaks tables/code; skipping reranking loses the most relevant hits.</a:t>
             </a:r>
@@ -4164,12 +4221,14 @@
                   <a:srgbClr val="333333"/>
                 </a:solidFill>
                 <a:latin typeface="Arial"/>
+                <a:cs typeface="Arial"/>
+                <a:ea typeface="Calibri"/>
               </a:rPr>
               <a:t>• غياب تقييم الوفاء فيسمح بالهلوسة؛ استرجاع أعلى-ك دون حد أدنى للدرجة.</a:t>
             </a:r>
           </a:p>
           <a:p>
-            <a:pPr algn="l" rtl="0">
+            <a:pPr algn="r" rtl="0">
               <a:spcBef>
                 <a:spcPts val="200"/>
               </a:spcBef>
@@ -4183,6 +4242,8 @@
                   <a:srgbClr val="666666"/>
                 </a:solidFill>
                 <a:latin typeface="Calibri"/>
+                <a:cs typeface="Arial"/>
+                <a:ea typeface="Calibri"/>
               </a:rPr>
               <a:t>• No faithfulness evaluation allows hallucination; top-k without a score floor.</a:t>
             </a:r>
@@ -4218,6 +4279,8 @@
                   <a:srgbClr val="666666"/>
                 </a:solidFill>
                 <a:latin typeface="Arial"/>
+                <a:cs typeface="Arial"/>
+                <a:ea typeface="Calibri"/>
               </a:rPr>
               <a:t>Module 02 — Data &amp; AI Engineering Track  |  الوحدة الثانية</a:t>
             </a:r>
@@ -4253,6 +4316,8 @@
                   <a:srgbClr val="666666"/>
                 </a:solidFill>
                 <a:latin typeface="Calibri"/>
+                <a:cs typeface="Arial"/>
+                <a:ea typeface="Calibri"/>
               </a:rPr>
               <a:t>V09  •  8/14</a:t>
             </a:r>
@@ -4288,6 +4353,8 @@
                   <a:srgbClr val="666666"/>
                 </a:solidFill>
                 <a:latin typeface="Arial"/>
+                <a:cs typeface="Arial"/>
+                <a:ea typeface="Calibri"/>
               </a:rPr>
               <a:t>Module 02 — Data &amp; AI Engineering Track  |  الوحدة الثانية</a:t>
             </a:r>
@@ -4323,6 +4390,8 @@
                   <a:srgbClr val="666666"/>
                 </a:solidFill>
                 <a:latin typeface="Calibri"/>
+                <a:cs typeface="Arial"/>
+                <a:ea typeface="Calibri"/>
               </a:rPr>
               <a:t>09_  •  11/14</a:t>
             </a:r>
@@ -4358,6 +4427,8 @@
                   <a:srgbClr val="666666"/>
                 </a:solidFill>
                 <a:latin typeface="Arial"/>
+                <a:cs typeface="Arial"/>
+                <a:ea typeface="Calibri"/>
               </a:rPr>
               <a:t>Module 02 — Data &amp; AI Engineering Track  |  الوحدة الثانية</a:t>
             </a:r>
@@ -4393,6 +4464,8 @@
                   <a:srgbClr val="666666"/>
                 </a:solidFill>
                 <a:latin typeface="Calibri"/>
+                <a:cs typeface="Arial"/>
+                <a:ea typeface="Calibri"/>
               </a:rPr>
               <a:t>09_  •  11/14</a:t>
             </a:r>
@@ -4500,6 +4573,8 @@
                   <a:srgbClr val="1F3B5C"/>
                 </a:solidFill>
                 <a:latin typeface="Arial"/>
+                <a:cs typeface="Arial"/>
+                <a:ea typeface="Calibri"/>
               </a:rPr>
               <a:t>اختبار قصير / Quick Quiz</a:t>
             </a:r>
@@ -4542,12 +4617,14 @@
                   <a:srgbClr val="333333"/>
                 </a:solidFill>
                 <a:latin typeface="Arial"/>
+                <a:cs typeface="Arial"/>
+                <a:ea typeface="Calibri"/>
               </a:rPr>
               <a:t>• 1. ما استراتيجية التقسيم الموصى بها افتراضيًا؟</a:t>
             </a:r>
           </a:p>
           <a:p>
-            <a:pPr algn="l" rtl="0">
+            <a:pPr algn="r" rtl="0">
               <a:spcBef>
                 <a:spcPts val="200"/>
               </a:spcBef>
@@ -4561,6 +4638,8 @@
                   <a:srgbClr val="666666"/>
                 </a:solidFill>
                 <a:latin typeface="Calibri"/>
+                <a:cs typeface="Arial"/>
+                <a:ea typeface="Calibri"/>
               </a:rPr>
               <a:t>• Which chunking strategy is the recommended default?</a:t>
             </a:r>
@@ -4580,12 +4659,14 @@
                   <a:srgbClr val="333333"/>
                 </a:solidFill>
                 <a:latin typeface="Arial"/>
+                <a:cs typeface="Arial"/>
+                <a:ea typeface="Calibri"/>
               </a:rPr>
               <a:t>• 2. لماذا نجمع البحث الكثيف مع BM25؟</a:t>
             </a:r>
           </a:p>
           <a:p>
-            <a:pPr algn="l" rtl="0">
+            <a:pPr algn="r" rtl="0">
               <a:spcBef>
                 <a:spcPts val="200"/>
               </a:spcBef>
@@ -4599,6 +4680,8 @@
                   <a:srgbClr val="666666"/>
                 </a:solidFill>
                 <a:latin typeface="Calibri"/>
+                <a:cs typeface="Arial"/>
+                <a:ea typeface="Calibri"/>
               </a:rPr>
               <a:t>• Why combine dense search with BM25?</a:t>
             </a:r>
@@ -4618,12 +4701,14 @@
                   <a:srgbClr val="333333"/>
                 </a:solidFill>
                 <a:latin typeface="Arial"/>
+                <a:cs typeface="Arial"/>
+                <a:ea typeface="Calibri"/>
               </a:rPr>
               <a:t>• 3. ما مكونات مثلث تقييم RAG الثلاثة؟</a:t>
             </a:r>
           </a:p>
           <a:p>
-            <a:pPr algn="l" rtl="0">
+            <a:pPr algn="r" rtl="0">
               <a:spcBef>
                 <a:spcPts val="200"/>
               </a:spcBef>
@@ -4637,6 +4722,8 @@
                   <a:srgbClr val="666666"/>
                 </a:solidFill>
                 <a:latin typeface="Calibri"/>
+                <a:cs typeface="Arial"/>
+                <a:ea typeface="Calibri"/>
               </a:rPr>
               <a:t>• Name the three parts of the RAG evaluation triad.</a:t>
             </a:r>
@@ -4656,12 +4743,14 @@
                   <a:srgbClr val="333333"/>
                 </a:solidFill>
                 <a:latin typeface="Arial"/>
+                <a:cs typeface="Arial"/>
+                <a:ea typeface="Calibri"/>
               </a:rPr>
               <a:t>• 4. ما وظيفة إعادة الترتيب Cross-encoder؟</a:t>
             </a:r>
           </a:p>
           <a:p>
-            <a:pPr algn="l" rtl="0">
+            <a:pPr algn="r" rtl="0">
               <a:spcBef>
                 <a:spcPts val="200"/>
               </a:spcBef>
@@ -4675,6 +4764,8 @@
                   <a:srgbClr val="666666"/>
                 </a:solidFill>
                 <a:latin typeface="Calibri"/>
+                <a:cs typeface="Arial"/>
+                <a:ea typeface="Calibri"/>
               </a:rPr>
               <a:t>• What does cross-encoder reranking do?</a:t>
             </a:r>
@@ -4694,12 +4785,14 @@
                   <a:srgbClr val="333333"/>
                 </a:solidFill>
                 <a:latin typeface="Arial"/>
+                <a:cs typeface="Arial"/>
+                <a:ea typeface="Calibri"/>
               </a:rPr>
               <a:t>• 5. كيف يقلل التخزين الدلالي المؤقت التكلفة؟</a:t>
             </a:r>
           </a:p>
           <a:p>
-            <a:pPr algn="l" rtl="0">
+            <a:pPr algn="r" rtl="0">
               <a:spcBef>
                 <a:spcPts val="200"/>
               </a:spcBef>
@@ -4713,6 +4806,8 @@
                   <a:srgbClr val="666666"/>
                 </a:solidFill>
                 <a:latin typeface="Calibri"/>
+                <a:cs typeface="Arial"/>
+                <a:ea typeface="Calibri"/>
               </a:rPr>
               <a:t>• How does semantic caching cut cost?</a:t>
             </a:r>
@@ -4748,6 +4843,8 @@
                   <a:srgbClr val="666666"/>
                 </a:solidFill>
                 <a:latin typeface="Arial"/>
+                <a:cs typeface="Arial"/>
+                <a:ea typeface="Calibri"/>
               </a:rPr>
               <a:t>Module 02 — Data &amp; AI Engineering Track  |  الوحدة الثانية</a:t>
             </a:r>
@@ -4783,6 +4880,8 @@
                   <a:srgbClr val="666666"/>
                 </a:solidFill>
                 <a:latin typeface="Calibri"/>
+                <a:cs typeface="Arial"/>
+                <a:ea typeface="Calibri"/>
               </a:rPr>
               <a:t>V09  •  9/14</a:t>
             </a:r>
@@ -4818,6 +4917,8 @@
                   <a:srgbClr val="666666"/>
                 </a:solidFill>
                 <a:latin typeface="Arial"/>
+                <a:cs typeface="Arial"/>
+                <a:ea typeface="Calibri"/>
               </a:rPr>
               <a:t>Module 02 — Data &amp; AI Engineering Track  |  الوحدة الثانية</a:t>
             </a:r>
@@ -4853,6 +4954,8 @@
                   <a:srgbClr val="666666"/>
                 </a:solidFill>
                 <a:latin typeface="Calibri"/>
+                <a:cs typeface="Arial"/>
+                <a:ea typeface="Calibri"/>
               </a:rPr>
               <a:t>09_  •  12/14</a:t>
             </a:r>
@@ -4888,6 +4991,8 @@
                   <a:srgbClr val="666666"/>
                 </a:solidFill>
                 <a:latin typeface="Arial"/>
+                <a:cs typeface="Arial"/>
+                <a:ea typeface="Calibri"/>
               </a:rPr>
               <a:t>Module 02 — Data &amp; AI Engineering Track  |  الوحدة الثانية</a:t>
             </a:r>
@@ -4923,6 +5028,8 @@
                   <a:srgbClr val="666666"/>
                 </a:solidFill>
                 <a:latin typeface="Calibri"/>
+                <a:cs typeface="Arial"/>
+                <a:ea typeface="Calibri"/>
               </a:rPr>
               <a:t>09_  •  12/14</a:t>
             </a:r>
@@ -5030,6 +5137,8 @@
                   <a:srgbClr val="1F3B5C"/>
                 </a:solidFill>
                 <a:latin typeface="Arial"/>
+                <a:cs typeface="Arial"/>
+                <a:ea typeface="Calibri"/>
               </a:rPr>
               <a:t>إجابات الاختبار / Quiz Answers</a:t>
             </a:r>
@@ -5072,12 +5181,14 @@
                   <a:srgbClr val="333333"/>
                 </a:solidFill>
                 <a:latin typeface="Arial"/>
+                <a:cs typeface="Arial"/>
+                <a:ea typeface="Calibri"/>
               </a:rPr>
               <a:t>• 1. التقسيم التكراري Recursive Chunking.</a:t>
             </a:r>
           </a:p>
           <a:p>
-            <a:pPr algn="l" rtl="0">
+            <a:pPr algn="r" rtl="0">
               <a:spcBef>
                 <a:spcPts val="200"/>
               </a:spcBef>
@@ -5091,6 +5202,8 @@
                   <a:srgbClr val="666666"/>
                 </a:solidFill>
                 <a:latin typeface="Calibri"/>
+                <a:cs typeface="Arial"/>
+                <a:ea typeface="Calibri"/>
               </a:rPr>
               <a:t>• Recursive chunking.</a:t>
             </a:r>
@@ -5110,12 +5223,14 @@
                   <a:srgbClr val="333333"/>
                 </a:solidFill>
                 <a:latin typeface="Arial"/>
+                <a:cs typeface="Arial"/>
+                <a:ea typeface="Calibri"/>
               </a:rPr>
               <a:t>• 2. الكثيف يفهم المعنى وBM25 يطابق الكلمات النادرة حرفيًا.</a:t>
             </a:r>
           </a:p>
           <a:p>
-            <a:pPr algn="l" rtl="0">
+            <a:pPr algn="r" rtl="0">
               <a:spcBef>
                 <a:spcPts val="200"/>
               </a:spcBef>
@@ -5129,6 +5244,8 @@
                   <a:srgbClr val="666666"/>
                 </a:solidFill>
                 <a:latin typeface="Calibri"/>
+                <a:cs typeface="Arial"/>
+                <a:ea typeface="Calibri"/>
               </a:rPr>
               <a:t>• Dense captures meaning; BM25 matches rare exact keywords.</a:t>
             </a:r>
@@ -5148,12 +5265,14 @@
                   <a:srgbClr val="333333"/>
                 </a:solidFill>
                 <a:latin typeface="Arial"/>
+                <a:cs typeface="Arial"/>
+                <a:ea typeface="Calibri"/>
               </a:rPr>
               <a:t>• 3. الوفاء، ملاءمة الإجابة، دقة السياق.</a:t>
             </a:r>
           </a:p>
           <a:p>
-            <a:pPr algn="l" rtl="0">
+            <a:pPr algn="r" rtl="0">
               <a:spcBef>
                 <a:spcPts val="200"/>
               </a:spcBef>
@@ -5167,6 +5286,8 @@
                   <a:srgbClr val="666666"/>
                 </a:solidFill>
                 <a:latin typeface="Calibri"/>
+                <a:cs typeface="Arial"/>
+                <a:ea typeface="Calibri"/>
               </a:rPr>
               <a:t>• Faithfulness, answer relevancy, context precision.</a:t>
             </a:r>
@@ -5186,12 +5307,14 @@
                   <a:srgbClr val="333333"/>
                 </a:solidFill>
                 <a:latin typeface="Arial"/>
+                <a:cs typeface="Arial"/>
+                <a:ea typeface="Calibri"/>
               </a:rPr>
               <a:t>• 4. يعيد ترتيب المرشحين بنموذج أدق لرفع ملاءمة النتائج.</a:t>
             </a:r>
           </a:p>
           <a:p>
-            <a:pPr algn="l" rtl="0">
+            <a:pPr algn="r" rtl="0">
               <a:spcBef>
                 <a:spcPts val="200"/>
               </a:spcBef>
@@ -5205,6 +5328,8 @@
                   <a:srgbClr val="666666"/>
                 </a:solidFill>
                 <a:latin typeface="Calibri"/>
+                <a:cs typeface="Arial"/>
+                <a:ea typeface="Calibri"/>
               </a:rPr>
               <a:t>• Re-scores candidates with a more accurate model.</a:t>
             </a:r>
@@ -5224,12 +5349,14 @@
                   <a:srgbClr val="333333"/>
                 </a:solidFill>
                 <a:latin typeface="Arial"/>
+                <a:cs typeface="Arial"/>
+                <a:ea typeface="Calibri"/>
               </a:rPr>
               <a:t>• 5. يعيد استخدام إجابات الأسئلة المشابهة بدل استدعاء النموذج كل مرة.</a:t>
             </a:r>
           </a:p>
           <a:p>
-            <a:pPr algn="l" rtl="0">
+            <a:pPr algn="r" rtl="0">
               <a:spcBef>
                 <a:spcPts val="200"/>
               </a:spcBef>
@@ -5243,6 +5370,8 @@
                   <a:srgbClr val="666666"/>
                 </a:solidFill>
                 <a:latin typeface="Calibri"/>
+                <a:cs typeface="Arial"/>
+                <a:ea typeface="Calibri"/>
               </a:rPr>
               <a:t>• Reuses answers for similar questions.</a:t>
             </a:r>
@@ -5278,6 +5407,8 @@
                   <a:srgbClr val="666666"/>
                 </a:solidFill>
                 <a:latin typeface="Arial"/>
+                <a:cs typeface="Arial"/>
+                <a:ea typeface="Calibri"/>
               </a:rPr>
               <a:t>Module 02 — Data &amp; AI Engineering Track  |  الوحدة الثانية</a:t>
             </a:r>
@@ -5313,6 +5444,8 @@
                   <a:srgbClr val="666666"/>
                 </a:solidFill>
                 <a:latin typeface="Calibri"/>
+                <a:cs typeface="Arial"/>
+                <a:ea typeface="Calibri"/>
               </a:rPr>
               <a:t>V09  •  10/14</a:t>
             </a:r>
@@ -5348,6 +5481,8 @@
                   <a:srgbClr val="666666"/>
                 </a:solidFill>
                 <a:latin typeface="Arial"/>
+                <a:cs typeface="Arial"/>
+                <a:ea typeface="Calibri"/>
               </a:rPr>
               <a:t>Module 02 — Data &amp; AI Engineering Track  |  الوحدة الثانية</a:t>
             </a:r>
@@ -5383,6 +5518,8 @@
                   <a:srgbClr val="666666"/>
                 </a:solidFill>
                 <a:latin typeface="Calibri"/>
+                <a:cs typeface="Arial"/>
+                <a:ea typeface="Calibri"/>
               </a:rPr>
               <a:t>09_  •  13/14</a:t>
             </a:r>
@@ -5418,6 +5555,8 @@
                   <a:srgbClr val="666666"/>
                 </a:solidFill>
                 <a:latin typeface="Arial"/>
+                <a:cs typeface="Arial"/>
+                <a:ea typeface="Calibri"/>
               </a:rPr>
               <a:t>Module 02 — Data &amp; AI Engineering Track  |  الوحدة الثانية</a:t>
             </a:r>
@@ -5453,6 +5592,8 @@
                   <a:srgbClr val="666666"/>
                 </a:solidFill>
                 <a:latin typeface="Calibri"/>
+                <a:cs typeface="Arial"/>
+                <a:ea typeface="Calibri"/>
               </a:rPr>
               <a:t>09_  •  13/14</a:t>
             </a:r>
@@ -5560,6 +5701,8 @@
                   <a:srgbClr val="1F3B5C"/>
                 </a:solidFill>
                 <a:latin typeface="Arial"/>
+                <a:cs typeface="Arial"/>
+                <a:ea typeface="Calibri"/>
               </a:rPr>
               <a:t>للاستزادة / Further Reading</a:t>
             </a:r>
@@ -5602,12 +5745,14 @@
                   <a:srgbClr val="333333"/>
                 </a:solidFill>
                 <a:latin typeface="Arial"/>
+                <a:cs typeface="Arial"/>
+                <a:ea typeface="Calibri"/>
               </a:rPr>
               <a:t>• Daily Dose of DS — استراتيجيات تقسيم RAG.</a:t>
             </a:r>
           </a:p>
           <a:p>
-            <a:pPr algn="l" rtl="0">
+            <a:pPr algn="r" rtl="0">
               <a:spcBef>
                 <a:spcPts val="200"/>
               </a:spcBef>
@@ -5621,6 +5766,8 @@
                   <a:srgbClr val="666666"/>
                 </a:solidFill>
                 <a:latin typeface="Calibri"/>
+                <a:cs typeface="Arial"/>
+                <a:ea typeface="Calibri"/>
               </a:rPr>
               <a:t>• Daily Dose of DS — RAG chunking strategies.</a:t>
             </a:r>
@@ -5640,12 +5787,14 @@
                   <a:srgbClr val="333333"/>
                 </a:solidFill>
                 <a:latin typeface="Arial"/>
+                <a:cs typeface="Arial"/>
+                <a:ea typeface="Calibri"/>
               </a:rPr>
               <a:t>• توثيق RAGAS لإطار التقييم.</a:t>
             </a:r>
           </a:p>
           <a:p>
-            <a:pPr algn="l" rtl="0">
+            <a:pPr algn="r" rtl="0">
               <a:spcBef>
                 <a:spcPts val="200"/>
               </a:spcBef>
@@ -5659,6 +5808,8 @@
                   <a:srgbClr val="666666"/>
                 </a:solidFill>
                 <a:latin typeface="Calibri"/>
+                <a:cs typeface="Arial"/>
+                <a:ea typeface="Calibri"/>
               </a:rPr>
               <a:t>• RAGAS evaluation framework docs.</a:t>
             </a:r>
@@ -5678,12 +5829,14 @@
                   <a:srgbClr val="333333"/>
                 </a:solidFill>
                 <a:latin typeface="Arial"/>
+                <a:cs typeface="Arial"/>
+                <a:ea typeface="Calibri"/>
               </a:rPr>
               <a:t>• توثيق ChromaDB والفهرسة HNSW.</a:t>
             </a:r>
           </a:p>
           <a:p>
-            <a:pPr algn="l" rtl="0">
+            <a:pPr algn="r" rtl="0">
               <a:spcBef>
                 <a:spcPts val="200"/>
               </a:spcBef>
@@ -5697,6 +5850,8 @@
                   <a:srgbClr val="666666"/>
                 </a:solidFill>
                 <a:latin typeface="Calibri"/>
+                <a:cs typeface="Arial"/>
+                <a:ea typeface="Calibri"/>
               </a:rPr>
               <a:t>• ChromaDB docs and HNSW indexing.</a:t>
             </a:r>
@@ -5732,6 +5887,8 @@
                   <a:srgbClr val="666666"/>
                 </a:solidFill>
                 <a:latin typeface="Arial"/>
+                <a:cs typeface="Arial"/>
+                <a:ea typeface="Calibri"/>
               </a:rPr>
               <a:t>Module 02 — Data &amp; AI Engineering Track  |  الوحدة الثانية</a:t>
             </a:r>
@@ -5767,6 +5924,8 @@
                   <a:srgbClr val="666666"/>
                 </a:solidFill>
                 <a:latin typeface="Calibri"/>
+                <a:cs typeface="Arial"/>
+                <a:ea typeface="Calibri"/>
               </a:rPr>
               <a:t>V09  •  11/14</a:t>
             </a:r>
@@ -5802,6 +5961,8 @@
                   <a:srgbClr val="666666"/>
                 </a:solidFill>
                 <a:latin typeface="Arial"/>
+                <a:cs typeface="Arial"/>
+                <a:ea typeface="Calibri"/>
               </a:rPr>
               <a:t>Module 02 — Data &amp; AI Engineering Track  |  الوحدة الثانية</a:t>
             </a:r>
@@ -5837,6 +5998,8 @@
                   <a:srgbClr val="666666"/>
                 </a:solidFill>
                 <a:latin typeface="Calibri"/>
+                <a:cs typeface="Arial"/>
+                <a:ea typeface="Calibri"/>
               </a:rPr>
               <a:t>09_  •  14/14</a:t>
             </a:r>
@@ -5872,6 +6035,8 @@
                   <a:srgbClr val="666666"/>
                 </a:solidFill>
                 <a:latin typeface="Arial"/>
+                <a:cs typeface="Arial"/>
+                <a:ea typeface="Calibri"/>
               </a:rPr>
               <a:t>Module 02 — Data &amp; AI Engineering Track  |  الوحدة الثانية</a:t>
             </a:r>
@@ -5907,6 +6072,8 @@
                   <a:srgbClr val="666666"/>
                 </a:solidFill>
                 <a:latin typeface="Calibri"/>
+                <a:cs typeface="Arial"/>
+                <a:ea typeface="Calibri"/>
               </a:rPr>
               <a:t>09_  •  14/14</a:t>
             </a:r>
@@ -6014,6 +6181,8 @@
                   <a:srgbClr val="1F3B5C"/>
                 </a:solidFill>
                 <a:latin typeface="Arial"/>
+                <a:cs typeface="Arial"/>
+                <a:ea typeface="Calibri"/>
               </a:rPr>
               <a:t>أجندة العرض / Agenda</a:t>
             </a:r>
@@ -6056,12 +6225,14 @@
                   <a:srgbClr val="333333"/>
                 </a:solidFill>
                 <a:latin typeface="Arial"/>
+                <a:cs typeface="Arial"/>
+                <a:ea typeface="Calibri"/>
               </a:rPr>
               <a:t>• V09 — قواعد البيانات المتجهية + RAG التطبيقي</a:t>
             </a:r>
           </a:p>
           <a:p>
-            <a:pPr algn="l" rtl="0">
+            <a:pPr algn="r" rtl="0">
               <a:spcBef>
                 <a:spcPts val="200"/>
               </a:spcBef>
@@ -6075,6 +6246,8 @@
                   <a:srgbClr val="666666"/>
                 </a:solidFill>
                 <a:latin typeface="Calibri"/>
+                <a:cs typeface="Arial"/>
+                <a:ea typeface="Calibri"/>
               </a:rPr>
               <a:t>• V09 — Vector Databases + Applied RAG</a:t>
             </a:r>
@@ -6094,6 +6267,8 @@
                   <a:srgbClr val="333333"/>
                 </a:solidFill>
                 <a:latin typeface="Arial"/>
+                <a:cs typeface="Arial"/>
+                <a:ea typeface="Calibri"/>
               </a:rPr>
               <a:t>• قواعد البيانات المتجهية / Vector Databases</a:t>
             </a:r>
@@ -6113,6 +6288,8 @@
                   <a:srgbClr val="333333"/>
                 </a:solidFill>
                 <a:latin typeface="Arial"/>
+                <a:cs typeface="Arial"/>
+                <a:ea typeface="Calibri"/>
               </a:rPr>
               <a:t>• 1) الفهرسة: استراتيجيات التقسيم / Indexing: Chunking</a:t>
             </a:r>
@@ -6132,6 +6309,8 @@
                   <a:srgbClr val="333333"/>
                 </a:solidFill>
                 <a:latin typeface="Arial"/>
+                <a:cs typeface="Arial"/>
+                <a:ea typeface="Calibri"/>
               </a:rPr>
               <a:t>• 2) الاسترجاع / Retrieval</a:t>
             </a:r>
@@ -6151,6 +6330,8 @@
                   <a:srgbClr val="333333"/>
                 </a:solidFill>
                 <a:latin typeface="Arial"/>
+                <a:cs typeface="Arial"/>
+                <a:ea typeface="Calibri"/>
               </a:rPr>
               <a:t>• 3) التوليد / Generation</a:t>
             </a:r>
@@ -6170,6 +6351,8 @@
                   <a:srgbClr val="333333"/>
                 </a:solidFill>
                 <a:latin typeface="Arial"/>
+                <a:cs typeface="Arial"/>
+                <a:ea typeface="Calibri"/>
               </a:rPr>
               <a:t>• 4) التقييم + 5) التحسين / Evaluation + Optimization</a:t>
             </a:r>
@@ -6189,6 +6372,8 @@
                   <a:srgbClr val="333333"/>
                 </a:solidFill>
                 <a:latin typeface="Arial"/>
+                <a:cs typeface="Arial"/>
+                <a:ea typeface="Calibri"/>
               </a:rPr>
               <a:t>• الأخطاء الشائعة / Common Pitfalls</a:t>
             </a:r>
@@ -6224,6 +6409,8 @@
                   <a:srgbClr val="666666"/>
                 </a:solidFill>
                 <a:latin typeface="Arial"/>
+                <a:cs typeface="Arial"/>
+                <a:ea typeface="Calibri"/>
               </a:rPr>
               <a:t>Module 02 — Data &amp; AI Engineering Track  |  الوحدة الثانية</a:t>
             </a:r>
@@ -6259,6 +6446,8 @@
                   <a:srgbClr val="666666"/>
                 </a:solidFill>
                 <a:latin typeface="Calibri"/>
+                <a:cs typeface="Arial"/>
+                <a:ea typeface="Calibri"/>
               </a:rPr>
               <a:t>V09  •  2/14</a:t>
             </a:r>
@@ -6294,6 +6483,8 @@
                   <a:srgbClr val="666666"/>
                 </a:solidFill>
                 <a:latin typeface="Arial"/>
+                <a:cs typeface="Arial"/>
+                <a:ea typeface="Calibri"/>
               </a:rPr>
               <a:t>Module 02 — Data &amp; AI Engineering Track  |  الوحدة الثانية</a:t>
             </a:r>
@@ -6329,6 +6520,8 @@
                   <a:srgbClr val="666666"/>
                 </a:solidFill>
                 <a:latin typeface="Calibri"/>
+                <a:cs typeface="Arial"/>
+                <a:ea typeface="Calibri"/>
               </a:rPr>
               <a:t>09_  •  2/14</a:t>
             </a:r>
@@ -6364,6 +6557,8 @@
                   <a:srgbClr val="666666"/>
                 </a:solidFill>
                 <a:latin typeface="Arial"/>
+                <a:cs typeface="Arial"/>
+                <a:ea typeface="Calibri"/>
               </a:rPr>
               <a:t>Module 02 — Data &amp; AI Engineering Track  |  الوحدة الثانية</a:t>
             </a:r>
@@ -6399,6 +6594,8 @@
                   <a:srgbClr val="666666"/>
                 </a:solidFill>
                 <a:latin typeface="Calibri"/>
+                <a:cs typeface="Arial"/>
+                <a:ea typeface="Calibri"/>
               </a:rPr>
               <a:t>09_  •  2/14</a:t>
             </a:r>
@@ -6506,6 +6703,8 @@
                   <a:srgbClr val="1F3B5C"/>
                 </a:solidFill>
                 <a:latin typeface="Arial"/>
+                <a:cs typeface="Arial"/>
+                <a:ea typeface="Calibri"/>
               </a:rPr>
               <a:t>قواعد البيانات المتجهية / Vector Databases</a:t>
             </a:r>
@@ -6548,12 +6747,14 @@
                   <a:srgbClr val="333333"/>
                 </a:solidFill>
                 <a:latin typeface="Arial"/>
+                <a:cs typeface="Arial"/>
+                <a:ea typeface="Calibri"/>
               </a:rPr>
               <a:t>• تخزين التمثيلات المتجهية (Embeddings) والبحث فيها بالتشابه: Pinecone، Weaviate، pgvector، ChromaDB.</a:t>
             </a:r>
           </a:p>
           <a:p>
-            <a:pPr algn="l" rtl="0">
+            <a:pPr algn="r" rtl="0">
               <a:spcBef>
                 <a:spcPts val="200"/>
               </a:spcBef>
@@ -6567,6 +6768,8 @@
                   <a:srgbClr val="666666"/>
                 </a:solidFill>
                 <a:latin typeface="Calibri"/>
+                <a:cs typeface="Arial"/>
+                <a:ea typeface="Calibri"/>
               </a:rPr>
               <a:t>• Store embeddings and search by similarity: Pinecone, Weaviate, pgvector, ChromaDB.</a:t>
             </a:r>
@@ -6586,12 +6789,14 @@
                   <a:srgbClr val="333333"/>
                 </a:solidFill>
                 <a:latin typeface="Arial"/>
+                <a:cs typeface="Arial"/>
+                <a:ea typeface="Calibri"/>
               </a:rPr>
               <a:t>• فهرس HNSW يمنح بحثًا تقريبيًا سريعًا (ANN) بكفاءة عالية.</a:t>
             </a:r>
           </a:p>
           <a:p>
-            <a:pPr algn="l" rtl="0">
+            <a:pPr algn="r" rtl="0">
               <a:spcBef>
                 <a:spcPts val="200"/>
               </a:spcBef>
@@ -6605,6 +6810,8 @@
                   <a:srgbClr val="666666"/>
                 </a:solidFill>
                 <a:latin typeface="Calibri"/>
+                <a:cs typeface="Arial"/>
+                <a:ea typeface="Calibri"/>
               </a:rPr>
               <a:t>• HNSW index provides fast approximate nearest-neighbor (ANN) search.</a:t>
             </a:r>
@@ -6640,6 +6847,8 @@
                   <a:srgbClr val="666666"/>
                 </a:solidFill>
                 <a:latin typeface="Arial"/>
+                <a:cs typeface="Arial"/>
+                <a:ea typeface="Calibri"/>
               </a:rPr>
               <a:t>Module 02 — Data &amp; AI Engineering Track  |  الوحدة الثانية</a:t>
             </a:r>
@@ -6675,6 +6884,8 @@
                   <a:srgbClr val="666666"/>
                 </a:solidFill>
                 <a:latin typeface="Calibri"/>
+                <a:cs typeface="Arial"/>
+                <a:ea typeface="Calibri"/>
               </a:rPr>
               <a:t>V09  •  3/14</a:t>
             </a:r>
@@ -6710,6 +6921,8 @@
                   <a:srgbClr val="666666"/>
                 </a:solidFill>
                 <a:latin typeface="Arial"/>
+                <a:cs typeface="Arial"/>
+                <a:ea typeface="Calibri"/>
               </a:rPr>
               <a:t>Module 02 — Data &amp; AI Engineering Track  |  الوحدة الثانية</a:t>
             </a:r>
@@ -6745,6 +6958,8 @@
                   <a:srgbClr val="666666"/>
                 </a:solidFill>
                 <a:latin typeface="Calibri"/>
+                <a:cs typeface="Arial"/>
+                <a:ea typeface="Calibri"/>
               </a:rPr>
               <a:t>09_  •  3/14</a:t>
             </a:r>
@@ -6780,6 +6995,8 @@
                   <a:srgbClr val="666666"/>
                 </a:solidFill>
                 <a:latin typeface="Arial"/>
+                <a:cs typeface="Arial"/>
+                <a:ea typeface="Calibri"/>
               </a:rPr>
               <a:t>Module 02 — Data &amp; AI Engineering Track  |  الوحدة الثانية</a:t>
             </a:r>
@@ -6815,6 +7032,8 @@
                   <a:srgbClr val="666666"/>
                 </a:solidFill>
                 <a:latin typeface="Calibri"/>
+                <a:cs typeface="Arial"/>
+                <a:ea typeface="Calibri"/>
               </a:rPr>
               <a:t>09_  •  3/14</a:t>
             </a:r>
@@ -6876,6 +7095,8 @@
                   <a:srgbClr val="1F3B5C"/>
                 </a:solidFill>
                 <a:latin typeface="Arial"/>
+                <a:cs typeface="Arial"/>
+                <a:ea typeface="Calibri"/>
               </a:rPr>
               <a:t>خط أنابيب RAG / RAG Pipeline</a:t>
             </a:r>
@@ -6931,6 +7152,8 @@
                   <a:srgbClr val="333333"/>
                 </a:solidFill>
                 <a:latin typeface="Arial"/>
+                <a:cs typeface="Arial"/>
+                <a:ea typeface="Calibri"/>
               </a:rPr>
               <a:t>1) الفهرسة</a:t>
             </a:r>
@@ -6943,6 +7166,8 @@
                   <a:srgbClr val="666666"/>
                 </a:solidFill>
                 <a:latin typeface="Calibri"/>
+                <a:cs typeface="Arial"/>
+                <a:ea typeface="Calibri"/>
               </a:rPr>
               <a:t>Indexing</a:t>
             </a:r>
@@ -7042,6 +7267,8 @@
                   <a:srgbClr val="333333"/>
                 </a:solidFill>
                 <a:latin typeface="Arial"/>
+                <a:cs typeface="Arial"/>
+                <a:ea typeface="Calibri"/>
               </a:rPr>
               <a:t>2) الاسترجاع</a:t>
             </a:r>
@@ -7054,6 +7281,8 @@
                   <a:srgbClr val="666666"/>
                 </a:solidFill>
                 <a:latin typeface="Calibri"/>
+                <a:cs typeface="Arial"/>
+                <a:ea typeface="Calibri"/>
               </a:rPr>
               <a:t>Retrieval</a:t>
             </a:r>
@@ -7153,6 +7382,8 @@
                   <a:srgbClr val="333333"/>
                 </a:solidFill>
                 <a:latin typeface="Arial"/>
+                <a:cs typeface="Arial"/>
+                <a:ea typeface="Calibri"/>
               </a:rPr>
               <a:t>3) التوليد</a:t>
             </a:r>
@@ -7165,6 +7396,8 @@
                   <a:srgbClr val="666666"/>
                 </a:solidFill>
                 <a:latin typeface="Calibri"/>
+                <a:cs typeface="Arial"/>
+                <a:ea typeface="Calibri"/>
               </a:rPr>
               <a:t>Generation</a:t>
             </a:r>
@@ -7264,6 +7497,8 @@
                   <a:srgbClr val="333333"/>
                 </a:solidFill>
                 <a:latin typeface="Arial"/>
+                <a:cs typeface="Arial"/>
+                <a:ea typeface="Calibri"/>
               </a:rPr>
               <a:t>4) التقييم</a:t>
             </a:r>
@@ -7276,6 +7511,8 @@
                   <a:srgbClr val="666666"/>
                 </a:solidFill>
                 <a:latin typeface="Calibri"/>
+                <a:cs typeface="Arial"/>
+                <a:ea typeface="Calibri"/>
               </a:rPr>
               <a:t>Evaluation</a:t>
             </a:r>
@@ -7375,6 +7612,8 @@
                   <a:srgbClr val="333333"/>
                 </a:solidFill>
                 <a:latin typeface="Arial"/>
+                <a:cs typeface="Arial"/>
+                <a:ea typeface="Calibri"/>
               </a:rPr>
               <a:t>5) التحسين</a:t>
             </a:r>
@@ -7387,6 +7626,8 @@
                   <a:srgbClr val="666666"/>
                 </a:solidFill>
                 <a:latin typeface="Calibri"/>
+                <a:cs typeface="Arial"/>
+                <a:ea typeface="Calibri"/>
               </a:rPr>
               <a:t>Optimization</a:t>
             </a:r>
@@ -7442,6 +7683,8 @@
                   <a:srgbClr val="333333"/>
                 </a:solidFill>
                 <a:latin typeface="Arial"/>
+                <a:cs typeface="Arial"/>
+                <a:ea typeface="Calibri"/>
               </a:rPr>
               <a:t>تقسيم تكراري + HNSW</a:t>
             </a:r>
@@ -7497,6 +7740,8 @@
                   <a:srgbClr val="333333"/>
                 </a:solidFill>
                 <a:latin typeface="Arial"/>
+                <a:cs typeface="Arial"/>
+                <a:ea typeface="Calibri"/>
               </a:rPr>
               <a:t>بحث هجين + إعادة ترتيب</a:t>
             </a:r>
@@ -7552,6 +7797,8 @@
                   <a:srgbClr val="333333"/>
                 </a:solidFill>
                 <a:latin typeface="Arial"/>
+                <a:cs typeface="Arial"/>
+                <a:ea typeface="Calibri"/>
               </a:rPr>
               <a:t>موجِّه مقيَّد بالمصادر</a:t>
             </a:r>
@@ -7607,6 +7854,8 @@
                   <a:srgbClr val="333333"/>
                 </a:solidFill>
                 <a:latin typeface="Arial"/>
+                <a:cs typeface="Arial"/>
+                <a:ea typeface="Calibri"/>
               </a:rPr>
               <a:t>مثلث RAG (RAGAS)</a:t>
             </a:r>
@@ -7662,6 +7911,8 @@
                   <a:srgbClr val="333333"/>
                 </a:solidFill>
                 <a:latin typeface="Arial"/>
+                <a:cs typeface="Arial"/>
+                <a:ea typeface="Calibri"/>
               </a:rPr>
               <a:t>تخزين مؤقت + توجيه</a:t>
             </a:r>
@@ -7697,6 +7948,8 @@
                   <a:srgbClr val="666666"/>
                 </a:solidFill>
                 <a:latin typeface="Arial"/>
+                <a:cs typeface="Arial"/>
+                <a:ea typeface="Calibri"/>
               </a:rPr>
               <a:t>من الفهرسة إلى التقييم — المسار التطبيقي في مختبر L03.</a:t>
             </a:r>
@@ -7704,6 +7957,11 @@
           <a:p>
             <a:pPr algn="r" rtl="0"/>
             <a:r>
+              <a:rPr>
+                <a:latin typeface="Calibri"/>
+                <a:cs typeface="Arial"/>
+                <a:ea typeface="Calibri"/>
+              </a:rPr>
               <a:t>From indexing to evaluation — applied in lab L03.</a:t>
             </a:r>
           </a:p>
@@ -7738,6 +7996,8 @@
                   <a:srgbClr val="666666"/>
                 </a:solidFill>
                 <a:latin typeface="Arial"/>
+                <a:cs typeface="Arial"/>
+                <a:ea typeface="Calibri"/>
               </a:rPr>
               <a:t>Module 02 — Data &amp; AI Engineering Track  |  الوحدة الثانية</a:t>
             </a:r>
@@ -7773,6 +8033,8 @@
                   <a:srgbClr val="666666"/>
                 </a:solidFill>
                 <a:latin typeface="Calibri"/>
+                <a:cs typeface="Arial"/>
+                <a:ea typeface="Calibri"/>
               </a:rPr>
               <a:t>09_  •  4/14</a:t>
             </a:r>
@@ -7808,6 +8070,8 @@
                   <a:srgbClr val="666666"/>
                 </a:solidFill>
                 <a:latin typeface="Arial"/>
+                <a:cs typeface="Arial"/>
+                <a:ea typeface="Calibri"/>
               </a:rPr>
               <a:t>Module 02 — Data &amp; AI Engineering Track  |  الوحدة الثانية</a:t>
             </a:r>
@@ -7843,6 +8107,8 @@
                   <a:srgbClr val="666666"/>
                 </a:solidFill>
                 <a:latin typeface="Calibri"/>
+                <a:cs typeface="Arial"/>
+                <a:ea typeface="Calibri"/>
               </a:rPr>
               <a:t>09_  •  4/14</a:t>
             </a:r>
@@ -7950,6 +8216,8 @@
                   <a:srgbClr val="1F3B5C"/>
                 </a:solidFill>
                 <a:latin typeface="Arial"/>
+                <a:cs typeface="Arial"/>
+                <a:ea typeface="Calibri"/>
               </a:rPr>
               <a:t>1) الفهرسة: استراتيجيات التقسيم / Indexing: Chunking</a:t>
             </a:r>
@@ -7992,12 +8260,14 @@
                   <a:srgbClr val="333333"/>
                 </a:solidFill>
                 <a:latin typeface="Arial"/>
+                <a:cs typeface="Arial"/>
+                <a:ea typeface="Calibri"/>
               </a:rPr>
               <a:t>• ثابت الحجم: أبسطها مع تداخل لكنه يقطع الجُمل. دلالي: تجميع حسب تشابه الكوساينس، حساس للعتبة.</a:t>
             </a:r>
           </a:p>
           <a:p>
-            <a:pPr algn="l" rtl="0">
+            <a:pPr algn="r" rtl="0">
               <a:spcBef>
                 <a:spcPts val="200"/>
               </a:spcBef>
@@ -8011,6 +8281,8 @@
                   <a:srgbClr val="666666"/>
                 </a:solidFill>
                 <a:latin typeface="Calibri"/>
+                <a:cs typeface="Arial"/>
+                <a:ea typeface="Calibri"/>
               </a:rPr>
               <a:t>• Fixed-size: simplest with overlap but breaks sentences. Semantic: cosine grouping, threshold-sensitive.</a:t>
             </a:r>
@@ -8030,12 +8302,14 @@
                   <a:srgbClr val="333333"/>
                 </a:solidFill>
                 <a:latin typeface="Arial"/>
+                <a:cs typeface="Arial"/>
+                <a:ea typeface="Calibri"/>
               </a:rPr>
               <a:t>• تكراري (الموصى به افتراضيًا): فصل بالفقرات ثم تقسيم ما تجاوز الحد. بحسب البنية: العناوين. بالنموذج اللغوي: الأدق والأغلى.</a:t>
             </a:r>
           </a:p>
           <a:p>
-            <a:pPr algn="l" rtl="0">
+            <a:pPr algn="r" rtl="0">
               <a:spcBef>
                 <a:spcPts val="200"/>
               </a:spcBef>
@@ -8049,6 +8323,8 @@
                   <a:srgbClr val="666666"/>
                 </a:solidFill>
                 <a:latin typeface="Calibri"/>
+                <a:cs typeface="Arial"/>
+                <a:ea typeface="Calibri"/>
               </a:rPr>
               <a:t>• Recursive (recommended default): split by paragraphs then oversized chunks. Structure-based: headings. LLM-based: most accurate, most expensive.</a:t>
             </a:r>
@@ -8084,6 +8360,8 @@
                   <a:srgbClr val="666666"/>
                 </a:solidFill>
                 <a:latin typeface="Arial"/>
+                <a:cs typeface="Arial"/>
+                <a:ea typeface="Calibri"/>
               </a:rPr>
               <a:t>Module 02 — Data &amp; AI Engineering Track  |  الوحدة الثانية</a:t>
             </a:r>
@@ -8119,6 +8397,8 @@
                   <a:srgbClr val="666666"/>
                 </a:solidFill>
                 <a:latin typeface="Calibri"/>
+                <a:cs typeface="Arial"/>
+                <a:ea typeface="Calibri"/>
               </a:rPr>
               <a:t>V09  •  4/14</a:t>
             </a:r>
@@ -8154,6 +8434,8 @@
                   <a:srgbClr val="666666"/>
                 </a:solidFill>
                 <a:latin typeface="Arial"/>
+                <a:cs typeface="Arial"/>
+                <a:ea typeface="Calibri"/>
               </a:rPr>
               <a:t>Module 02 — Data &amp; AI Engineering Track  |  الوحدة الثانية</a:t>
             </a:r>
@@ -8189,6 +8471,8 @@
                   <a:srgbClr val="666666"/>
                 </a:solidFill>
                 <a:latin typeface="Calibri"/>
+                <a:cs typeface="Arial"/>
+                <a:ea typeface="Calibri"/>
               </a:rPr>
               <a:t>09_  •  5/14</a:t>
             </a:r>
@@ -8224,6 +8508,8 @@
                   <a:srgbClr val="666666"/>
                 </a:solidFill>
                 <a:latin typeface="Arial"/>
+                <a:cs typeface="Arial"/>
+                <a:ea typeface="Calibri"/>
               </a:rPr>
               <a:t>Module 02 — Data &amp; AI Engineering Track  |  الوحدة الثانية</a:t>
             </a:r>
@@ -8259,6 +8545,8 @@
                   <a:srgbClr val="666666"/>
                 </a:solidFill>
                 <a:latin typeface="Calibri"/>
+                <a:cs typeface="Arial"/>
+                <a:ea typeface="Calibri"/>
               </a:rPr>
               <a:t>09_  •  5/14</a:t>
             </a:r>
@@ -8320,6 +8608,8 @@
                   <a:srgbClr val="1F3B5C"/>
                 </a:solidFill>
                 <a:latin typeface="Arial"/>
+                <a:cs typeface="Arial"/>
+                <a:ea typeface="Calibri"/>
               </a:rPr>
               <a:t>استراتيجيات تقسيم النصوص / Chunking Strategies</a:t>
             </a:r>
@@ -8375,6 +8665,8 @@
                   <a:srgbClr val="333333"/>
                 </a:solidFill>
                 <a:latin typeface="Arial"/>
+                <a:cs typeface="Arial"/>
+                <a:ea typeface="Calibri"/>
               </a:rPr>
               <a:t>ثابت الحجم</a:t>
             </a:r>
@@ -8387,6 +8679,8 @@
                   <a:srgbClr val="666666"/>
                 </a:solidFill>
                 <a:latin typeface="Calibri"/>
+                <a:cs typeface="Arial"/>
+                <a:ea typeface="Calibri"/>
               </a:rPr>
               <a:t>Fixed-size</a:t>
             </a:r>
@@ -8442,6 +8736,8 @@
                   <a:srgbClr val="333333"/>
                 </a:solidFill>
                 <a:latin typeface="Arial"/>
+                <a:cs typeface="Arial"/>
+                <a:ea typeface="Calibri"/>
               </a:rPr>
               <a:t>أبسطها — يقطع الجُمل</a:t>
             </a:r>
@@ -8497,6 +8793,8 @@
                   <a:srgbClr val="333333"/>
                 </a:solidFill>
                 <a:latin typeface="Arial"/>
+                <a:cs typeface="Arial"/>
+                <a:ea typeface="Calibri"/>
               </a:rPr>
               <a:t>دلالي</a:t>
             </a:r>
@@ -8509,6 +8807,8 @@
                   <a:srgbClr val="666666"/>
                 </a:solidFill>
                 <a:latin typeface="Calibri"/>
+                <a:cs typeface="Arial"/>
+                <a:ea typeface="Calibri"/>
               </a:rPr>
               <a:t>Semantic</a:t>
             </a:r>
@@ -8564,6 +8864,8 @@
                   <a:srgbClr val="333333"/>
                 </a:solidFill>
                 <a:latin typeface="Arial"/>
+                <a:cs typeface="Arial"/>
+                <a:ea typeface="Calibri"/>
               </a:rPr>
               <a:t>تماسك أفضل — حساس للعتبة</a:t>
             </a:r>
@@ -8619,6 +8921,8 @@
                   <a:srgbClr val="333333"/>
                 </a:solidFill>
                 <a:latin typeface="Arial"/>
+                <a:cs typeface="Arial"/>
+                <a:ea typeface="Calibri"/>
               </a:rPr>
               <a:t>تكراري ★</a:t>
             </a:r>
@@ -8631,6 +8935,8 @@
                   <a:srgbClr val="666666"/>
                 </a:solidFill>
                 <a:latin typeface="Calibri"/>
+                <a:cs typeface="Arial"/>
+                <a:ea typeface="Calibri"/>
               </a:rPr>
               <a:t>Recursive</a:t>
             </a:r>
@@ -8686,6 +8992,8 @@
                   <a:srgbClr val="333333"/>
                 </a:solidFill>
                 <a:latin typeface="Arial"/>
+                <a:cs typeface="Arial"/>
+                <a:ea typeface="Calibri"/>
               </a:rPr>
               <a:t>الموصى به افتراضيًا</a:t>
             </a:r>
@@ -8741,6 +9049,8 @@
                   <a:srgbClr val="333333"/>
                 </a:solidFill>
                 <a:latin typeface="Arial"/>
+                <a:cs typeface="Arial"/>
+                <a:ea typeface="Calibri"/>
               </a:rPr>
               <a:t>بحسب البنية</a:t>
             </a:r>
@@ -8753,6 +9063,8 @@
                   <a:srgbClr val="666666"/>
                 </a:solidFill>
                 <a:latin typeface="Calibri"/>
+                <a:cs typeface="Arial"/>
+                <a:ea typeface="Calibri"/>
               </a:rPr>
               <a:t>Structure-based</a:t>
             </a:r>
@@ -8808,6 +9120,8 @@
                   <a:srgbClr val="333333"/>
                 </a:solidFill>
                 <a:latin typeface="Arial"/>
+                <a:cs typeface="Arial"/>
+                <a:ea typeface="Calibri"/>
               </a:rPr>
               <a:t>عناوين وأقسام — يُدمج مع التكراري</a:t>
             </a:r>
@@ -8863,6 +9177,8 @@
                   <a:srgbClr val="333333"/>
                 </a:solidFill>
                 <a:latin typeface="Arial"/>
+                <a:cs typeface="Arial"/>
+                <a:ea typeface="Calibri"/>
               </a:rPr>
               <a:t>بالنموذج اللغوي</a:t>
             </a:r>
@@ -8875,6 +9191,8 @@
                   <a:srgbClr val="666666"/>
                 </a:solidFill>
                 <a:latin typeface="Calibri"/>
+                <a:cs typeface="Arial"/>
+                <a:ea typeface="Calibri"/>
               </a:rPr>
               <a:t>LLM-based</a:t>
             </a:r>
@@ -8930,6 +9248,8 @@
                   <a:srgbClr val="333333"/>
                 </a:solidFill>
                 <a:latin typeface="Arial"/>
+                <a:cs typeface="Arial"/>
+                <a:ea typeface="Calibri"/>
               </a:rPr>
               <a:t>الأدق — الأغلى حسابيًا</a:t>
             </a:r>
@@ -8965,6 +9285,8 @@
                   <a:srgbClr val="666666"/>
                 </a:solidFill>
                 <a:latin typeface="Arial"/>
+                <a:cs typeface="Arial"/>
+                <a:ea typeface="Calibri"/>
               </a:rPr>
               <a:t>★ التقسيم التكراري: فصل بالفقرات ثم تقسيم ما تجاوز الحد الأقصى.</a:t>
             </a:r>
@@ -8972,6 +9294,11 @@
           <a:p>
             <a:pPr algn="r" rtl="0"/>
             <a:r>
+              <a:rPr>
+                <a:latin typeface="Calibri"/>
+                <a:cs typeface="Arial"/>
+                <a:ea typeface="Calibri"/>
+              </a:rPr>
               <a:t>★ Recursive: split by paragraphs, then oversized chunks.</a:t>
             </a:r>
           </a:p>
@@ -9006,6 +9333,8 @@
                   <a:srgbClr val="666666"/>
                 </a:solidFill>
                 <a:latin typeface="Arial"/>
+                <a:cs typeface="Arial"/>
+                <a:ea typeface="Calibri"/>
               </a:rPr>
               <a:t>Module 02 — Data &amp; AI Engineering Track  |  الوحدة الثانية</a:t>
             </a:r>
@@ -9041,6 +9370,8 @@
                   <a:srgbClr val="666666"/>
                 </a:solidFill>
                 <a:latin typeface="Calibri"/>
+                <a:cs typeface="Arial"/>
+                <a:ea typeface="Calibri"/>
               </a:rPr>
               <a:t>09_  •  6/14</a:t>
             </a:r>
@@ -9076,6 +9407,8 @@
                   <a:srgbClr val="666666"/>
                 </a:solidFill>
                 <a:latin typeface="Arial"/>
+                <a:cs typeface="Arial"/>
+                <a:ea typeface="Calibri"/>
               </a:rPr>
               <a:t>Module 02 — Data &amp; AI Engineering Track  |  الوحدة الثانية</a:t>
             </a:r>
@@ -9111,6 +9444,8 @@
                   <a:srgbClr val="666666"/>
                 </a:solidFill>
                 <a:latin typeface="Calibri"/>
+                <a:cs typeface="Arial"/>
+                <a:ea typeface="Calibri"/>
               </a:rPr>
               <a:t>09_  •  6/14</a:t>
             </a:r>
@@ -9218,6 +9553,8 @@
                   <a:srgbClr val="1F3B5C"/>
                 </a:solidFill>
                 <a:latin typeface="Arial"/>
+                <a:cs typeface="Arial"/>
+                <a:ea typeface="Calibri"/>
               </a:rPr>
               <a:t>2) الاسترجاع / Retrieval</a:t>
             </a:r>
@@ -9260,12 +9597,14 @@
                   <a:srgbClr val="333333"/>
                 </a:solidFill>
                 <a:latin typeface="Arial"/>
+                <a:cs typeface="Arial"/>
+                <a:ea typeface="Calibri"/>
               </a:rPr>
               <a:t>• بحث هجين: كثيف (Dense) + متناثر (BM25) يغطي المعنى والكلمات المفتاحية معًا.</a:t>
             </a:r>
           </a:p>
           <a:p>
-            <a:pPr algn="l" rtl="0">
+            <a:pPr algn="r" rtl="0">
               <a:spcBef>
                 <a:spcPts val="200"/>
               </a:spcBef>
@@ -9279,6 +9618,8 @@
                   <a:srgbClr val="666666"/>
                 </a:solidFill>
                 <a:latin typeface="Calibri"/>
+                <a:cs typeface="Arial"/>
+                <a:ea typeface="Calibri"/>
               </a:rPr>
               <a:t>• Hybrid search: dense + sparse (BM25) covers meaning and keywords.</a:t>
             </a:r>
@@ -9298,12 +9639,14 @@
                   <a:srgbClr val="333333"/>
                 </a:solidFill>
                 <a:latin typeface="Arial"/>
+                <a:cs typeface="Arial"/>
+                <a:ea typeface="Calibri"/>
               </a:rPr>
               <a:t>• إعادة ترتيب Cross-encoder وتحويل الاستعلام Multi-Query يرفعان دقة النتائج.</a:t>
             </a:r>
           </a:p>
           <a:p>
-            <a:pPr algn="l" rtl="0">
+            <a:pPr algn="r" rtl="0">
               <a:spcBef>
                 <a:spcPts val="200"/>
               </a:spcBef>
@@ -9317,6 +9660,8 @@
                   <a:srgbClr val="666666"/>
                 </a:solidFill>
                 <a:latin typeface="Calibri"/>
+                <a:cs typeface="Arial"/>
+                <a:ea typeface="Calibri"/>
               </a:rPr>
               <a:t>• Cross-encoder reranking and multi-query transformation improve precision.</a:t>
             </a:r>
@@ -9352,6 +9697,8 @@
                   <a:srgbClr val="666666"/>
                 </a:solidFill>
                 <a:latin typeface="Arial"/>
+                <a:cs typeface="Arial"/>
+                <a:ea typeface="Calibri"/>
               </a:rPr>
               <a:t>Module 02 — Data &amp; AI Engineering Track  |  الوحدة الثانية</a:t>
             </a:r>
@@ -9387,6 +9734,8 @@
                   <a:srgbClr val="666666"/>
                 </a:solidFill>
                 <a:latin typeface="Calibri"/>
+                <a:cs typeface="Arial"/>
+                <a:ea typeface="Calibri"/>
               </a:rPr>
               <a:t>V09  •  5/14</a:t>
             </a:r>
@@ -9422,6 +9771,8 @@
                   <a:srgbClr val="666666"/>
                 </a:solidFill>
                 <a:latin typeface="Arial"/>
+                <a:cs typeface="Arial"/>
+                <a:ea typeface="Calibri"/>
               </a:rPr>
               <a:t>Module 02 — Data &amp; AI Engineering Track  |  الوحدة الثانية</a:t>
             </a:r>
@@ -9457,6 +9808,8 @@
                   <a:srgbClr val="666666"/>
                 </a:solidFill>
                 <a:latin typeface="Calibri"/>
+                <a:cs typeface="Arial"/>
+                <a:ea typeface="Calibri"/>
               </a:rPr>
               <a:t>09_  •  7/14</a:t>
             </a:r>
@@ -9492,6 +9845,8 @@
                   <a:srgbClr val="666666"/>
                 </a:solidFill>
                 <a:latin typeface="Arial"/>
+                <a:cs typeface="Arial"/>
+                <a:ea typeface="Calibri"/>
               </a:rPr>
               <a:t>Module 02 — Data &amp; AI Engineering Track  |  الوحدة الثانية</a:t>
             </a:r>
@@ -9527,6 +9882,8 @@
                   <a:srgbClr val="666666"/>
                 </a:solidFill>
                 <a:latin typeface="Calibri"/>
+                <a:cs typeface="Arial"/>
+                <a:ea typeface="Calibri"/>
               </a:rPr>
               <a:t>09_  •  7/14</a:t>
             </a:r>
@@ -9634,6 +9991,8 @@
                   <a:srgbClr val="1F3B5C"/>
                 </a:solidFill>
                 <a:latin typeface="Arial"/>
+                <a:cs typeface="Arial"/>
+                <a:ea typeface="Calibri"/>
               </a:rPr>
               <a:t>3) التوليد / Generation</a:t>
             </a:r>
@@ -9676,12 +10035,14 @@
                   <a:srgbClr val="333333"/>
                 </a:solidFill>
                 <a:latin typeface="Arial"/>
+                <a:cs typeface="Arial"/>
+                <a:ea typeface="Calibri"/>
               </a:rPr>
               <a:t>• موجِّه مقيَّد بالمصادر المسترجعة (Grounded Prompting) مع الاستشهاد: «أجب فقط من السياق المرفق».</a:t>
             </a:r>
           </a:p>
           <a:p>
-            <a:pPr algn="l" rtl="0">
+            <a:pPr algn="r" rtl="0">
               <a:spcBef>
                 <a:spcPts val="200"/>
               </a:spcBef>
@@ -9695,6 +10056,8 @@
                   <a:srgbClr val="666666"/>
                 </a:solidFill>
                 <a:latin typeface="Calibri"/>
+                <a:cs typeface="Arial"/>
+                <a:ea typeface="Calibri"/>
               </a:rPr>
               <a:t>• Grounded prompting strictly on retrieved sources with citations: 'answer only from the provided context'.</a:t>
             </a:r>
@@ -9730,6 +10093,8 @@
                   <a:srgbClr val="666666"/>
                 </a:solidFill>
                 <a:latin typeface="Arial"/>
+                <a:cs typeface="Arial"/>
+                <a:ea typeface="Calibri"/>
               </a:rPr>
               <a:t>Module 02 — Data &amp; AI Engineering Track  |  الوحدة الثانية</a:t>
             </a:r>
@@ -9765,6 +10130,8 @@
                   <a:srgbClr val="666666"/>
                 </a:solidFill>
                 <a:latin typeface="Calibri"/>
+                <a:cs typeface="Arial"/>
+                <a:ea typeface="Calibri"/>
               </a:rPr>
               <a:t>V09  •  6/14</a:t>
             </a:r>
@@ -9800,6 +10167,8 @@
                   <a:srgbClr val="666666"/>
                 </a:solidFill>
                 <a:latin typeface="Arial"/>
+                <a:cs typeface="Arial"/>
+                <a:ea typeface="Calibri"/>
               </a:rPr>
               <a:t>Module 02 — Data &amp; AI Engineering Track  |  الوحدة الثانية</a:t>
             </a:r>
@@ -9835,6 +10204,8 @@
                   <a:srgbClr val="666666"/>
                 </a:solidFill>
                 <a:latin typeface="Calibri"/>
+                <a:cs typeface="Arial"/>
+                <a:ea typeface="Calibri"/>
               </a:rPr>
               <a:t>09_  •  8/14</a:t>
             </a:r>
@@ -9870,6 +10241,8 @@
                   <a:srgbClr val="666666"/>
                 </a:solidFill>
                 <a:latin typeface="Arial"/>
+                <a:cs typeface="Arial"/>
+                <a:ea typeface="Calibri"/>
               </a:rPr>
               <a:t>Module 02 — Data &amp; AI Engineering Track  |  الوحدة الثانية</a:t>
             </a:r>
@@ -9905,6 +10278,8 @@
                   <a:srgbClr val="666666"/>
                 </a:solidFill>
                 <a:latin typeface="Calibri"/>
+                <a:cs typeface="Arial"/>
+                <a:ea typeface="Calibri"/>
               </a:rPr>
               <a:t>09_  •  8/14</a:t>
             </a:r>
@@ -10012,6 +10387,8 @@
                   <a:srgbClr val="1F3B5C"/>
                 </a:solidFill>
                 <a:latin typeface="Arial"/>
+                <a:cs typeface="Arial"/>
+                <a:ea typeface="Calibri"/>
               </a:rPr>
               <a:t>4) التقييم + 5) التحسين / Evaluation + Optimization</a:t>
             </a:r>
@@ -10054,12 +10431,14 @@
                   <a:srgbClr val="333333"/>
                 </a:solidFill>
                 <a:latin typeface="Arial"/>
+                <a:cs typeface="Arial"/>
+                <a:ea typeface="Calibri"/>
               </a:rPr>
               <a:t>• مثلث RAG: الوفاء (Faithfulness)، ملاءمة الإجابة (Answer Relevancy)، دقة السياق (Context Precision) — بإطار RAGAS.</a:t>
             </a:r>
           </a:p>
           <a:p>
-            <a:pPr algn="l" rtl="0">
+            <a:pPr algn="r" rtl="0">
               <a:spcBef>
                 <a:spcPts val="200"/>
               </a:spcBef>
@@ -10073,6 +10452,8 @@
                   <a:srgbClr val="666666"/>
                 </a:solidFill>
                 <a:latin typeface="Calibri"/>
+                <a:cs typeface="Arial"/>
+                <a:ea typeface="Calibri"/>
               </a:rPr>
               <a:t>• RAG triad: faithfulness, answer relevancy, context precision — measured with RAGAS.</a:t>
             </a:r>
@@ -10092,12 +10473,14 @@
                   <a:srgbClr val="333333"/>
                 </a:solidFill>
                 <a:latin typeface="Arial"/>
+                <a:cs typeface="Arial"/>
+                <a:ea typeface="Calibri"/>
               </a:rPr>
               <a:t>• التحسين: تخزين دلالي مؤقت، توجيه الطلبات بين النماذج، ومراقبة مستمرة.</a:t>
             </a:r>
           </a:p>
           <a:p>
-            <a:pPr algn="l" rtl="0">
+            <a:pPr algn="r" rtl="0">
               <a:spcBef>
                 <a:spcPts val="200"/>
               </a:spcBef>
@@ -10111,6 +10494,8 @@
                   <a:srgbClr val="666666"/>
                 </a:solidFill>
                 <a:latin typeface="Calibri"/>
+                <a:cs typeface="Arial"/>
+                <a:ea typeface="Calibri"/>
               </a:rPr>
               <a:t>• Optimization: semantic caching, model routing, continuous monitoring.</a:t>
             </a:r>
@@ -10146,6 +10531,8 @@
                   <a:srgbClr val="666666"/>
                 </a:solidFill>
                 <a:latin typeface="Arial"/>
+                <a:cs typeface="Arial"/>
+                <a:ea typeface="Calibri"/>
               </a:rPr>
               <a:t>Module 02 — Data &amp; AI Engineering Track  |  الوحدة الثانية</a:t>
             </a:r>
@@ -10181,6 +10568,8 @@
                   <a:srgbClr val="666666"/>
                 </a:solidFill>
                 <a:latin typeface="Calibri"/>
+                <a:cs typeface="Arial"/>
+                <a:ea typeface="Calibri"/>
               </a:rPr>
               <a:t>V09  •  7/14</a:t>
             </a:r>
@@ -10216,6 +10605,8 @@
                   <a:srgbClr val="666666"/>
                 </a:solidFill>
                 <a:latin typeface="Arial"/>
+                <a:cs typeface="Arial"/>
+                <a:ea typeface="Calibri"/>
               </a:rPr>
               <a:t>Module 02 — Data &amp; AI Engineering Track  |  الوحدة الثانية</a:t>
             </a:r>
@@ -10251,6 +10642,8 @@
                   <a:srgbClr val="666666"/>
                 </a:solidFill>
                 <a:latin typeface="Calibri"/>
+                <a:cs typeface="Arial"/>
+                <a:ea typeface="Calibri"/>
               </a:rPr>
               <a:t>09_  •  9/14</a:t>
             </a:r>
@@ -10286,6 +10679,8 @@
                   <a:srgbClr val="666666"/>
                 </a:solidFill>
                 <a:latin typeface="Arial"/>
+                <a:cs typeface="Arial"/>
+                <a:ea typeface="Calibri"/>
               </a:rPr>
               <a:t>Module 02 — Data &amp; AI Engineering Track  |  الوحدة الثانية</a:t>
             </a:r>
@@ -10321,6 +10716,8 @@
                   <a:srgbClr val="666666"/>
                 </a:solidFill>
                 <a:latin typeface="Calibri"/>
+                <a:cs typeface="Arial"/>
+                <a:ea typeface="Calibri"/>
               </a:rPr>
               <a:t>09_  •  9/14</a:t>
             </a:r>

--- a/output/Module02_V09_Updated.pptx
+++ b/output/Module02_V09_Updated.pptx
@@ -13,8 +13,9 @@
     <p:sldId id="268" r:id="rId19"/>
     <p:sldId id="260" r:id="rId11"/>
     <p:sldId id="261" r:id="rId12"/>
+    <p:sldId id="269" r:id="rId20"/>
     <p:sldId id="262" r:id="rId13"/>
-    <p:sldId id="269" r:id="rId20"/>
+    <p:sldId id="270" r:id="rId21"/>
     <p:sldId id="263" r:id="rId14"/>
     <p:sldId id="264" r:id="rId15"/>
     <p:sldId id="265" r:id="rId16"/>
@@ -3131,15 +3132,13 @@
           </a:bodyPr>
           <a:lstStyle/>
           <a:p>
-            <a:pPr algn="r" rtl="0"/>
+            <a:pPr algn="l" rtl="0"/>
             <a:r>
               <a:rPr sz="2800" b="1">
                 <a:solidFill>
                   <a:srgbClr val="1F4E79"/>
                 </a:solidFill>
                 <a:latin typeface="Calibri"/>
-                <a:cs typeface="Arial"/>
-                <a:ea typeface="Calibri"/>
               </a:rPr>
               <a:t>Module 02  |  V09</a:t>
             </a:r>
@@ -3175,8 +3174,6 @@
                   <a:srgbClr val="1F3B5C"/>
                 </a:solidFill>
                 <a:latin typeface="Arial"/>
-                <a:cs typeface="Arial"/>
-                <a:ea typeface="Calibri"/>
               </a:rPr>
               <a:t>قواعد البيانات المتجهية + RAG التطبيقي</a:t>
             </a:r>
@@ -3205,15 +3202,13 @@
           </a:bodyPr>
           <a:lstStyle/>
           <a:p>
-            <a:pPr algn="r" rtl="0"/>
+            <a:pPr algn="l" rtl="0"/>
             <a:r>
               <a:rPr sz="3000" b="0">
                 <a:solidFill>
                   <a:srgbClr val="333333"/>
                 </a:solidFill>
                 <a:latin typeface="Calibri"/>
-                <a:cs typeface="Arial"/>
-                <a:ea typeface="Calibri"/>
               </a:rPr>
               <a:t>Vector Databases + Applied RAG</a:t>
             </a:r>
@@ -3222,14 +3217,14 @@
       </p:sp>
       <p:sp>
         <p:nvSpPr>
-          <p:cNvPr id="5" name="TextBox 4"/>
+          <p:cNvPr id="6" name="TextBox 5"/>
           <p:cNvSpPr txBox="1"/>
           <p:nvPr/>
         </p:nvSpPr>
         <p:spPr>
           <a:xfrm>
-            <a:off x="822960" y="4937760"/>
-            <a:ext cx="10515600" cy="548640"/>
+            <a:off x="822960" y="5486400"/>
+            <a:ext cx="10515600" cy="457200"/>
           </a:xfrm>
           <a:prstGeom prst="rect">
             <a:avLst/>
@@ -3242,31 +3237,29 @@
           </a:bodyPr>
           <a:lstStyle/>
           <a:p>
-            <a:pPr algn="r" rtl="1"/>
-            <a:r>
-              <a:rPr sz="1800" b="0">
+            <a:pPr algn="l" rtl="0"/>
+            <a:r>
+              <a:rPr sz="1400" b="0">
                 <a:solidFill>
                   <a:srgbClr val="666666"/>
                 </a:solidFill>
-                <a:latin typeface="Arial"/>
-                <a:cs typeface="Arial"/>
-                <a:ea typeface="Calibri"/>
-              </a:rPr>
-              <a:t>Module 02 — Data &amp; AI Engineering Track  |  الوحدة الثانية</a:t>
-            </a:r>
-          </a:p>
-        </p:txBody>
-      </p:sp>
-      <p:sp>
-        <p:nvSpPr>
-          <p:cNvPr id="6" name="TextBox 5"/>
+                <a:latin typeface="Calibri"/>
+              </a:rPr>
+              <a:t>Light theme  |  Bilingual AR/EN  |  Ready to present</a:t>
+            </a:r>
+          </a:p>
+        </p:txBody>
+      </p:sp>
+      <p:sp>
+        <p:nvSpPr>
+          <p:cNvPr id="7" name="TextBox 6"/>
           <p:cNvSpPr txBox="1"/>
           <p:nvPr/>
         </p:nvSpPr>
         <p:spPr>
           <a:xfrm>
-            <a:off x="822960" y="5486400"/>
-            <a:ext cx="10515600" cy="457200"/>
+            <a:off x="640080" y="6400800"/>
+            <a:ext cx="8686800" cy="320040"/>
           </a:xfrm>
           <a:prstGeom prst="rect">
             <a:avLst/>
@@ -3279,31 +3272,29 @@
           </a:bodyPr>
           <a:lstStyle/>
           <a:p>
-            <a:pPr algn="r" rtl="0"/>
-            <a:r>
-              <a:rPr sz="1400" b="0">
+            <a:pPr algn="r" rtl="1"/>
+            <a:r>
+              <a:rPr sz="1000" b="0">
                 <a:solidFill>
                   <a:srgbClr val="666666"/>
                 </a:solidFill>
-                <a:latin typeface="Calibri"/>
-                <a:cs typeface="Arial"/>
-                <a:ea typeface="Calibri"/>
-              </a:rPr>
-              <a:t>Light theme  |  Bilingual AR/EN  |  Ready to present</a:t>
-            </a:r>
-          </a:p>
-        </p:txBody>
-      </p:sp>
-      <p:sp>
-        <p:nvSpPr>
-          <p:cNvPr id="7" name="TextBox 6"/>
+                <a:latin typeface="Arial"/>
+              </a:rPr>
+              <a:t>Module 02 — Data &amp; AI Engineering Track  |  الوحدة الثانية</a:t>
+            </a:r>
+          </a:p>
+        </p:txBody>
+      </p:sp>
+      <p:sp>
+        <p:nvSpPr>
+          <p:cNvPr id="8" name="TextBox 7"/>
           <p:cNvSpPr txBox="1"/>
           <p:nvPr/>
         </p:nvSpPr>
         <p:spPr>
           <a:xfrm>
-            <a:off x="640080" y="6400800"/>
-            <a:ext cx="8686800" cy="320040"/>
+            <a:off x="9601200" y="6400800"/>
+            <a:ext cx="1920240" cy="320040"/>
           </a:xfrm>
           <a:prstGeom prst="rect">
             <a:avLst/>
@@ -3316,202 +3307,15 @@
           </a:bodyPr>
           <a:lstStyle/>
           <a:p>
-            <a:pPr algn="r" rtl="1"/>
+            <a:pPr algn="l" rtl="0"/>
             <a:r>
               <a:rPr sz="1000" b="0">
                 <a:solidFill>
                   <a:srgbClr val="666666"/>
                 </a:solidFill>
-                <a:latin typeface="Arial"/>
-                <a:cs typeface="Arial"/>
-                <a:ea typeface="Calibri"/>
-              </a:rPr>
-              <a:t>Module 02 — Data &amp; AI Engineering Track  |  الوحدة الثانية</a:t>
-            </a:r>
-          </a:p>
-        </p:txBody>
-      </p:sp>
-      <p:sp>
-        <p:nvSpPr>
-          <p:cNvPr id="8" name="TextBox 7"/>
-          <p:cNvSpPr txBox="1"/>
-          <p:nvPr/>
-        </p:nvSpPr>
-        <p:spPr>
-          <a:xfrm>
-            <a:off x="9601200" y="6400800"/>
-            <a:ext cx="1920240" cy="320040"/>
-          </a:xfrm>
-          <a:prstGeom prst="rect">
-            <a:avLst/>
-          </a:prstGeom>
-          <a:noFill/>
-        </p:spPr>
-        <p:txBody>
-          <a:bodyPr wrap="square">
-            <a:spAutoFit/>
-          </a:bodyPr>
-          <a:lstStyle/>
-          <a:p>
-            <a:pPr algn="l" rtl="0"/>
-            <a:r>
-              <a:rPr sz="1000" b="0">
-                <a:solidFill>
-                  <a:srgbClr val="666666"/>
-                </a:solidFill>
                 <a:latin typeface="Calibri"/>
-                <a:cs typeface="Arial"/>
-                <a:ea typeface="Calibri"/>
-              </a:rPr>
-              <a:t>V09  •  1/14</a:t>
-            </a:r>
-          </a:p>
-        </p:txBody>
-      </p:sp>
-      <p:sp>
-        <p:nvSpPr>
-          <p:cNvPr id="9" name="TextBox 8"/>
-          <p:cNvSpPr txBox="1"/>
-          <p:nvPr/>
-        </p:nvSpPr>
-        <p:spPr>
-          <a:xfrm>
-            <a:off x="640080" y="6400800"/>
-            <a:ext cx="8686800" cy="320040"/>
-          </a:xfrm>
-          <a:prstGeom prst="rect">
-            <a:avLst/>
-          </a:prstGeom>
-          <a:noFill/>
-        </p:spPr>
-        <p:txBody>
-          <a:bodyPr wrap="square">
-            <a:spAutoFit/>
-          </a:bodyPr>
-          <a:lstStyle/>
-          <a:p>
-            <a:pPr algn="r" rtl="1"/>
-            <a:r>
-              <a:rPr sz="1000" b="0">
-                <a:solidFill>
-                  <a:srgbClr val="666666"/>
-                </a:solidFill>
-                <a:latin typeface="Arial"/>
-                <a:cs typeface="Arial"/>
-                <a:ea typeface="Calibri"/>
-              </a:rPr>
-              <a:t>Module 02 — Data &amp; AI Engineering Track  |  الوحدة الثانية</a:t>
-            </a:r>
-          </a:p>
-        </p:txBody>
-      </p:sp>
-      <p:sp>
-        <p:nvSpPr>
-          <p:cNvPr id="10" name="TextBox 9"/>
-          <p:cNvSpPr txBox="1"/>
-          <p:nvPr/>
-        </p:nvSpPr>
-        <p:spPr>
-          <a:xfrm>
-            <a:off x="9601200" y="6400800"/>
-            <a:ext cx="1920240" cy="320040"/>
-          </a:xfrm>
-          <a:prstGeom prst="rect">
-            <a:avLst/>
-          </a:prstGeom>
-          <a:noFill/>
-        </p:spPr>
-        <p:txBody>
-          <a:bodyPr wrap="square">
-            <a:spAutoFit/>
-          </a:bodyPr>
-          <a:lstStyle/>
-          <a:p>
-            <a:pPr algn="l" rtl="0"/>
-            <a:r>
-              <a:rPr sz="1000" b="0">
-                <a:solidFill>
-                  <a:srgbClr val="666666"/>
-                </a:solidFill>
-                <a:latin typeface="Calibri"/>
-                <a:cs typeface="Arial"/>
-                <a:ea typeface="Calibri"/>
-              </a:rPr>
-              <a:t>09_  •  1/14</a:t>
-            </a:r>
-          </a:p>
-        </p:txBody>
-      </p:sp>
-      <p:sp>
-        <p:nvSpPr>
-          <p:cNvPr id="11" name="TextBox 10"/>
-          <p:cNvSpPr txBox="1"/>
-          <p:nvPr/>
-        </p:nvSpPr>
-        <p:spPr>
-          <a:xfrm>
-            <a:off x="640080" y="6400800"/>
-            <a:ext cx="8686800" cy="320040"/>
-          </a:xfrm>
-          <a:prstGeom prst="rect">
-            <a:avLst/>
-          </a:prstGeom>
-          <a:noFill/>
-        </p:spPr>
-        <p:txBody>
-          <a:bodyPr wrap="square">
-            <a:spAutoFit/>
-          </a:bodyPr>
-          <a:lstStyle/>
-          <a:p>
-            <a:pPr algn="r" rtl="1"/>
-            <a:r>
-              <a:rPr sz="1000" b="0">
-                <a:solidFill>
-                  <a:srgbClr val="666666"/>
-                </a:solidFill>
-                <a:latin typeface="Arial"/>
-                <a:cs typeface="Arial"/>
-                <a:ea typeface="Calibri"/>
-              </a:rPr>
-              <a:t>Module 02 — Data &amp; AI Engineering Track  |  الوحدة الثانية</a:t>
-            </a:r>
-          </a:p>
-        </p:txBody>
-      </p:sp>
-      <p:sp>
-        <p:nvSpPr>
-          <p:cNvPr id="12" name="TextBox 11"/>
-          <p:cNvSpPr txBox="1"/>
-          <p:nvPr/>
-        </p:nvSpPr>
-        <p:spPr>
-          <a:xfrm>
-            <a:off x="9601200" y="6400800"/>
-            <a:ext cx="1920240" cy="320040"/>
-          </a:xfrm>
-          <a:prstGeom prst="rect">
-            <a:avLst/>
-          </a:prstGeom>
-          <a:noFill/>
-        </p:spPr>
-        <p:txBody>
-          <a:bodyPr wrap="square">
-            <a:spAutoFit/>
-          </a:bodyPr>
-          <a:lstStyle/>
-          <a:p>
-            <a:pPr algn="l" rtl="0"/>
-            <a:r>
-              <a:rPr sz="1000" b="0">
-                <a:solidFill>
-                  <a:srgbClr val="666666"/>
-                </a:solidFill>
-                <a:latin typeface="Calibri"/>
-                <a:cs typeface="Arial"/>
-                <a:ea typeface="Calibri"/>
-              </a:rPr>
-              <a:t>09_  •  1/14</a:t>
+              </a:rPr>
+              <a:t>V09  •  1/15</a:t>
             </a:r>
           </a:p>
         </p:txBody>
@@ -3544,59 +3348,22 @@
       <p:grpSpPr/>
       <p:sp>
         <p:nvSpPr>
-          <p:cNvPr id="2" name="TextBox 1"/>
-          <p:cNvSpPr txBox="1"/>
-          <p:nvPr/>
-        </p:nvSpPr>
-        <p:spPr>
-          <a:xfrm>
-            <a:off x="640080" y="137160"/>
-            <a:ext cx="10972800" cy="640080"/>
+          <p:cNvPr id="2" name="Rectangle 1"/>
+          <p:cNvSpPr/>
+          <p:nvPr/>
+        </p:nvSpPr>
+        <p:spPr>
+          <a:xfrm>
+            <a:off x="0" y="0"/>
+            <a:ext cx="12191695" cy="1005840"/>
           </a:xfrm>
           <a:prstGeom prst="rect">
             <a:avLst/>
           </a:prstGeom>
-          <a:noFill/>
-        </p:spPr>
-        <p:txBody>
-          <a:bodyPr wrap="none">
-            <a:spAutoFit/>
-          </a:bodyPr>
-          <a:lstStyle/>
-          <a:p>
-            <a:pPr algn="r" rtl="1"/>
-            <a:r>
-              <a:rPr sz="3000" b="1">
-                <a:solidFill>
-                  <a:srgbClr val="1F3B5C"/>
-                </a:solidFill>
-                <a:latin typeface="Arial"/>
-                <a:cs typeface="Arial"/>
-                <a:ea typeface="Calibri"/>
-              </a:rPr>
-              <a:t>مثلث تقييم RAG / RAG Evaluation Triad</a:t>
-            </a:r>
-          </a:p>
-        </p:txBody>
-      </p:sp>
-      <p:sp>
-        <p:nvSpPr>
-          <p:cNvPr id="3" name="Isosceles Triangle 2"/>
-          <p:cNvSpPr/>
-          <p:nvPr/>
-        </p:nvSpPr>
-        <p:spPr>
-          <a:xfrm>
-            <a:off x="3749039" y="1463040"/>
-            <a:ext cx="4572000" cy="3840480"/>
-          </a:xfrm>
-          <a:prstGeom prst="triangle">
-            <a:avLst/>
-          </a:prstGeom>
           <a:solidFill>
-            <a:srgbClr val="DCE6F1"/>
+            <a:srgbClr val="FFFFFF"/>
           </a:solidFill>
-          <a:ln>
+          <a:ln w="25400">
             <a:solidFill>
               <a:srgbClr val="1F4E79"/>
             </a:solidFill>
@@ -3627,227 +3394,14 @@
       </p:sp>
       <p:sp>
         <p:nvSpPr>
-          <p:cNvPr id="4" name="Rounded Rectangle 3"/>
-          <p:cNvSpPr/>
-          <p:nvPr/>
-        </p:nvSpPr>
-        <p:spPr>
-          <a:xfrm>
-            <a:off x="4480560" y="1188720"/>
-            <a:ext cx="3108960" cy="731520"/>
-          </a:xfrm>
-          <a:prstGeom prst="roundRect">
-            <a:avLst/>
-          </a:prstGeom>
-          <a:solidFill>
-            <a:srgbClr val="E2EFDA"/>
-          </a:solidFill>
-          <a:ln w="12700">
-            <a:solidFill>
-              <a:srgbClr val="1F4E79"/>
-            </a:solidFill>
-          </a:ln>
-          <a:effectLst/>
-        </p:spPr>
-        <p:style>
-          <a:lnRef idx="1">
-            <a:schemeClr val="accent1"/>
-          </a:lnRef>
-          <a:fillRef idx="3">
-            <a:schemeClr val="accent1"/>
-          </a:fillRef>
-          <a:effectRef idx="2">
-            <a:schemeClr val="accent1"/>
-          </a:effectRef>
-          <a:fontRef idx="minor">
-            <a:schemeClr val="lt1"/>
-          </a:fontRef>
-        </p:style>
-        <p:txBody>
-          <a:bodyPr rtlCol="0" anchor="ctr" wrap="square"/>
-          <a:lstStyle/>
-          <a:p>
-            <a:pPr algn="ctr" rtl="1"/>
-            <a:r>
-              <a:rPr sz="1600" b="1">
-                <a:solidFill>
-                  <a:srgbClr val="333333"/>
-                </a:solidFill>
-                <a:latin typeface="Arial"/>
-                <a:cs typeface="Arial"/>
-                <a:ea typeface="Calibri"/>
-              </a:rPr>
-              <a:t>الوفاء بالمصدر</a:t>
-            </a:r>
-          </a:p>
-          <a:p>
-            <a:pPr algn="ctr" rtl="0"/>
-            <a:r>
-              <a:rPr sz="1200">
-                <a:solidFill>
-                  <a:srgbClr val="666666"/>
-                </a:solidFill>
-                <a:latin typeface="Calibri"/>
-                <a:cs typeface="Arial"/>
-                <a:ea typeface="Calibri"/>
-              </a:rPr>
-              <a:t>Faithfulness</a:t>
-            </a:r>
-          </a:p>
-        </p:txBody>
-      </p:sp>
-      <p:sp>
-        <p:nvSpPr>
-          <p:cNvPr id="5" name="Rounded Rectangle 4"/>
-          <p:cNvSpPr/>
-          <p:nvPr/>
-        </p:nvSpPr>
-        <p:spPr>
-          <a:xfrm>
-            <a:off x="2194560" y="4846320"/>
-            <a:ext cx="3108960" cy="731520"/>
-          </a:xfrm>
-          <a:prstGeom prst="roundRect">
-            <a:avLst/>
-          </a:prstGeom>
-          <a:solidFill>
-            <a:srgbClr val="FDE9D9"/>
-          </a:solidFill>
-          <a:ln w="12700">
-            <a:solidFill>
-              <a:srgbClr val="1F4E79"/>
-            </a:solidFill>
-          </a:ln>
-          <a:effectLst/>
-        </p:spPr>
-        <p:style>
-          <a:lnRef idx="1">
-            <a:schemeClr val="accent1"/>
-          </a:lnRef>
-          <a:fillRef idx="3">
-            <a:schemeClr val="accent1"/>
-          </a:fillRef>
-          <a:effectRef idx="2">
-            <a:schemeClr val="accent1"/>
-          </a:effectRef>
-          <a:fontRef idx="minor">
-            <a:schemeClr val="lt1"/>
-          </a:fontRef>
-        </p:style>
-        <p:txBody>
-          <a:bodyPr rtlCol="0" anchor="ctr" wrap="square"/>
-          <a:lstStyle/>
-          <a:p>
-            <a:pPr algn="ctr" rtl="1"/>
-            <a:r>
-              <a:rPr sz="1600" b="1">
-                <a:solidFill>
-                  <a:srgbClr val="333333"/>
-                </a:solidFill>
-                <a:latin typeface="Arial"/>
-                <a:cs typeface="Arial"/>
-                <a:ea typeface="Calibri"/>
-              </a:rPr>
-              <a:t>ملاءمة الإجابة</a:t>
-            </a:r>
-          </a:p>
-          <a:p>
-            <a:pPr algn="ctr" rtl="0"/>
-            <a:r>
-              <a:rPr sz="1200">
-                <a:solidFill>
-                  <a:srgbClr val="666666"/>
-                </a:solidFill>
-                <a:latin typeface="Calibri"/>
-                <a:cs typeface="Arial"/>
-                <a:ea typeface="Calibri"/>
-              </a:rPr>
-              <a:t>Answer Relevancy</a:t>
-            </a:r>
-          </a:p>
-        </p:txBody>
-      </p:sp>
-      <p:sp>
-        <p:nvSpPr>
-          <p:cNvPr id="6" name="Rounded Rectangle 5"/>
-          <p:cNvSpPr/>
-          <p:nvPr/>
-        </p:nvSpPr>
-        <p:spPr>
-          <a:xfrm>
-            <a:off x="6766560" y="4846320"/>
-            <a:ext cx="3108960" cy="731520"/>
-          </a:xfrm>
-          <a:prstGeom prst="roundRect">
-            <a:avLst/>
-          </a:prstGeom>
-          <a:solidFill>
-            <a:srgbClr val="EDEDED"/>
-          </a:solidFill>
-          <a:ln w="12700">
-            <a:solidFill>
-              <a:srgbClr val="1F4E79"/>
-            </a:solidFill>
-          </a:ln>
-          <a:effectLst/>
-        </p:spPr>
-        <p:style>
-          <a:lnRef idx="1">
-            <a:schemeClr val="accent1"/>
-          </a:lnRef>
-          <a:fillRef idx="3">
-            <a:schemeClr val="accent1"/>
-          </a:fillRef>
-          <a:effectRef idx="2">
-            <a:schemeClr val="accent1"/>
-          </a:effectRef>
-          <a:fontRef idx="minor">
-            <a:schemeClr val="lt1"/>
-          </a:fontRef>
-        </p:style>
-        <p:txBody>
-          <a:bodyPr rtlCol="0" anchor="ctr" wrap="square"/>
-          <a:lstStyle/>
-          <a:p>
-            <a:pPr algn="ctr" rtl="1"/>
-            <a:r>
-              <a:rPr sz="1600" b="1">
-                <a:solidFill>
-                  <a:srgbClr val="333333"/>
-                </a:solidFill>
-                <a:latin typeface="Arial"/>
-                <a:cs typeface="Arial"/>
-                <a:ea typeface="Calibri"/>
-              </a:rPr>
-              <a:t>دقة السياق</a:t>
-            </a:r>
-          </a:p>
-          <a:p>
-            <a:pPr algn="ctr" rtl="0"/>
-            <a:r>
-              <a:rPr sz="1200">
-                <a:solidFill>
-                  <a:srgbClr val="666666"/>
-                </a:solidFill>
-                <a:latin typeface="Calibri"/>
-                <a:cs typeface="Arial"/>
-                <a:ea typeface="Calibri"/>
-              </a:rPr>
-              <a:t>Context Precision</a:t>
-            </a:r>
-          </a:p>
-        </p:txBody>
-      </p:sp>
-      <p:sp>
-        <p:nvSpPr>
-          <p:cNvPr id="7" name="TextBox 6"/>
+          <p:cNvPr id="3" name="TextBox 2"/>
           <p:cNvSpPr txBox="1"/>
           <p:nvPr/>
         </p:nvSpPr>
         <p:spPr>
           <a:xfrm>
-            <a:off x="640080" y="6126480"/>
-            <a:ext cx="10972800" cy="548640"/>
+            <a:off x="640080" y="182880"/>
+            <a:ext cx="10972800" cy="640080"/>
           </a:xfrm>
           <a:prstGeom prst="rect">
             <a:avLst/>
@@ -3862,40 +3416,27 @@
           <a:p>
             <a:pPr algn="r" rtl="1"/>
             <a:r>
-              <a:rPr sz="1400">
-                <a:solidFill>
-                  <a:srgbClr val="666666"/>
+              <a:rPr sz="3200" b="1">
+                <a:solidFill>
+                  <a:srgbClr val="1F3B5C"/>
                 </a:solidFill>
                 <a:latin typeface="Arial"/>
-                <a:cs typeface="Arial"/>
-                <a:ea typeface="Calibri"/>
-              </a:rPr>
-              <a:t>يُقاس بإطار RAGAS — الوفاء يمنع الهلوسة والملاءمة تجعل الإجابة نافعة.</a:t>
-            </a:r>
-          </a:p>
-          <a:p>
-            <a:pPr algn="r" rtl="0"/>
-            <a:r>
-              <a:rPr>
-                <a:latin typeface="Calibri"/>
-                <a:cs typeface="Arial"/>
-                <a:ea typeface="Calibri"/>
-              </a:rPr>
-              <a:t>Measured with RAGAS — faithfulness prevents hallucination; relevancy keeps answers useful.</a:t>
-            </a:r>
-          </a:p>
-        </p:txBody>
-      </p:sp>
-      <p:sp>
-        <p:nvSpPr>
-          <p:cNvPr id="8" name="TextBox 7"/>
+              </a:rPr>
+              <a:t>إجابات الاختبار / Quiz Answers</a:t>
+            </a:r>
+          </a:p>
+        </p:txBody>
+      </p:sp>
+      <p:sp>
+        <p:nvSpPr>
+          <p:cNvPr id="4" name="TextBox 3"/>
           <p:cNvSpPr txBox="1"/>
           <p:nvPr/>
         </p:nvSpPr>
         <p:spPr>
           <a:xfrm>
-            <a:off x="640080" y="6400800"/>
-            <a:ext cx="8686800" cy="320040"/>
+            <a:off x="640080" y="1280160"/>
+            <a:ext cx="10972800" cy="5212080"/>
           </a:xfrm>
           <a:prstGeom prst="rect">
             <a:avLst/>
@@ -3908,31 +3449,207 @@
           </a:bodyPr>
           <a:lstStyle/>
           <a:p>
-            <a:pPr algn="r" rtl="1"/>
-            <a:r>
-              <a:rPr sz="1000" b="0">
+            <a:pPr algn="r" rtl="1">
+              <a:spcBef>
+                <a:spcPts val="200"/>
+              </a:spcBef>
+              <a:spcAft>
+                <a:spcPts val="1000"/>
+              </a:spcAft>
+            </a:pPr>
+            <a:r>
+              <a:rPr sz="1800">
+                <a:solidFill>
+                  <a:srgbClr val="333333"/>
+                </a:solidFill>
+                <a:latin typeface="Arial"/>
+              </a:rPr>
+              <a:t>• 1. التقسيم التكراري Recursive Chunking.</a:t>
+            </a:r>
+          </a:p>
+          <a:p>
+            <a:pPr algn="l" rtl="0">
+              <a:spcBef>
+                <a:spcPts val="200"/>
+              </a:spcBef>
+              <a:spcAft>
+                <a:spcPts val="1000"/>
+              </a:spcAft>
+            </a:pPr>
+            <a:r>
+              <a:rPr sz="1500">
                 <a:solidFill>
                   <a:srgbClr val="666666"/>
                 </a:solidFill>
+                <a:latin typeface="Calibri"/>
+              </a:rPr>
+              <a:t>• Recursive chunking.</a:t>
+            </a:r>
+          </a:p>
+          <a:p>
+            <a:pPr algn="r" rtl="1">
+              <a:spcBef>
+                <a:spcPts val="200"/>
+              </a:spcBef>
+              <a:spcAft>
+                <a:spcPts val="1000"/>
+              </a:spcAft>
+            </a:pPr>
+            <a:r>
+              <a:rPr sz="1800">
+                <a:solidFill>
+                  <a:srgbClr val="333333"/>
+                </a:solidFill>
                 <a:latin typeface="Arial"/>
-                <a:cs typeface="Arial"/>
-                <a:ea typeface="Calibri"/>
-              </a:rPr>
-              <a:t>Module 02 — Data &amp; AI Engineering Track  |  الوحدة الثانية</a:t>
-            </a:r>
-          </a:p>
-        </p:txBody>
-      </p:sp>
-      <p:sp>
-        <p:nvSpPr>
-          <p:cNvPr id="9" name="TextBox 8"/>
+              </a:rPr>
+              <a:t>• 2. الكثيف يفهم المعنى وBM25 يطابق الكلمات النادرة حرفيًا.</a:t>
+            </a:r>
+          </a:p>
+          <a:p>
+            <a:pPr algn="l" rtl="0">
+              <a:spcBef>
+                <a:spcPts val="200"/>
+              </a:spcBef>
+              <a:spcAft>
+                <a:spcPts val="1000"/>
+              </a:spcAft>
+            </a:pPr>
+            <a:r>
+              <a:rPr sz="1500">
+                <a:solidFill>
+                  <a:srgbClr val="666666"/>
+                </a:solidFill>
+                <a:latin typeface="Calibri"/>
+              </a:rPr>
+              <a:t>• Dense captures meaning; BM25 matches rare exact keywords.</a:t>
+            </a:r>
+          </a:p>
+          <a:p>
+            <a:pPr algn="r" rtl="1">
+              <a:spcBef>
+                <a:spcPts val="200"/>
+              </a:spcBef>
+              <a:spcAft>
+                <a:spcPts val="1000"/>
+              </a:spcAft>
+            </a:pPr>
+            <a:r>
+              <a:rPr sz="1800">
+                <a:solidFill>
+                  <a:srgbClr val="333333"/>
+                </a:solidFill>
+                <a:latin typeface="Arial"/>
+              </a:rPr>
+              <a:t>• 3. الوفاء، ملاءمة الإجابة، دقة السياق.</a:t>
+            </a:r>
+          </a:p>
+          <a:p>
+            <a:pPr algn="l" rtl="0">
+              <a:spcBef>
+                <a:spcPts val="200"/>
+              </a:spcBef>
+              <a:spcAft>
+                <a:spcPts val="1000"/>
+              </a:spcAft>
+            </a:pPr>
+            <a:r>
+              <a:rPr sz="1500">
+                <a:solidFill>
+                  <a:srgbClr val="666666"/>
+                </a:solidFill>
+                <a:latin typeface="Calibri"/>
+              </a:rPr>
+              <a:t>• Faithfulness, answer relevancy, context precision.</a:t>
+            </a:r>
+          </a:p>
+          <a:p>
+            <a:pPr algn="r" rtl="1">
+              <a:spcBef>
+                <a:spcPts val="200"/>
+              </a:spcBef>
+              <a:spcAft>
+                <a:spcPts val="1000"/>
+              </a:spcAft>
+            </a:pPr>
+            <a:r>
+              <a:rPr sz="1800">
+                <a:solidFill>
+                  <a:srgbClr val="333333"/>
+                </a:solidFill>
+                <a:latin typeface="Arial"/>
+              </a:rPr>
+              <a:t>• 4. يعيد ترتيب المرشحين بنموذج أدق لرفع ملاءمة النتائج.</a:t>
+            </a:r>
+          </a:p>
+          <a:p>
+            <a:pPr algn="l" rtl="0">
+              <a:spcBef>
+                <a:spcPts val="200"/>
+              </a:spcBef>
+              <a:spcAft>
+                <a:spcPts val="1000"/>
+              </a:spcAft>
+            </a:pPr>
+            <a:r>
+              <a:rPr sz="1500">
+                <a:solidFill>
+                  <a:srgbClr val="666666"/>
+                </a:solidFill>
+                <a:latin typeface="Calibri"/>
+              </a:rPr>
+              <a:t>• Re-scores candidates with a more accurate model.</a:t>
+            </a:r>
+          </a:p>
+          <a:p>
+            <a:pPr algn="r" rtl="1">
+              <a:spcBef>
+                <a:spcPts val="200"/>
+              </a:spcBef>
+              <a:spcAft>
+                <a:spcPts val="1000"/>
+              </a:spcAft>
+            </a:pPr>
+            <a:r>
+              <a:rPr sz="1800">
+                <a:solidFill>
+                  <a:srgbClr val="333333"/>
+                </a:solidFill>
+                <a:latin typeface="Arial"/>
+              </a:rPr>
+              <a:t>• 5. يعيد استخدام إجابات الأسئلة المشابهة بدل استدعاء النموذج كل مرة.</a:t>
+            </a:r>
+          </a:p>
+          <a:p>
+            <a:pPr algn="l" rtl="0">
+              <a:spcBef>
+                <a:spcPts val="200"/>
+              </a:spcBef>
+              <a:spcAft>
+                <a:spcPts val="1000"/>
+              </a:spcAft>
+            </a:pPr>
+            <a:r>
+              <a:rPr sz="1500">
+                <a:solidFill>
+                  <a:srgbClr val="666666"/>
+                </a:solidFill>
+                <a:latin typeface="Calibri"/>
+              </a:rPr>
+              <a:t>• Reuses answers for similar questions.</a:t>
+            </a:r>
+          </a:p>
+        </p:txBody>
+      </p:sp>
+      <p:sp>
+        <p:nvSpPr>
+          <p:cNvPr id="5" name="TextBox 4"/>
           <p:cNvSpPr txBox="1"/>
           <p:nvPr/>
         </p:nvSpPr>
         <p:spPr>
           <a:xfrm>
-            <a:off x="9601200" y="6400800"/>
-            <a:ext cx="1920240" cy="320040"/>
+            <a:off x="640080" y="6400800"/>
+            <a:ext cx="8686800" cy="320040"/>
           </a:xfrm>
           <a:prstGeom prst="rect">
             <a:avLst/>
@@ -3945,31 +3662,29 @@
           </a:bodyPr>
           <a:lstStyle/>
           <a:p>
-            <a:pPr algn="l" rtl="0"/>
+            <a:pPr algn="r" rtl="1"/>
             <a:r>
               <a:rPr sz="1000" b="0">
                 <a:solidFill>
                   <a:srgbClr val="666666"/>
                 </a:solidFill>
-                <a:latin typeface="Calibri"/>
-                <a:cs typeface="Arial"/>
-                <a:ea typeface="Calibri"/>
-              </a:rPr>
-              <a:t>09_  •  10/14</a:t>
-            </a:r>
-          </a:p>
-        </p:txBody>
-      </p:sp>
-      <p:sp>
-        <p:nvSpPr>
-          <p:cNvPr id="10" name="TextBox 9"/>
+                <a:latin typeface="Arial"/>
+              </a:rPr>
+              <a:t>Module 02 — Data &amp; AI Engineering Track  |  الوحدة الثانية</a:t>
+            </a:r>
+          </a:p>
+        </p:txBody>
+      </p:sp>
+      <p:sp>
+        <p:nvSpPr>
+          <p:cNvPr id="6" name="TextBox 5"/>
           <p:cNvSpPr txBox="1"/>
           <p:nvPr/>
         </p:nvSpPr>
         <p:spPr>
           <a:xfrm>
-            <a:off x="640080" y="6400800"/>
-            <a:ext cx="8686800" cy="320040"/>
+            <a:off x="9601200" y="6400800"/>
+            <a:ext cx="1920240" cy="320040"/>
           </a:xfrm>
           <a:prstGeom prst="rect">
             <a:avLst/>
@@ -3982,54 +3697,15 @@
           </a:bodyPr>
           <a:lstStyle/>
           <a:p>
-            <a:pPr algn="r" rtl="1"/>
+            <a:pPr algn="l" rtl="0"/>
             <a:r>
               <a:rPr sz="1000" b="0">
                 <a:solidFill>
                   <a:srgbClr val="666666"/>
                 </a:solidFill>
-                <a:latin typeface="Arial"/>
-                <a:cs typeface="Arial"/>
-                <a:ea typeface="Calibri"/>
-              </a:rPr>
-              <a:t>Module 02 — Data &amp; AI Engineering Track  |  الوحدة الثانية</a:t>
-            </a:r>
-          </a:p>
-        </p:txBody>
-      </p:sp>
-      <p:sp>
-        <p:nvSpPr>
-          <p:cNvPr id="11" name="TextBox 10"/>
-          <p:cNvSpPr txBox="1"/>
-          <p:nvPr/>
-        </p:nvSpPr>
-        <p:spPr>
-          <a:xfrm>
-            <a:off x="9601200" y="6400800"/>
-            <a:ext cx="1920240" cy="320040"/>
-          </a:xfrm>
-          <a:prstGeom prst="rect">
-            <a:avLst/>
-          </a:prstGeom>
-          <a:noFill/>
-        </p:spPr>
-        <p:txBody>
-          <a:bodyPr wrap="square">
-            <a:spAutoFit/>
-          </a:bodyPr>
-          <a:lstStyle/>
-          <a:p>
-            <a:pPr algn="l" rtl="0"/>
-            <a:r>
-              <a:rPr sz="1000" b="0">
-                <a:solidFill>
-                  <a:srgbClr val="666666"/>
-                </a:solidFill>
                 <a:latin typeface="Calibri"/>
-                <a:cs typeface="Arial"/>
-                <a:ea typeface="Calibri"/>
-              </a:rPr>
-              <a:t>09_  •  10/14</a:t>
+              </a:rPr>
+              <a:t>V09  •  14/15</a:t>
             </a:r>
           </a:p>
         </p:txBody>
@@ -4135,10 +3811,8 @@
                   <a:srgbClr val="1F3B5C"/>
                 </a:solidFill>
                 <a:latin typeface="Arial"/>
-                <a:cs typeface="Arial"/>
-                <a:ea typeface="Calibri"/>
-              </a:rPr>
-              <a:t>الأخطاء الشائعة / Common Pitfalls</a:t>
+              </a:rPr>
+              <a:t>للاستزادة / Further Reading</a:t>
             </a:r>
           </a:p>
         </p:txBody>
@@ -4174,19 +3848,17 @@
               </a:spcAft>
             </a:pPr>
             <a:r>
-              <a:rPr sz="1900">
+              <a:rPr sz="2000">
                 <a:solidFill>
                   <a:srgbClr val="333333"/>
                 </a:solidFill>
                 <a:latin typeface="Arial"/>
-                <a:cs typeface="Arial"/>
-                <a:ea typeface="Calibri"/>
-              </a:rPr>
-              <a:t>• تقسيم يكسر الجداول أو الأكواد؛ إهمال إعادة الترتيب فيضيع الأكثر ملاءمة.</a:t>
-            </a:r>
-          </a:p>
-          <a:p>
-            <a:pPr algn="r" rtl="0">
+              </a:rPr>
+              <a:t>• Daily Dose of DS — استراتيجيات تقسيم RAG.</a:t>
+            </a:r>
+          </a:p>
+          <a:p>
+            <a:pPr algn="l" rtl="0">
               <a:spcBef>
                 <a:spcPts val="200"/>
               </a:spcBef>
@@ -4195,15 +3867,13 @@
               </a:spcAft>
             </a:pPr>
             <a:r>
-              <a:rPr sz="1600">
+              <a:rPr sz="1700">
                 <a:solidFill>
                   <a:srgbClr val="666666"/>
                 </a:solidFill>
                 <a:latin typeface="Calibri"/>
-                <a:cs typeface="Arial"/>
-                <a:ea typeface="Calibri"/>
-              </a:rPr>
-              <a:t>• Chunking that breaks tables/code; skipping reranking loses the most relevant hits.</a:t>
+              </a:rPr>
+              <a:t>• Daily Dose of DS — RAG chunking strategies.</a:t>
             </a:r>
           </a:p>
           <a:p>
@@ -4216,19 +3886,17 @@
               </a:spcAft>
             </a:pPr>
             <a:r>
-              <a:rPr sz="1900">
+              <a:rPr sz="2000">
                 <a:solidFill>
                   <a:srgbClr val="333333"/>
                 </a:solidFill>
                 <a:latin typeface="Arial"/>
-                <a:cs typeface="Arial"/>
-                <a:ea typeface="Calibri"/>
-              </a:rPr>
-              <a:t>• غياب تقييم الوفاء فيسمح بالهلوسة؛ استرجاع أعلى-ك دون حد أدنى للدرجة.</a:t>
-            </a:r>
-          </a:p>
-          <a:p>
-            <a:pPr algn="r" rtl="0">
+              </a:rPr>
+              <a:t>• توثيق RAGAS لإطار التقييم.</a:t>
+            </a:r>
+          </a:p>
+          <a:p>
+            <a:pPr algn="l" rtl="0">
               <a:spcBef>
                 <a:spcPts val="200"/>
               </a:spcBef>
@@ -4237,15 +3905,51 @@
               </a:spcAft>
             </a:pPr>
             <a:r>
-              <a:rPr sz="1600">
+              <a:rPr sz="1700">
                 <a:solidFill>
                   <a:srgbClr val="666666"/>
                 </a:solidFill>
                 <a:latin typeface="Calibri"/>
-                <a:cs typeface="Arial"/>
-                <a:ea typeface="Calibri"/>
-              </a:rPr>
-              <a:t>• No faithfulness evaluation allows hallucination; top-k without a score floor.</a:t>
+              </a:rPr>
+              <a:t>• RAGAS evaluation framework docs.</a:t>
+            </a:r>
+          </a:p>
+          <a:p>
+            <a:pPr algn="r" rtl="1">
+              <a:spcBef>
+                <a:spcPts val="200"/>
+              </a:spcBef>
+              <a:spcAft>
+                <a:spcPts val="1000"/>
+              </a:spcAft>
+            </a:pPr>
+            <a:r>
+              <a:rPr sz="2000">
+                <a:solidFill>
+                  <a:srgbClr val="333333"/>
+                </a:solidFill>
+                <a:latin typeface="Arial"/>
+              </a:rPr>
+              <a:t>• توثيق ChromaDB والفهرسة HNSW.</a:t>
+            </a:r>
+          </a:p>
+          <a:p>
+            <a:pPr algn="l" rtl="0">
+              <a:spcBef>
+                <a:spcPts val="200"/>
+              </a:spcBef>
+              <a:spcAft>
+                <a:spcPts val="1000"/>
+              </a:spcAft>
+            </a:pPr>
+            <a:r>
+              <a:rPr sz="1700">
+                <a:solidFill>
+                  <a:srgbClr val="666666"/>
+                </a:solidFill>
+                <a:latin typeface="Calibri"/>
+              </a:rPr>
+              <a:t>• ChromaDB docs and HNSW indexing.</a:t>
             </a:r>
           </a:p>
         </p:txBody>
@@ -4279,8 +3983,6 @@
                   <a:srgbClr val="666666"/>
                 </a:solidFill>
                 <a:latin typeface="Arial"/>
-                <a:cs typeface="Arial"/>
-                <a:ea typeface="Calibri"/>
               </a:rPr>
               <a:t>Module 02 — Data &amp; AI Engineering Track  |  الوحدة الثانية</a:t>
             </a:r>
@@ -4316,158 +4018,8 @@
                   <a:srgbClr val="666666"/>
                 </a:solidFill>
                 <a:latin typeface="Calibri"/>
-                <a:cs typeface="Arial"/>
-                <a:ea typeface="Calibri"/>
-              </a:rPr>
-              <a:t>V09  •  8/14</a:t>
-            </a:r>
-          </a:p>
-        </p:txBody>
-      </p:sp>
-      <p:sp>
-        <p:nvSpPr>
-          <p:cNvPr id="7" name="TextBox 6"/>
-          <p:cNvSpPr txBox="1"/>
-          <p:nvPr/>
-        </p:nvSpPr>
-        <p:spPr>
-          <a:xfrm>
-            <a:off x="640080" y="6400800"/>
-            <a:ext cx="8686800" cy="320040"/>
-          </a:xfrm>
-          <a:prstGeom prst="rect">
-            <a:avLst/>
-          </a:prstGeom>
-          <a:noFill/>
-        </p:spPr>
-        <p:txBody>
-          <a:bodyPr wrap="square">
-            <a:spAutoFit/>
-          </a:bodyPr>
-          <a:lstStyle/>
-          <a:p>
-            <a:pPr algn="r" rtl="1"/>
-            <a:r>
-              <a:rPr sz="1000" b="0">
-                <a:solidFill>
-                  <a:srgbClr val="666666"/>
-                </a:solidFill>
-                <a:latin typeface="Arial"/>
-                <a:cs typeface="Arial"/>
-                <a:ea typeface="Calibri"/>
-              </a:rPr>
-              <a:t>Module 02 — Data &amp; AI Engineering Track  |  الوحدة الثانية</a:t>
-            </a:r>
-          </a:p>
-        </p:txBody>
-      </p:sp>
-      <p:sp>
-        <p:nvSpPr>
-          <p:cNvPr id="8" name="TextBox 7"/>
-          <p:cNvSpPr txBox="1"/>
-          <p:nvPr/>
-        </p:nvSpPr>
-        <p:spPr>
-          <a:xfrm>
-            <a:off x="9601200" y="6400800"/>
-            <a:ext cx="1920240" cy="320040"/>
-          </a:xfrm>
-          <a:prstGeom prst="rect">
-            <a:avLst/>
-          </a:prstGeom>
-          <a:noFill/>
-        </p:spPr>
-        <p:txBody>
-          <a:bodyPr wrap="square">
-            <a:spAutoFit/>
-          </a:bodyPr>
-          <a:lstStyle/>
-          <a:p>
-            <a:pPr algn="l" rtl="0"/>
-            <a:r>
-              <a:rPr sz="1000" b="0">
-                <a:solidFill>
-                  <a:srgbClr val="666666"/>
-                </a:solidFill>
-                <a:latin typeface="Calibri"/>
-                <a:cs typeface="Arial"/>
-                <a:ea typeface="Calibri"/>
-              </a:rPr>
-              <a:t>09_  •  11/14</a:t>
-            </a:r>
-          </a:p>
-        </p:txBody>
-      </p:sp>
-      <p:sp>
-        <p:nvSpPr>
-          <p:cNvPr id="9" name="TextBox 8"/>
-          <p:cNvSpPr txBox="1"/>
-          <p:nvPr/>
-        </p:nvSpPr>
-        <p:spPr>
-          <a:xfrm>
-            <a:off x="640080" y="6400800"/>
-            <a:ext cx="8686800" cy="320040"/>
-          </a:xfrm>
-          <a:prstGeom prst="rect">
-            <a:avLst/>
-          </a:prstGeom>
-          <a:noFill/>
-        </p:spPr>
-        <p:txBody>
-          <a:bodyPr wrap="square">
-            <a:spAutoFit/>
-          </a:bodyPr>
-          <a:lstStyle/>
-          <a:p>
-            <a:pPr algn="r" rtl="1"/>
-            <a:r>
-              <a:rPr sz="1000" b="0">
-                <a:solidFill>
-                  <a:srgbClr val="666666"/>
-                </a:solidFill>
-                <a:latin typeface="Arial"/>
-                <a:cs typeface="Arial"/>
-                <a:ea typeface="Calibri"/>
-              </a:rPr>
-              <a:t>Module 02 — Data &amp; AI Engineering Track  |  الوحدة الثانية</a:t>
-            </a:r>
-          </a:p>
-        </p:txBody>
-      </p:sp>
-      <p:sp>
-        <p:nvSpPr>
-          <p:cNvPr id="10" name="TextBox 9"/>
-          <p:cNvSpPr txBox="1"/>
-          <p:nvPr/>
-        </p:nvSpPr>
-        <p:spPr>
-          <a:xfrm>
-            <a:off x="9601200" y="6400800"/>
-            <a:ext cx="1920240" cy="320040"/>
-          </a:xfrm>
-          <a:prstGeom prst="rect">
-            <a:avLst/>
-          </a:prstGeom>
-          <a:noFill/>
-        </p:spPr>
-        <p:txBody>
-          <a:bodyPr wrap="square">
-            <a:spAutoFit/>
-          </a:bodyPr>
-          <a:lstStyle/>
-          <a:p>
-            <a:pPr algn="l" rtl="0"/>
-            <a:r>
-              <a:rPr sz="1000" b="0">
-                <a:solidFill>
-                  <a:srgbClr val="666666"/>
-                </a:solidFill>
-                <a:latin typeface="Calibri"/>
-                <a:cs typeface="Arial"/>
-                <a:ea typeface="Calibri"/>
-              </a:rPr>
-              <a:t>09_  •  11/14</a:t>
+              </a:rPr>
+              <a:t>V09  •  15/15</a:t>
             </a:r>
           </a:p>
         </p:txBody>
@@ -4500,22 +4052,57 @@
       <p:grpSpPr/>
       <p:sp>
         <p:nvSpPr>
-          <p:cNvPr id="2" name="Rectangle 1"/>
+          <p:cNvPr id="2" name="TextBox 1"/>
+          <p:cNvSpPr txBox="1"/>
+          <p:nvPr/>
+        </p:nvSpPr>
+        <p:spPr>
+          <a:xfrm>
+            <a:off x="640080" y="137160"/>
+            <a:ext cx="10972800" cy="640080"/>
+          </a:xfrm>
+          <a:prstGeom prst="rect">
+            <a:avLst/>
+          </a:prstGeom>
+          <a:noFill/>
+        </p:spPr>
+        <p:txBody>
+          <a:bodyPr wrap="none">
+            <a:spAutoFit/>
+          </a:bodyPr>
+          <a:lstStyle/>
+          <a:p>
+            <a:pPr algn="r" rtl="1"/>
+            <a:r>
+              <a:rPr sz="3000" b="1">
+                <a:solidFill>
+                  <a:srgbClr val="1F3B5C"/>
+                </a:solidFill>
+                <a:latin typeface="Arial"/>
+              </a:rPr>
+              <a:t>خط أنابيب RAG / RAG Pipeline</a:t>
+            </a:r>
+          </a:p>
+        </p:txBody>
+      </p:sp>
+      <p:sp>
+        <p:nvSpPr>
+          <p:cNvPr id="3" name="Rounded Rectangle 2"/>
           <p:cNvSpPr/>
           <p:nvPr/>
         </p:nvSpPr>
         <p:spPr>
           <a:xfrm>
-            <a:off x="0" y="0"/>
-            <a:ext cx="12191695" cy="1005840"/>
-          </a:xfrm>
-          <a:prstGeom prst="rect">
+            <a:off x="548640" y="2011680"/>
+            <a:ext cx="1965960" cy="1280160"/>
+          </a:xfrm>
+          <a:prstGeom prst="roundRect">
             <a:avLst/>
           </a:prstGeom>
           <a:solidFill>
-            <a:srgbClr val="FFFFFF"/>
+            <a:srgbClr val="DCE6F1"/>
           </a:solidFill>
-          <a:ln w="25400">
+          <a:ln w="12700">
             <a:solidFill>
               <a:srgbClr val="1F4E79"/>
             </a:solidFill>
@@ -4537,6 +4124,71 @@
           </a:fontRef>
         </p:style>
         <p:txBody>
+          <a:bodyPr rtlCol="0" anchor="ctr" wrap="square"/>
+          <a:lstStyle/>
+          <a:p>
+            <a:pPr algn="ctr" rtl="1"/>
+            <a:r>
+              <a:rPr sz="1600" b="1">
+                <a:solidFill>
+                  <a:srgbClr val="333333"/>
+                </a:solidFill>
+                <a:latin typeface="Arial"/>
+              </a:rPr>
+              <a:t>1) الفهرسة</a:t>
+            </a:r>
+          </a:p>
+          <a:p>
+            <a:pPr algn="ctr" rtl="0"/>
+            <a:r>
+              <a:rPr sz="1200">
+                <a:solidFill>
+                  <a:srgbClr val="666666"/>
+                </a:solidFill>
+                <a:latin typeface="Calibri"/>
+              </a:rPr>
+              <a:t>Indexing</a:t>
+            </a:r>
+          </a:p>
+        </p:txBody>
+      </p:sp>
+      <p:sp>
+        <p:nvSpPr>
+          <p:cNvPr id="4" name="Left Arrow 3"/>
+          <p:cNvSpPr/>
+          <p:nvPr/>
+        </p:nvSpPr>
+        <p:spPr>
+          <a:xfrm>
+            <a:off x="2532888" y="2514600"/>
+            <a:ext cx="219456" cy="274320"/>
+          </a:xfrm>
+          <a:prstGeom prst="leftArrow">
+            <a:avLst/>
+          </a:prstGeom>
+          <a:solidFill>
+            <a:srgbClr val="1F4E79"/>
+          </a:solidFill>
+          <a:ln>
+            <a:noFill/>
+          </a:ln>
+          <a:effectLst/>
+        </p:spPr>
+        <p:style>
+          <a:lnRef idx="1">
+            <a:schemeClr val="accent1"/>
+          </a:lnRef>
+          <a:fillRef idx="3">
+            <a:schemeClr val="accent1"/>
+          </a:fillRef>
+          <a:effectRef idx="2">
+            <a:schemeClr val="accent1"/>
+          </a:effectRef>
+          <a:fontRef idx="minor">
+            <a:schemeClr val="lt1"/>
+          </a:fontRef>
+        </p:style>
+        <p:txBody>
           <a:bodyPr rtlCol="0" anchor="ctr"/>
           <a:lstStyle/>
           <a:p>
@@ -4546,14 +4198,689 @@
       </p:sp>
       <p:sp>
         <p:nvSpPr>
-          <p:cNvPr id="3" name="TextBox 2"/>
+          <p:cNvPr id="5" name="Rounded Rectangle 4"/>
+          <p:cNvSpPr/>
+          <p:nvPr/>
+        </p:nvSpPr>
+        <p:spPr>
+          <a:xfrm>
+            <a:off x="2770632" y="2011680"/>
+            <a:ext cx="1965960" cy="1280160"/>
+          </a:xfrm>
+          <a:prstGeom prst="roundRect">
+            <a:avLst/>
+          </a:prstGeom>
+          <a:solidFill>
+            <a:srgbClr val="E2EFDA"/>
+          </a:solidFill>
+          <a:ln w="12700">
+            <a:solidFill>
+              <a:srgbClr val="1F4E79"/>
+            </a:solidFill>
+          </a:ln>
+          <a:effectLst/>
+        </p:spPr>
+        <p:style>
+          <a:lnRef idx="1">
+            <a:schemeClr val="accent1"/>
+          </a:lnRef>
+          <a:fillRef idx="3">
+            <a:schemeClr val="accent1"/>
+          </a:fillRef>
+          <a:effectRef idx="2">
+            <a:schemeClr val="accent1"/>
+          </a:effectRef>
+          <a:fontRef idx="minor">
+            <a:schemeClr val="lt1"/>
+          </a:fontRef>
+        </p:style>
+        <p:txBody>
+          <a:bodyPr rtlCol="0" anchor="ctr" wrap="square"/>
+          <a:lstStyle/>
+          <a:p>
+            <a:pPr algn="ctr" rtl="1"/>
+            <a:r>
+              <a:rPr sz="1600" b="1">
+                <a:solidFill>
+                  <a:srgbClr val="333333"/>
+                </a:solidFill>
+                <a:latin typeface="Arial"/>
+              </a:rPr>
+              <a:t>2) الاسترجاع</a:t>
+            </a:r>
+          </a:p>
+          <a:p>
+            <a:pPr algn="ctr" rtl="0"/>
+            <a:r>
+              <a:rPr sz="1200">
+                <a:solidFill>
+                  <a:srgbClr val="666666"/>
+                </a:solidFill>
+                <a:latin typeface="Calibri"/>
+              </a:rPr>
+              <a:t>Retrieval</a:t>
+            </a:r>
+          </a:p>
+        </p:txBody>
+      </p:sp>
+      <p:sp>
+        <p:nvSpPr>
+          <p:cNvPr id="6" name="Left Arrow 5"/>
+          <p:cNvSpPr/>
+          <p:nvPr/>
+        </p:nvSpPr>
+        <p:spPr>
+          <a:xfrm>
+            <a:off x="4754880" y="2514600"/>
+            <a:ext cx="219456" cy="274320"/>
+          </a:xfrm>
+          <a:prstGeom prst="leftArrow">
+            <a:avLst/>
+          </a:prstGeom>
+          <a:solidFill>
+            <a:srgbClr val="1F4E79"/>
+          </a:solidFill>
+          <a:ln>
+            <a:noFill/>
+          </a:ln>
+          <a:effectLst/>
+        </p:spPr>
+        <p:style>
+          <a:lnRef idx="1">
+            <a:schemeClr val="accent1"/>
+          </a:lnRef>
+          <a:fillRef idx="3">
+            <a:schemeClr val="accent1"/>
+          </a:fillRef>
+          <a:effectRef idx="2">
+            <a:schemeClr val="accent1"/>
+          </a:effectRef>
+          <a:fontRef idx="minor">
+            <a:schemeClr val="lt1"/>
+          </a:fontRef>
+        </p:style>
+        <p:txBody>
+          <a:bodyPr rtlCol="0" anchor="ctr"/>
+          <a:lstStyle/>
+          <a:p>
+            <a:pPr algn="ctr"/>
+          </a:p>
+        </p:txBody>
+      </p:sp>
+      <p:sp>
+        <p:nvSpPr>
+          <p:cNvPr id="7" name="Rounded Rectangle 6"/>
+          <p:cNvSpPr/>
+          <p:nvPr/>
+        </p:nvSpPr>
+        <p:spPr>
+          <a:xfrm>
+            <a:off x="4992624" y="2011680"/>
+            <a:ext cx="1965960" cy="1280160"/>
+          </a:xfrm>
+          <a:prstGeom prst="roundRect">
+            <a:avLst/>
+          </a:prstGeom>
+          <a:solidFill>
+            <a:srgbClr val="FDE9D9"/>
+          </a:solidFill>
+          <a:ln w="12700">
+            <a:solidFill>
+              <a:srgbClr val="1F4E79"/>
+            </a:solidFill>
+          </a:ln>
+          <a:effectLst/>
+        </p:spPr>
+        <p:style>
+          <a:lnRef idx="1">
+            <a:schemeClr val="accent1"/>
+          </a:lnRef>
+          <a:fillRef idx="3">
+            <a:schemeClr val="accent1"/>
+          </a:fillRef>
+          <a:effectRef idx="2">
+            <a:schemeClr val="accent1"/>
+          </a:effectRef>
+          <a:fontRef idx="minor">
+            <a:schemeClr val="lt1"/>
+          </a:fontRef>
+        </p:style>
+        <p:txBody>
+          <a:bodyPr rtlCol="0" anchor="ctr" wrap="square"/>
+          <a:lstStyle/>
+          <a:p>
+            <a:pPr algn="ctr" rtl="1"/>
+            <a:r>
+              <a:rPr sz="1600" b="1">
+                <a:solidFill>
+                  <a:srgbClr val="333333"/>
+                </a:solidFill>
+                <a:latin typeface="Arial"/>
+              </a:rPr>
+              <a:t>3) التوليد</a:t>
+            </a:r>
+          </a:p>
+          <a:p>
+            <a:pPr algn="ctr" rtl="0"/>
+            <a:r>
+              <a:rPr sz="1200">
+                <a:solidFill>
+                  <a:srgbClr val="666666"/>
+                </a:solidFill>
+                <a:latin typeface="Calibri"/>
+              </a:rPr>
+              <a:t>Generation</a:t>
+            </a:r>
+          </a:p>
+        </p:txBody>
+      </p:sp>
+      <p:sp>
+        <p:nvSpPr>
+          <p:cNvPr id="8" name="Left Arrow 7"/>
+          <p:cNvSpPr/>
+          <p:nvPr/>
+        </p:nvSpPr>
+        <p:spPr>
+          <a:xfrm>
+            <a:off x="6976872" y="2514600"/>
+            <a:ext cx="219456" cy="274320"/>
+          </a:xfrm>
+          <a:prstGeom prst="leftArrow">
+            <a:avLst/>
+          </a:prstGeom>
+          <a:solidFill>
+            <a:srgbClr val="1F4E79"/>
+          </a:solidFill>
+          <a:ln>
+            <a:noFill/>
+          </a:ln>
+          <a:effectLst/>
+        </p:spPr>
+        <p:style>
+          <a:lnRef idx="1">
+            <a:schemeClr val="accent1"/>
+          </a:lnRef>
+          <a:fillRef idx="3">
+            <a:schemeClr val="accent1"/>
+          </a:fillRef>
+          <a:effectRef idx="2">
+            <a:schemeClr val="accent1"/>
+          </a:effectRef>
+          <a:fontRef idx="minor">
+            <a:schemeClr val="lt1"/>
+          </a:fontRef>
+        </p:style>
+        <p:txBody>
+          <a:bodyPr rtlCol="0" anchor="ctr"/>
+          <a:lstStyle/>
+          <a:p>
+            <a:pPr algn="ctr"/>
+          </a:p>
+        </p:txBody>
+      </p:sp>
+      <p:sp>
+        <p:nvSpPr>
+          <p:cNvPr id="9" name="Rounded Rectangle 8"/>
+          <p:cNvSpPr/>
+          <p:nvPr/>
+        </p:nvSpPr>
+        <p:spPr>
+          <a:xfrm>
+            <a:off x="7214616" y="2011680"/>
+            <a:ext cx="1965960" cy="1280160"/>
+          </a:xfrm>
+          <a:prstGeom prst="roundRect">
+            <a:avLst/>
+          </a:prstGeom>
+          <a:solidFill>
+            <a:srgbClr val="EDEDED"/>
+          </a:solidFill>
+          <a:ln w="12700">
+            <a:solidFill>
+              <a:srgbClr val="1F4E79"/>
+            </a:solidFill>
+          </a:ln>
+          <a:effectLst/>
+        </p:spPr>
+        <p:style>
+          <a:lnRef idx="1">
+            <a:schemeClr val="accent1"/>
+          </a:lnRef>
+          <a:fillRef idx="3">
+            <a:schemeClr val="accent1"/>
+          </a:fillRef>
+          <a:effectRef idx="2">
+            <a:schemeClr val="accent1"/>
+          </a:effectRef>
+          <a:fontRef idx="minor">
+            <a:schemeClr val="lt1"/>
+          </a:fontRef>
+        </p:style>
+        <p:txBody>
+          <a:bodyPr rtlCol="0" anchor="ctr" wrap="square"/>
+          <a:lstStyle/>
+          <a:p>
+            <a:pPr algn="ctr" rtl="1"/>
+            <a:r>
+              <a:rPr sz="1600" b="1">
+                <a:solidFill>
+                  <a:srgbClr val="333333"/>
+                </a:solidFill>
+                <a:latin typeface="Arial"/>
+              </a:rPr>
+              <a:t>4) التقييم</a:t>
+            </a:r>
+          </a:p>
+          <a:p>
+            <a:pPr algn="ctr" rtl="0"/>
+            <a:r>
+              <a:rPr sz="1200">
+                <a:solidFill>
+                  <a:srgbClr val="666666"/>
+                </a:solidFill>
+                <a:latin typeface="Calibri"/>
+              </a:rPr>
+              <a:t>Evaluation</a:t>
+            </a:r>
+          </a:p>
+        </p:txBody>
+      </p:sp>
+      <p:sp>
+        <p:nvSpPr>
+          <p:cNvPr id="10" name="Left Arrow 9"/>
+          <p:cNvSpPr/>
+          <p:nvPr/>
+        </p:nvSpPr>
+        <p:spPr>
+          <a:xfrm>
+            <a:off x="9198864" y="2514600"/>
+            <a:ext cx="219456" cy="274320"/>
+          </a:xfrm>
+          <a:prstGeom prst="leftArrow">
+            <a:avLst/>
+          </a:prstGeom>
+          <a:solidFill>
+            <a:srgbClr val="1F4E79"/>
+          </a:solidFill>
+          <a:ln>
+            <a:noFill/>
+          </a:ln>
+          <a:effectLst/>
+        </p:spPr>
+        <p:style>
+          <a:lnRef idx="1">
+            <a:schemeClr val="accent1"/>
+          </a:lnRef>
+          <a:fillRef idx="3">
+            <a:schemeClr val="accent1"/>
+          </a:fillRef>
+          <a:effectRef idx="2">
+            <a:schemeClr val="accent1"/>
+          </a:effectRef>
+          <a:fontRef idx="minor">
+            <a:schemeClr val="lt1"/>
+          </a:fontRef>
+        </p:style>
+        <p:txBody>
+          <a:bodyPr rtlCol="0" anchor="ctr"/>
+          <a:lstStyle/>
+          <a:p>
+            <a:pPr algn="ctr"/>
+          </a:p>
+        </p:txBody>
+      </p:sp>
+      <p:sp>
+        <p:nvSpPr>
+          <p:cNvPr id="11" name="Rounded Rectangle 10"/>
+          <p:cNvSpPr/>
+          <p:nvPr/>
+        </p:nvSpPr>
+        <p:spPr>
+          <a:xfrm>
+            <a:off x="9436608" y="2011680"/>
+            <a:ext cx="1965960" cy="1280160"/>
+          </a:xfrm>
+          <a:prstGeom prst="roundRect">
+            <a:avLst/>
+          </a:prstGeom>
+          <a:solidFill>
+            <a:srgbClr val="DCE6F1"/>
+          </a:solidFill>
+          <a:ln w="12700">
+            <a:solidFill>
+              <a:srgbClr val="1F4E79"/>
+            </a:solidFill>
+          </a:ln>
+          <a:effectLst/>
+        </p:spPr>
+        <p:style>
+          <a:lnRef idx="1">
+            <a:schemeClr val="accent1"/>
+          </a:lnRef>
+          <a:fillRef idx="3">
+            <a:schemeClr val="accent1"/>
+          </a:fillRef>
+          <a:effectRef idx="2">
+            <a:schemeClr val="accent1"/>
+          </a:effectRef>
+          <a:fontRef idx="minor">
+            <a:schemeClr val="lt1"/>
+          </a:fontRef>
+        </p:style>
+        <p:txBody>
+          <a:bodyPr rtlCol="0" anchor="ctr" wrap="square"/>
+          <a:lstStyle/>
+          <a:p>
+            <a:pPr algn="ctr" rtl="1"/>
+            <a:r>
+              <a:rPr sz="1600" b="1">
+                <a:solidFill>
+                  <a:srgbClr val="333333"/>
+                </a:solidFill>
+                <a:latin typeface="Arial"/>
+              </a:rPr>
+              <a:t>5) التحسين</a:t>
+            </a:r>
+          </a:p>
+          <a:p>
+            <a:pPr algn="ctr" rtl="0"/>
+            <a:r>
+              <a:rPr sz="1200">
+                <a:solidFill>
+                  <a:srgbClr val="666666"/>
+                </a:solidFill>
+                <a:latin typeface="Calibri"/>
+              </a:rPr>
+              <a:t>Optimization</a:t>
+            </a:r>
+          </a:p>
+        </p:txBody>
+      </p:sp>
+      <p:sp>
+        <p:nvSpPr>
+          <p:cNvPr id="12" name="Rounded Rectangle 11"/>
+          <p:cNvSpPr/>
+          <p:nvPr/>
+        </p:nvSpPr>
+        <p:spPr>
+          <a:xfrm>
+            <a:off x="548640" y="3749039"/>
+            <a:ext cx="1965960" cy="914400"/>
+          </a:xfrm>
+          <a:prstGeom prst="roundRect">
+            <a:avLst/>
+          </a:prstGeom>
+          <a:solidFill>
+            <a:srgbClr val="EDEDED"/>
+          </a:solidFill>
+          <a:ln w="12700">
+            <a:solidFill>
+              <a:srgbClr val="1F4E79"/>
+            </a:solidFill>
+          </a:ln>
+          <a:effectLst/>
+        </p:spPr>
+        <p:style>
+          <a:lnRef idx="1">
+            <a:schemeClr val="accent1"/>
+          </a:lnRef>
+          <a:fillRef idx="3">
+            <a:schemeClr val="accent1"/>
+          </a:fillRef>
+          <a:effectRef idx="2">
+            <a:schemeClr val="accent1"/>
+          </a:effectRef>
+          <a:fontRef idx="minor">
+            <a:schemeClr val="lt1"/>
+          </a:fontRef>
+        </p:style>
+        <p:txBody>
+          <a:bodyPr rtlCol="0" anchor="ctr" wrap="square"/>
+          <a:lstStyle/>
+          <a:p>
+            <a:pPr algn="ctr" rtl="1"/>
+            <a:r>
+              <a:rPr sz="1200" b="1">
+                <a:solidFill>
+                  <a:srgbClr val="333333"/>
+                </a:solidFill>
+                <a:latin typeface="Arial"/>
+              </a:rPr>
+              <a:t>تقسيم تكراري + HNSW</a:t>
+            </a:r>
+          </a:p>
+        </p:txBody>
+      </p:sp>
+      <p:sp>
+        <p:nvSpPr>
+          <p:cNvPr id="13" name="Rounded Rectangle 12"/>
+          <p:cNvSpPr/>
+          <p:nvPr/>
+        </p:nvSpPr>
+        <p:spPr>
+          <a:xfrm>
+            <a:off x="2770632" y="3749039"/>
+            <a:ext cx="1965960" cy="914400"/>
+          </a:xfrm>
+          <a:prstGeom prst="roundRect">
+            <a:avLst/>
+          </a:prstGeom>
+          <a:solidFill>
+            <a:srgbClr val="EDEDED"/>
+          </a:solidFill>
+          <a:ln w="12700">
+            <a:solidFill>
+              <a:srgbClr val="1F4E79"/>
+            </a:solidFill>
+          </a:ln>
+          <a:effectLst/>
+        </p:spPr>
+        <p:style>
+          <a:lnRef idx="1">
+            <a:schemeClr val="accent1"/>
+          </a:lnRef>
+          <a:fillRef idx="3">
+            <a:schemeClr val="accent1"/>
+          </a:fillRef>
+          <a:effectRef idx="2">
+            <a:schemeClr val="accent1"/>
+          </a:effectRef>
+          <a:fontRef idx="minor">
+            <a:schemeClr val="lt1"/>
+          </a:fontRef>
+        </p:style>
+        <p:txBody>
+          <a:bodyPr rtlCol="0" anchor="ctr" wrap="square"/>
+          <a:lstStyle/>
+          <a:p>
+            <a:pPr algn="ctr" rtl="1"/>
+            <a:r>
+              <a:rPr sz="1200" b="1">
+                <a:solidFill>
+                  <a:srgbClr val="333333"/>
+                </a:solidFill>
+                <a:latin typeface="Arial"/>
+              </a:rPr>
+              <a:t>بحث هجين + إعادة ترتيب</a:t>
+            </a:r>
+          </a:p>
+        </p:txBody>
+      </p:sp>
+      <p:sp>
+        <p:nvSpPr>
+          <p:cNvPr id="14" name="Rounded Rectangle 13"/>
+          <p:cNvSpPr/>
+          <p:nvPr/>
+        </p:nvSpPr>
+        <p:spPr>
+          <a:xfrm>
+            <a:off x="4992624" y="3749039"/>
+            <a:ext cx="1965960" cy="914400"/>
+          </a:xfrm>
+          <a:prstGeom prst="roundRect">
+            <a:avLst/>
+          </a:prstGeom>
+          <a:solidFill>
+            <a:srgbClr val="EDEDED"/>
+          </a:solidFill>
+          <a:ln w="12700">
+            <a:solidFill>
+              <a:srgbClr val="1F4E79"/>
+            </a:solidFill>
+          </a:ln>
+          <a:effectLst/>
+        </p:spPr>
+        <p:style>
+          <a:lnRef idx="1">
+            <a:schemeClr val="accent1"/>
+          </a:lnRef>
+          <a:fillRef idx="3">
+            <a:schemeClr val="accent1"/>
+          </a:fillRef>
+          <a:effectRef idx="2">
+            <a:schemeClr val="accent1"/>
+          </a:effectRef>
+          <a:fontRef idx="minor">
+            <a:schemeClr val="lt1"/>
+          </a:fontRef>
+        </p:style>
+        <p:txBody>
+          <a:bodyPr rtlCol="0" anchor="ctr" wrap="square"/>
+          <a:lstStyle/>
+          <a:p>
+            <a:pPr algn="ctr" rtl="1"/>
+            <a:r>
+              <a:rPr sz="1200" b="1">
+                <a:solidFill>
+                  <a:srgbClr val="333333"/>
+                </a:solidFill>
+                <a:latin typeface="Arial"/>
+              </a:rPr>
+              <a:t>موجِّه مقيَّد بالمصادر</a:t>
+            </a:r>
+          </a:p>
+        </p:txBody>
+      </p:sp>
+      <p:sp>
+        <p:nvSpPr>
+          <p:cNvPr id="15" name="Rounded Rectangle 14"/>
+          <p:cNvSpPr/>
+          <p:nvPr/>
+        </p:nvSpPr>
+        <p:spPr>
+          <a:xfrm>
+            <a:off x="7214616" y="3749039"/>
+            <a:ext cx="1965960" cy="914400"/>
+          </a:xfrm>
+          <a:prstGeom prst="roundRect">
+            <a:avLst/>
+          </a:prstGeom>
+          <a:solidFill>
+            <a:srgbClr val="EDEDED"/>
+          </a:solidFill>
+          <a:ln w="12700">
+            <a:solidFill>
+              <a:srgbClr val="1F4E79"/>
+            </a:solidFill>
+          </a:ln>
+          <a:effectLst/>
+        </p:spPr>
+        <p:style>
+          <a:lnRef idx="1">
+            <a:schemeClr val="accent1"/>
+          </a:lnRef>
+          <a:fillRef idx="3">
+            <a:schemeClr val="accent1"/>
+          </a:fillRef>
+          <a:effectRef idx="2">
+            <a:schemeClr val="accent1"/>
+          </a:effectRef>
+          <a:fontRef idx="minor">
+            <a:schemeClr val="lt1"/>
+          </a:fontRef>
+        </p:style>
+        <p:txBody>
+          <a:bodyPr rtlCol="0" anchor="ctr" wrap="square"/>
+          <a:lstStyle/>
+          <a:p>
+            <a:pPr algn="ctr" rtl="1"/>
+            <a:r>
+              <a:rPr sz="1200" b="1">
+                <a:solidFill>
+                  <a:srgbClr val="333333"/>
+                </a:solidFill>
+                <a:latin typeface="Arial"/>
+              </a:rPr>
+              <a:t>مثلث RAG (RAGAS)</a:t>
+            </a:r>
+          </a:p>
+        </p:txBody>
+      </p:sp>
+      <p:sp>
+        <p:nvSpPr>
+          <p:cNvPr id="16" name="Rounded Rectangle 15"/>
+          <p:cNvSpPr/>
+          <p:nvPr/>
+        </p:nvSpPr>
+        <p:spPr>
+          <a:xfrm>
+            <a:off x="9436608" y="3749039"/>
+            <a:ext cx="1965960" cy="914400"/>
+          </a:xfrm>
+          <a:prstGeom prst="roundRect">
+            <a:avLst/>
+          </a:prstGeom>
+          <a:solidFill>
+            <a:srgbClr val="EDEDED"/>
+          </a:solidFill>
+          <a:ln w="12700">
+            <a:solidFill>
+              <a:srgbClr val="1F4E79"/>
+            </a:solidFill>
+          </a:ln>
+          <a:effectLst/>
+        </p:spPr>
+        <p:style>
+          <a:lnRef idx="1">
+            <a:schemeClr val="accent1"/>
+          </a:lnRef>
+          <a:fillRef idx="3">
+            <a:schemeClr val="accent1"/>
+          </a:fillRef>
+          <a:effectRef idx="2">
+            <a:schemeClr val="accent1"/>
+          </a:effectRef>
+          <a:fontRef idx="minor">
+            <a:schemeClr val="lt1"/>
+          </a:fontRef>
+        </p:style>
+        <p:txBody>
+          <a:bodyPr rtlCol="0" anchor="ctr" wrap="square"/>
+          <a:lstStyle/>
+          <a:p>
+            <a:pPr algn="ctr" rtl="1"/>
+            <a:r>
+              <a:rPr sz="1200" b="1">
+                <a:solidFill>
+                  <a:srgbClr val="333333"/>
+                </a:solidFill>
+                <a:latin typeface="Arial"/>
+              </a:rPr>
+              <a:t>تخزين مؤقت + توجيه</a:t>
+            </a:r>
+          </a:p>
+        </p:txBody>
+      </p:sp>
+      <p:sp>
+        <p:nvSpPr>
+          <p:cNvPr id="17" name="TextBox 16"/>
           <p:cNvSpPr txBox="1"/>
           <p:nvPr/>
         </p:nvSpPr>
         <p:spPr>
           <a:xfrm>
-            <a:off x="640080" y="182880"/>
-            <a:ext cx="10972800" cy="640080"/>
+            <a:off x="640080" y="6126480"/>
+            <a:ext cx="10972800" cy="548640"/>
           </a:xfrm>
           <a:prstGeom prst="rect">
             <a:avLst/>
@@ -4568,29 +4895,33 @@
           <a:p>
             <a:pPr algn="r" rtl="1"/>
             <a:r>
-              <a:rPr sz="3200" b="1">
-                <a:solidFill>
-                  <a:srgbClr val="1F3B5C"/>
+              <a:rPr sz="1400">
+                <a:solidFill>
+                  <a:srgbClr val="666666"/>
                 </a:solidFill>
                 <a:latin typeface="Arial"/>
-                <a:cs typeface="Arial"/>
-                <a:ea typeface="Calibri"/>
-              </a:rPr>
-              <a:t>اختبار قصير / Quick Quiz</a:t>
-            </a:r>
-          </a:p>
-        </p:txBody>
-      </p:sp>
-      <p:sp>
-        <p:nvSpPr>
-          <p:cNvPr id="4" name="TextBox 3"/>
+              </a:rPr>
+              <a:t>من الفهرسة إلى التقييم — المسار التطبيقي في مختبر L03.</a:t>
+            </a:r>
+          </a:p>
+          <a:p>
+            <a:pPr algn="r" rtl="0"/>
+            <a:r>
+              <a:t>From indexing to evaluation — applied in lab L03.</a:t>
+            </a:r>
+          </a:p>
+        </p:txBody>
+      </p:sp>
+      <p:sp>
+        <p:nvSpPr>
+          <p:cNvPr id="18" name="TextBox 17"/>
           <p:cNvSpPr txBox="1"/>
           <p:nvPr/>
         </p:nvSpPr>
         <p:spPr>
           <a:xfrm>
-            <a:off x="640080" y="1280160"/>
-            <a:ext cx="10972800" cy="5212080"/>
+            <a:off x="640080" y="6400800"/>
+            <a:ext cx="8686800" cy="320040"/>
           </a:xfrm>
           <a:prstGeom prst="rect">
             <a:avLst/>
@@ -4603,227 +4934,29 @@
           </a:bodyPr>
           <a:lstStyle/>
           <a:p>
-            <a:pPr algn="r" rtl="1">
-              <a:spcBef>
-                <a:spcPts val="200"/>
-              </a:spcBef>
-              <a:spcAft>
-                <a:spcPts val="1000"/>
-              </a:spcAft>
-            </a:pPr>
-            <a:r>
-              <a:rPr sz="2000">
-                <a:solidFill>
-                  <a:srgbClr val="333333"/>
+            <a:pPr algn="r" rtl="1"/>
+            <a:r>
+              <a:rPr sz="1000" b="0">
+                <a:solidFill>
+                  <a:srgbClr val="666666"/>
                 </a:solidFill>
                 <a:latin typeface="Arial"/>
-                <a:cs typeface="Arial"/>
-                <a:ea typeface="Calibri"/>
-              </a:rPr>
-              <a:t>• 1. ما استراتيجية التقسيم الموصى بها افتراضيًا؟</a:t>
-            </a:r>
-          </a:p>
-          <a:p>
-            <a:pPr algn="r" rtl="0">
-              <a:spcBef>
-                <a:spcPts val="200"/>
-              </a:spcBef>
-              <a:spcAft>
-                <a:spcPts val="1000"/>
-              </a:spcAft>
-            </a:pPr>
-            <a:r>
-              <a:rPr sz="1700">
-                <a:solidFill>
-                  <a:srgbClr val="666666"/>
-                </a:solidFill>
-                <a:latin typeface="Calibri"/>
-                <a:cs typeface="Arial"/>
-                <a:ea typeface="Calibri"/>
-              </a:rPr>
-              <a:t>• Which chunking strategy is the recommended default?</a:t>
-            </a:r>
-          </a:p>
-          <a:p>
-            <a:pPr algn="r" rtl="1">
-              <a:spcBef>
-                <a:spcPts val="200"/>
-              </a:spcBef>
-              <a:spcAft>
-                <a:spcPts val="1000"/>
-              </a:spcAft>
-            </a:pPr>
-            <a:r>
-              <a:rPr sz="2000">
-                <a:solidFill>
-                  <a:srgbClr val="333333"/>
-                </a:solidFill>
-                <a:latin typeface="Arial"/>
-                <a:cs typeface="Arial"/>
-                <a:ea typeface="Calibri"/>
-              </a:rPr>
-              <a:t>• 2. لماذا نجمع البحث الكثيف مع BM25؟</a:t>
-            </a:r>
-          </a:p>
-          <a:p>
-            <a:pPr algn="r" rtl="0">
-              <a:spcBef>
-                <a:spcPts val="200"/>
-              </a:spcBef>
-              <a:spcAft>
-                <a:spcPts val="1000"/>
-              </a:spcAft>
-            </a:pPr>
-            <a:r>
-              <a:rPr sz="1700">
-                <a:solidFill>
-                  <a:srgbClr val="666666"/>
-                </a:solidFill>
-                <a:latin typeface="Calibri"/>
-                <a:cs typeface="Arial"/>
-                <a:ea typeface="Calibri"/>
-              </a:rPr>
-              <a:t>• Why combine dense search with BM25?</a:t>
-            </a:r>
-          </a:p>
-          <a:p>
-            <a:pPr algn="r" rtl="1">
-              <a:spcBef>
-                <a:spcPts val="200"/>
-              </a:spcBef>
-              <a:spcAft>
-                <a:spcPts val="1000"/>
-              </a:spcAft>
-            </a:pPr>
-            <a:r>
-              <a:rPr sz="2000">
-                <a:solidFill>
-                  <a:srgbClr val="333333"/>
-                </a:solidFill>
-                <a:latin typeface="Arial"/>
-                <a:cs typeface="Arial"/>
-                <a:ea typeface="Calibri"/>
-              </a:rPr>
-              <a:t>• 3. ما مكونات مثلث تقييم RAG الثلاثة؟</a:t>
-            </a:r>
-          </a:p>
-          <a:p>
-            <a:pPr algn="r" rtl="0">
-              <a:spcBef>
-                <a:spcPts val="200"/>
-              </a:spcBef>
-              <a:spcAft>
-                <a:spcPts val="1000"/>
-              </a:spcAft>
-            </a:pPr>
-            <a:r>
-              <a:rPr sz="1700">
-                <a:solidFill>
-                  <a:srgbClr val="666666"/>
-                </a:solidFill>
-                <a:latin typeface="Calibri"/>
-                <a:cs typeface="Arial"/>
-                <a:ea typeface="Calibri"/>
-              </a:rPr>
-              <a:t>• Name the three parts of the RAG evaluation triad.</a:t>
-            </a:r>
-          </a:p>
-          <a:p>
-            <a:pPr algn="r" rtl="1">
-              <a:spcBef>
-                <a:spcPts val="200"/>
-              </a:spcBef>
-              <a:spcAft>
-                <a:spcPts val="1000"/>
-              </a:spcAft>
-            </a:pPr>
-            <a:r>
-              <a:rPr sz="2000">
-                <a:solidFill>
-                  <a:srgbClr val="333333"/>
-                </a:solidFill>
-                <a:latin typeface="Arial"/>
-                <a:cs typeface="Arial"/>
-                <a:ea typeface="Calibri"/>
-              </a:rPr>
-              <a:t>• 4. ما وظيفة إعادة الترتيب Cross-encoder؟</a:t>
-            </a:r>
-          </a:p>
-          <a:p>
-            <a:pPr algn="r" rtl="0">
-              <a:spcBef>
-                <a:spcPts val="200"/>
-              </a:spcBef>
-              <a:spcAft>
-                <a:spcPts val="1000"/>
-              </a:spcAft>
-            </a:pPr>
-            <a:r>
-              <a:rPr sz="1700">
-                <a:solidFill>
-                  <a:srgbClr val="666666"/>
-                </a:solidFill>
-                <a:latin typeface="Calibri"/>
-                <a:cs typeface="Arial"/>
-                <a:ea typeface="Calibri"/>
-              </a:rPr>
-              <a:t>• What does cross-encoder reranking do?</a:t>
-            </a:r>
-          </a:p>
-          <a:p>
-            <a:pPr algn="r" rtl="1">
-              <a:spcBef>
-                <a:spcPts val="200"/>
-              </a:spcBef>
-              <a:spcAft>
-                <a:spcPts val="1000"/>
-              </a:spcAft>
-            </a:pPr>
-            <a:r>
-              <a:rPr sz="2000">
-                <a:solidFill>
-                  <a:srgbClr val="333333"/>
-                </a:solidFill>
-                <a:latin typeface="Arial"/>
-                <a:cs typeface="Arial"/>
-                <a:ea typeface="Calibri"/>
-              </a:rPr>
-              <a:t>• 5. كيف يقلل التخزين الدلالي المؤقت التكلفة؟</a:t>
-            </a:r>
-          </a:p>
-          <a:p>
-            <a:pPr algn="r" rtl="0">
-              <a:spcBef>
-                <a:spcPts val="200"/>
-              </a:spcBef>
-              <a:spcAft>
-                <a:spcPts val="1000"/>
-              </a:spcAft>
-            </a:pPr>
-            <a:r>
-              <a:rPr sz="1700">
-                <a:solidFill>
-                  <a:srgbClr val="666666"/>
-                </a:solidFill>
-                <a:latin typeface="Calibri"/>
-                <a:cs typeface="Arial"/>
-                <a:ea typeface="Calibri"/>
-              </a:rPr>
-              <a:t>• How does semantic caching cut cost?</a:t>
-            </a:r>
-          </a:p>
-        </p:txBody>
-      </p:sp>
-      <p:sp>
-        <p:nvSpPr>
-          <p:cNvPr id="5" name="TextBox 4"/>
+              </a:rPr>
+              <a:t>Module 02 — Data &amp; AI Engineering Track  |  الوحدة الثانية</a:t>
+            </a:r>
+          </a:p>
+        </p:txBody>
+      </p:sp>
+      <p:sp>
+        <p:nvSpPr>
+          <p:cNvPr id="19" name="TextBox 18"/>
           <p:cNvSpPr txBox="1"/>
           <p:nvPr/>
         </p:nvSpPr>
         <p:spPr>
           <a:xfrm>
-            <a:off x="640080" y="6400800"/>
-            <a:ext cx="8686800" cy="320040"/>
+            <a:off x="9601200" y="6400800"/>
+            <a:ext cx="1920240" cy="320040"/>
           </a:xfrm>
           <a:prstGeom prst="rect">
             <a:avLst/>
@@ -4836,202 +4969,15 @@
           </a:bodyPr>
           <a:lstStyle/>
           <a:p>
-            <a:pPr algn="r" rtl="1"/>
+            <a:pPr algn="l" rtl="0"/>
             <a:r>
               <a:rPr sz="1000" b="0">
                 <a:solidFill>
                   <a:srgbClr val="666666"/>
                 </a:solidFill>
-                <a:latin typeface="Arial"/>
-                <a:cs typeface="Arial"/>
-                <a:ea typeface="Calibri"/>
-              </a:rPr>
-              <a:t>Module 02 — Data &amp; AI Engineering Track  |  الوحدة الثانية</a:t>
-            </a:r>
-          </a:p>
-        </p:txBody>
-      </p:sp>
-      <p:sp>
-        <p:nvSpPr>
-          <p:cNvPr id="6" name="TextBox 5"/>
-          <p:cNvSpPr txBox="1"/>
-          <p:nvPr/>
-        </p:nvSpPr>
-        <p:spPr>
-          <a:xfrm>
-            <a:off x="9601200" y="6400800"/>
-            <a:ext cx="1920240" cy="320040"/>
-          </a:xfrm>
-          <a:prstGeom prst="rect">
-            <a:avLst/>
-          </a:prstGeom>
-          <a:noFill/>
-        </p:spPr>
-        <p:txBody>
-          <a:bodyPr wrap="square">
-            <a:spAutoFit/>
-          </a:bodyPr>
-          <a:lstStyle/>
-          <a:p>
-            <a:pPr algn="l" rtl="0"/>
-            <a:r>
-              <a:rPr sz="1000" b="0">
-                <a:solidFill>
-                  <a:srgbClr val="666666"/>
-                </a:solidFill>
                 <a:latin typeface="Calibri"/>
-                <a:cs typeface="Arial"/>
-                <a:ea typeface="Calibri"/>
-              </a:rPr>
-              <a:t>V09  •  9/14</a:t>
-            </a:r>
-          </a:p>
-        </p:txBody>
-      </p:sp>
-      <p:sp>
-        <p:nvSpPr>
-          <p:cNvPr id="7" name="TextBox 6"/>
-          <p:cNvSpPr txBox="1"/>
-          <p:nvPr/>
-        </p:nvSpPr>
-        <p:spPr>
-          <a:xfrm>
-            <a:off x="640080" y="6400800"/>
-            <a:ext cx="8686800" cy="320040"/>
-          </a:xfrm>
-          <a:prstGeom prst="rect">
-            <a:avLst/>
-          </a:prstGeom>
-          <a:noFill/>
-        </p:spPr>
-        <p:txBody>
-          <a:bodyPr wrap="square">
-            <a:spAutoFit/>
-          </a:bodyPr>
-          <a:lstStyle/>
-          <a:p>
-            <a:pPr algn="r" rtl="1"/>
-            <a:r>
-              <a:rPr sz="1000" b="0">
-                <a:solidFill>
-                  <a:srgbClr val="666666"/>
-                </a:solidFill>
-                <a:latin typeface="Arial"/>
-                <a:cs typeface="Arial"/>
-                <a:ea typeface="Calibri"/>
-              </a:rPr>
-              <a:t>Module 02 — Data &amp; AI Engineering Track  |  الوحدة الثانية</a:t>
-            </a:r>
-          </a:p>
-        </p:txBody>
-      </p:sp>
-      <p:sp>
-        <p:nvSpPr>
-          <p:cNvPr id="8" name="TextBox 7"/>
-          <p:cNvSpPr txBox="1"/>
-          <p:nvPr/>
-        </p:nvSpPr>
-        <p:spPr>
-          <a:xfrm>
-            <a:off x="9601200" y="6400800"/>
-            <a:ext cx="1920240" cy="320040"/>
-          </a:xfrm>
-          <a:prstGeom prst="rect">
-            <a:avLst/>
-          </a:prstGeom>
-          <a:noFill/>
-        </p:spPr>
-        <p:txBody>
-          <a:bodyPr wrap="square">
-            <a:spAutoFit/>
-          </a:bodyPr>
-          <a:lstStyle/>
-          <a:p>
-            <a:pPr algn="l" rtl="0"/>
-            <a:r>
-              <a:rPr sz="1000" b="0">
-                <a:solidFill>
-                  <a:srgbClr val="666666"/>
-                </a:solidFill>
-                <a:latin typeface="Calibri"/>
-                <a:cs typeface="Arial"/>
-                <a:ea typeface="Calibri"/>
-              </a:rPr>
-              <a:t>09_  •  12/14</a:t>
-            </a:r>
-          </a:p>
-        </p:txBody>
-      </p:sp>
-      <p:sp>
-        <p:nvSpPr>
-          <p:cNvPr id="9" name="TextBox 8"/>
-          <p:cNvSpPr txBox="1"/>
-          <p:nvPr/>
-        </p:nvSpPr>
-        <p:spPr>
-          <a:xfrm>
-            <a:off x="640080" y="6400800"/>
-            <a:ext cx="8686800" cy="320040"/>
-          </a:xfrm>
-          <a:prstGeom prst="rect">
-            <a:avLst/>
-          </a:prstGeom>
-          <a:noFill/>
-        </p:spPr>
-        <p:txBody>
-          <a:bodyPr wrap="square">
-            <a:spAutoFit/>
-          </a:bodyPr>
-          <a:lstStyle/>
-          <a:p>
-            <a:pPr algn="r" rtl="1"/>
-            <a:r>
-              <a:rPr sz="1000" b="0">
-                <a:solidFill>
-                  <a:srgbClr val="666666"/>
-                </a:solidFill>
-                <a:latin typeface="Arial"/>
-                <a:cs typeface="Arial"/>
-                <a:ea typeface="Calibri"/>
-              </a:rPr>
-              <a:t>Module 02 — Data &amp; AI Engineering Track  |  الوحدة الثانية</a:t>
-            </a:r>
-          </a:p>
-        </p:txBody>
-      </p:sp>
-      <p:sp>
-        <p:nvSpPr>
-          <p:cNvPr id="10" name="TextBox 9"/>
-          <p:cNvSpPr txBox="1"/>
-          <p:nvPr/>
-        </p:nvSpPr>
-        <p:spPr>
-          <a:xfrm>
-            <a:off x="9601200" y="6400800"/>
-            <a:ext cx="1920240" cy="320040"/>
-          </a:xfrm>
-          <a:prstGeom prst="rect">
-            <a:avLst/>
-          </a:prstGeom>
-          <a:noFill/>
-        </p:spPr>
-        <p:txBody>
-          <a:bodyPr wrap="square">
-            <a:spAutoFit/>
-          </a:bodyPr>
-          <a:lstStyle/>
-          <a:p>
-            <a:pPr algn="l" rtl="0"/>
-            <a:r>
-              <a:rPr sz="1000" b="0">
-                <a:solidFill>
-                  <a:srgbClr val="666666"/>
-                </a:solidFill>
-                <a:latin typeface="Calibri"/>
-                <a:cs typeface="Arial"/>
-                <a:ea typeface="Calibri"/>
-              </a:rPr>
-              <a:t>09_  •  12/14</a:t>
+              </a:rPr>
+              <a:t>V09  •  4/15</a:t>
             </a:r>
           </a:p>
         </p:txBody>
@@ -5064,22 +5010,57 @@
       <p:grpSpPr/>
       <p:sp>
         <p:nvSpPr>
-          <p:cNvPr id="2" name="Rectangle 1"/>
+          <p:cNvPr id="2" name="TextBox 1"/>
+          <p:cNvSpPr txBox="1"/>
+          <p:nvPr/>
+        </p:nvSpPr>
+        <p:spPr>
+          <a:xfrm>
+            <a:off x="640080" y="137160"/>
+            <a:ext cx="10972800" cy="640080"/>
+          </a:xfrm>
+          <a:prstGeom prst="rect">
+            <a:avLst/>
+          </a:prstGeom>
+          <a:noFill/>
+        </p:spPr>
+        <p:txBody>
+          <a:bodyPr wrap="none">
+            <a:spAutoFit/>
+          </a:bodyPr>
+          <a:lstStyle/>
+          <a:p>
+            <a:pPr algn="r" rtl="1"/>
+            <a:r>
+              <a:rPr sz="3000" b="1">
+                <a:solidFill>
+                  <a:srgbClr val="1F3B5C"/>
+                </a:solidFill>
+                <a:latin typeface="Arial"/>
+              </a:rPr>
+              <a:t>استراتيجيات تقسيم النصوص / Chunking Strategies</a:t>
+            </a:r>
+          </a:p>
+        </p:txBody>
+      </p:sp>
+      <p:sp>
+        <p:nvSpPr>
+          <p:cNvPr id="3" name="Rounded Rectangle 2"/>
           <p:cNvSpPr/>
           <p:nvPr/>
         </p:nvSpPr>
         <p:spPr>
           <a:xfrm>
-            <a:off x="0" y="0"/>
-            <a:ext cx="12191695" cy="1005840"/>
-          </a:xfrm>
-          <a:prstGeom prst="rect">
+            <a:off x="822960" y="1234440"/>
+            <a:ext cx="2560320" cy="777240"/>
+          </a:xfrm>
+          <a:prstGeom prst="roundRect">
             <a:avLst/>
           </a:prstGeom>
           <a:solidFill>
-            <a:srgbClr val="FFFFFF"/>
+            <a:srgbClr val="EDEDED"/>
           </a:solidFill>
-          <a:ln w="25400">
+          <a:ln w="12700">
             <a:solidFill>
               <a:srgbClr val="1F4E79"/>
             </a:solidFill>
@@ -5101,23 +5082,587 @@
           </a:fontRef>
         </p:style>
         <p:txBody>
-          <a:bodyPr rtlCol="0" anchor="ctr"/>
-          <a:lstStyle/>
-          <a:p>
-            <a:pPr algn="ctr"/>
-          </a:p>
-        </p:txBody>
-      </p:sp>
-      <p:sp>
-        <p:nvSpPr>
-          <p:cNvPr id="3" name="TextBox 2"/>
+          <a:bodyPr rtlCol="0" anchor="ctr" wrap="square"/>
+          <a:lstStyle/>
+          <a:p>
+            <a:pPr algn="ctr" rtl="1"/>
+            <a:r>
+              <a:rPr sz="1500" b="1">
+                <a:solidFill>
+                  <a:srgbClr val="333333"/>
+                </a:solidFill>
+                <a:latin typeface="Arial"/>
+              </a:rPr>
+              <a:t>ثابت الحجم</a:t>
+            </a:r>
+          </a:p>
+          <a:p>
+            <a:pPr algn="ctr" rtl="0"/>
+            <a:r>
+              <a:rPr sz="1100">
+                <a:solidFill>
+                  <a:srgbClr val="666666"/>
+                </a:solidFill>
+                <a:latin typeface="Calibri"/>
+              </a:rPr>
+              <a:t>Fixed-size</a:t>
+            </a:r>
+          </a:p>
+        </p:txBody>
+      </p:sp>
+      <p:sp>
+        <p:nvSpPr>
+          <p:cNvPr id="4" name="Rounded Rectangle 3"/>
+          <p:cNvSpPr/>
+          <p:nvPr/>
+        </p:nvSpPr>
+        <p:spPr>
+          <a:xfrm>
+            <a:off x="3566160" y="1234440"/>
+            <a:ext cx="5669280" cy="777240"/>
+          </a:xfrm>
+          <a:prstGeom prst="roundRect">
+            <a:avLst/>
+          </a:prstGeom>
+          <a:solidFill>
+            <a:srgbClr val="EDEDED"/>
+          </a:solidFill>
+          <a:ln w="12700">
+            <a:solidFill>
+              <a:srgbClr val="1F4E79"/>
+            </a:solidFill>
+          </a:ln>
+          <a:effectLst/>
+        </p:spPr>
+        <p:style>
+          <a:lnRef idx="1">
+            <a:schemeClr val="accent1"/>
+          </a:lnRef>
+          <a:fillRef idx="3">
+            <a:schemeClr val="accent1"/>
+          </a:fillRef>
+          <a:effectRef idx="2">
+            <a:schemeClr val="accent1"/>
+          </a:effectRef>
+          <a:fontRef idx="minor">
+            <a:schemeClr val="lt1"/>
+          </a:fontRef>
+        </p:style>
+        <p:txBody>
+          <a:bodyPr rtlCol="0" anchor="ctr" wrap="square"/>
+          <a:lstStyle/>
+          <a:p>
+            <a:pPr algn="ctr" rtl="1"/>
+            <a:r>
+              <a:rPr sz="1300" b="1">
+                <a:solidFill>
+                  <a:srgbClr val="333333"/>
+                </a:solidFill>
+                <a:latin typeface="Arial"/>
+              </a:rPr>
+              <a:t>أبسطها — يقطع الجُمل</a:t>
+            </a:r>
+          </a:p>
+        </p:txBody>
+      </p:sp>
+      <p:sp>
+        <p:nvSpPr>
+          <p:cNvPr id="5" name="Rounded Rectangle 4"/>
+          <p:cNvSpPr/>
+          <p:nvPr/>
+        </p:nvSpPr>
+        <p:spPr>
+          <a:xfrm>
+            <a:off x="822960" y="2148840"/>
+            <a:ext cx="2560320" cy="777240"/>
+          </a:xfrm>
+          <a:prstGeom prst="roundRect">
+            <a:avLst/>
+          </a:prstGeom>
+          <a:solidFill>
+            <a:srgbClr val="EDEDED"/>
+          </a:solidFill>
+          <a:ln w="12700">
+            <a:solidFill>
+              <a:srgbClr val="1F4E79"/>
+            </a:solidFill>
+          </a:ln>
+          <a:effectLst/>
+        </p:spPr>
+        <p:style>
+          <a:lnRef idx="1">
+            <a:schemeClr val="accent1"/>
+          </a:lnRef>
+          <a:fillRef idx="3">
+            <a:schemeClr val="accent1"/>
+          </a:fillRef>
+          <a:effectRef idx="2">
+            <a:schemeClr val="accent1"/>
+          </a:effectRef>
+          <a:fontRef idx="minor">
+            <a:schemeClr val="lt1"/>
+          </a:fontRef>
+        </p:style>
+        <p:txBody>
+          <a:bodyPr rtlCol="0" anchor="ctr" wrap="square"/>
+          <a:lstStyle/>
+          <a:p>
+            <a:pPr algn="ctr" rtl="1"/>
+            <a:r>
+              <a:rPr sz="1500" b="1">
+                <a:solidFill>
+                  <a:srgbClr val="333333"/>
+                </a:solidFill>
+                <a:latin typeface="Arial"/>
+              </a:rPr>
+              <a:t>دلالي</a:t>
+            </a:r>
+          </a:p>
+          <a:p>
+            <a:pPr algn="ctr" rtl="0"/>
+            <a:r>
+              <a:rPr sz="1100">
+                <a:solidFill>
+                  <a:srgbClr val="666666"/>
+                </a:solidFill>
+                <a:latin typeface="Calibri"/>
+              </a:rPr>
+              <a:t>Semantic</a:t>
+            </a:r>
+          </a:p>
+        </p:txBody>
+      </p:sp>
+      <p:sp>
+        <p:nvSpPr>
+          <p:cNvPr id="6" name="Rounded Rectangle 5"/>
+          <p:cNvSpPr/>
+          <p:nvPr/>
+        </p:nvSpPr>
+        <p:spPr>
+          <a:xfrm>
+            <a:off x="3566160" y="2148840"/>
+            <a:ext cx="5669280" cy="777240"/>
+          </a:xfrm>
+          <a:prstGeom prst="roundRect">
+            <a:avLst/>
+          </a:prstGeom>
+          <a:solidFill>
+            <a:srgbClr val="EDEDED"/>
+          </a:solidFill>
+          <a:ln w="12700">
+            <a:solidFill>
+              <a:srgbClr val="1F4E79"/>
+            </a:solidFill>
+          </a:ln>
+          <a:effectLst/>
+        </p:spPr>
+        <p:style>
+          <a:lnRef idx="1">
+            <a:schemeClr val="accent1"/>
+          </a:lnRef>
+          <a:fillRef idx="3">
+            <a:schemeClr val="accent1"/>
+          </a:fillRef>
+          <a:effectRef idx="2">
+            <a:schemeClr val="accent1"/>
+          </a:effectRef>
+          <a:fontRef idx="minor">
+            <a:schemeClr val="lt1"/>
+          </a:fontRef>
+        </p:style>
+        <p:txBody>
+          <a:bodyPr rtlCol="0" anchor="ctr" wrap="square"/>
+          <a:lstStyle/>
+          <a:p>
+            <a:pPr algn="ctr" rtl="1"/>
+            <a:r>
+              <a:rPr sz="1300" b="1">
+                <a:solidFill>
+                  <a:srgbClr val="333333"/>
+                </a:solidFill>
+                <a:latin typeface="Arial"/>
+              </a:rPr>
+              <a:t>تماسك أفضل — حساس للعتبة</a:t>
+            </a:r>
+          </a:p>
+        </p:txBody>
+      </p:sp>
+      <p:sp>
+        <p:nvSpPr>
+          <p:cNvPr id="7" name="Rounded Rectangle 6"/>
+          <p:cNvSpPr/>
+          <p:nvPr/>
+        </p:nvSpPr>
+        <p:spPr>
+          <a:xfrm>
+            <a:off x="822960" y="3063240"/>
+            <a:ext cx="2560320" cy="777240"/>
+          </a:xfrm>
+          <a:prstGeom prst="roundRect">
+            <a:avLst/>
+          </a:prstGeom>
+          <a:solidFill>
+            <a:srgbClr val="E2EFDA"/>
+          </a:solidFill>
+          <a:ln w="12700">
+            <a:solidFill>
+              <a:srgbClr val="1F4E79"/>
+            </a:solidFill>
+          </a:ln>
+          <a:effectLst/>
+        </p:spPr>
+        <p:style>
+          <a:lnRef idx="1">
+            <a:schemeClr val="accent1"/>
+          </a:lnRef>
+          <a:fillRef idx="3">
+            <a:schemeClr val="accent1"/>
+          </a:fillRef>
+          <a:effectRef idx="2">
+            <a:schemeClr val="accent1"/>
+          </a:effectRef>
+          <a:fontRef idx="minor">
+            <a:schemeClr val="lt1"/>
+          </a:fontRef>
+        </p:style>
+        <p:txBody>
+          <a:bodyPr rtlCol="0" anchor="ctr" wrap="square"/>
+          <a:lstStyle/>
+          <a:p>
+            <a:pPr algn="ctr" rtl="1"/>
+            <a:r>
+              <a:rPr sz="1500" b="1">
+                <a:solidFill>
+                  <a:srgbClr val="333333"/>
+                </a:solidFill>
+                <a:latin typeface="Arial"/>
+              </a:rPr>
+              <a:t>تكراري ★</a:t>
+            </a:r>
+          </a:p>
+          <a:p>
+            <a:pPr algn="ctr" rtl="0"/>
+            <a:r>
+              <a:rPr sz="1100">
+                <a:solidFill>
+                  <a:srgbClr val="666666"/>
+                </a:solidFill>
+                <a:latin typeface="Calibri"/>
+              </a:rPr>
+              <a:t>Recursive</a:t>
+            </a:r>
+          </a:p>
+        </p:txBody>
+      </p:sp>
+      <p:sp>
+        <p:nvSpPr>
+          <p:cNvPr id="8" name="Rounded Rectangle 7"/>
+          <p:cNvSpPr/>
+          <p:nvPr/>
+        </p:nvSpPr>
+        <p:spPr>
+          <a:xfrm>
+            <a:off x="3566160" y="3063240"/>
+            <a:ext cx="5669280" cy="777240"/>
+          </a:xfrm>
+          <a:prstGeom prst="roundRect">
+            <a:avLst/>
+          </a:prstGeom>
+          <a:solidFill>
+            <a:srgbClr val="EDEDED"/>
+          </a:solidFill>
+          <a:ln w="12700">
+            <a:solidFill>
+              <a:srgbClr val="1F4E79"/>
+            </a:solidFill>
+          </a:ln>
+          <a:effectLst/>
+        </p:spPr>
+        <p:style>
+          <a:lnRef idx="1">
+            <a:schemeClr val="accent1"/>
+          </a:lnRef>
+          <a:fillRef idx="3">
+            <a:schemeClr val="accent1"/>
+          </a:fillRef>
+          <a:effectRef idx="2">
+            <a:schemeClr val="accent1"/>
+          </a:effectRef>
+          <a:fontRef idx="minor">
+            <a:schemeClr val="lt1"/>
+          </a:fontRef>
+        </p:style>
+        <p:txBody>
+          <a:bodyPr rtlCol="0" anchor="ctr" wrap="square"/>
+          <a:lstStyle/>
+          <a:p>
+            <a:pPr algn="ctr" rtl="1"/>
+            <a:r>
+              <a:rPr sz="1300" b="1">
+                <a:solidFill>
+                  <a:srgbClr val="333333"/>
+                </a:solidFill>
+                <a:latin typeface="Arial"/>
+              </a:rPr>
+              <a:t>الموصى به افتراضيًا</a:t>
+            </a:r>
+          </a:p>
+        </p:txBody>
+      </p:sp>
+      <p:sp>
+        <p:nvSpPr>
+          <p:cNvPr id="9" name="Rounded Rectangle 8"/>
+          <p:cNvSpPr/>
+          <p:nvPr/>
+        </p:nvSpPr>
+        <p:spPr>
+          <a:xfrm>
+            <a:off x="822960" y="3977640"/>
+            <a:ext cx="2560320" cy="777240"/>
+          </a:xfrm>
+          <a:prstGeom prst="roundRect">
+            <a:avLst/>
+          </a:prstGeom>
+          <a:solidFill>
+            <a:srgbClr val="EDEDED"/>
+          </a:solidFill>
+          <a:ln w="12700">
+            <a:solidFill>
+              <a:srgbClr val="1F4E79"/>
+            </a:solidFill>
+          </a:ln>
+          <a:effectLst/>
+        </p:spPr>
+        <p:style>
+          <a:lnRef idx="1">
+            <a:schemeClr val="accent1"/>
+          </a:lnRef>
+          <a:fillRef idx="3">
+            <a:schemeClr val="accent1"/>
+          </a:fillRef>
+          <a:effectRef idx="2">
+            <a:schemeClr val="accent1"/>
+          </a:effectRef>
+          <a:fontRef idx="minor">
+            <a:schemeClr val="lt1"/>
+          </a:fontRef>
+        </p:style>
+        <p:txBody>
+          <a:bodyPr rtlCol="0" anchor="ctr" wrap="square"/>
+          <a:lstStyle/>
+          <a:p>
+            <a:pPr algn="ctr" rtl="1"/>
+            <a:r>
+              <a:rPr sz="1500" b="1">
+                <a:solidFill>
+                  <a:srgbClr val="333333"/>
+                </a:solidFill>
+                <a:latin typeface="Arial"/>
+              </a:rPr>
+              <a:t>بحسب البنية</a:t>
+            </a:r>
+          </a:p>
+          <a:p>
+            <a:pPr algn="ctr" rtl="0"/>
+            <a:r>
+              <a:rPr sz="1100">
+                <a:solidFill>
+                  <a:srgbClr val="666666"/>
+                </a:solidFill>
+                <a:latin typeface="Calibri"/>
+              </a:rPr>
+              <a:t>Structure-based</a:t>
+            </a:r>
+          </a:p>
+        </p:txBody>
+      </p:sp>
+      <p:sp>
+        <p:nvSpPr>
+          <p:cNvPr id="10" name="Rounded Rectangle 9"/>
+          <p:cNvSpPr/>
+          <p:nvPr/>
+        </p:nvSpPr>
+        <p:spPr>
+          <a:xfrm>
+            <a:off x="3566160" y="3977640"/>
+            <a:ext cx="5669280" cy="777240"/>
+          </a:xfrm>
+          <a:prstGeom prst="roundRect">
+            <a:avLst/>
+          </a:prstGeom>
+          <a:solidFill>
+            <a:srgbClr val="EDEDED"/>
+          </a:solidFill>
+          <a:ln w="12700">
+            <a:solidFill>
+              <a:srgbClr val="1F4E79"/>
+            </a:solidFill>
+          </a:ln>
+          <a:effectLst/>
+        </p:spPr>
+        <p:style>
+          <a:lnRef idx="1">
+            <a:schemeClr val="accent1"/>
+          </a:lnRef>
+          <a:fillRef idx="3">
+            <a:schemeClr val="accent1"/>
+          </a:fillRef>
+          <a:effectRef idx="2">
+            <a:schemeClr val="accent1"/>
+          </a:effectRef>
+          <a:fontRef idx="minor">
+            <a:schemeClr val="lt1"/>
+          </a:fontRef>
+        </p:style>
+        <p:txBody>
+          <a:bodyPr rtlCol="0" anchor="ctr" wrap="square"/>
+          <a:lstStyle/>
+          <a:p>
+            <a:pPr algn="ctr" rtl="1"/>
+            <a:r>
+              <a:rPr sz="1300" b="1">
+                <a:solidFill>
+                  <a:srgbClr val="333333"/>
+                </a:solidFill>
+                <a:latin typeface="Arial"/>
+              </a:rPr>
+              <a:t>عناوين وأقسام — يُدمج مع التكراري</a:t>
+            </a:r>
+          </a:p>
+        </p:txBody>
+      </p:sp>
+      <p:sp>
+        <p:nvSpPr>
+          <p:cNvPr id="11" name="Rounded Rectangle 10"/>
+          <p:cNvSpPr/>
+          <p:nvPr/>
+        </p:nvSpPr>
+        <p:spPr>
+          <a:xfrm>
+            <a:off x="822960" y="4892040"/>
+            <a:ext cx="2560320" cy="777240"/>
+          </a:xfrm>
+          <a:prstGeom prst="roundRect">
+            <a:avLst/>
+          </a:prstGeom>
+          <a:solidFill>
+            <a:srgbClr val="EDEDED"/>
+          </a:solidFill>
+          <a:ln w="12700">
+            <a:solidFill>
+              <a:srgbClr val="1F4E79"/>
+            </a:solidFill>
+          </a:ln>
+          <a:effectLst/>
+        </p:spPr>
+        <p:style>
+          <a:lnRef idx="1">
+            <a:schemeClr val="accent1"/>
+          </a:lnRef>
+          <a:fillRef idx="3">
+            <a:schemeClr val="accent1"/>
+          </a:fillRef>
+          <a:effectRef idx="2">
+            <a:schemeClr val="accent1"/>
+          </a:effectRef>
+          <a:fontRef idx="minor">
+            <a:schemeClr val="lt1"/>
+          </a:fontRef>
+        </p:style>
+        <p:txBody>
+          <a:bodyPr rtlCol="0" anchor="ctr" wrap="square"/>
+          <a:lstStyle/>
+          <a:p>
+            <a:pPr algn="ctr" rtl="1"/>
+            <a:r>
+              <a:rPr sz="1500" b="1">
+                <a:solidFill>
+                  <a:srgbClr val="333333"/>
+                </a:solidFill>
+                <a:latin typeface="Arial"/>
+              </a:rPr>
+              <a:t>بالنموذج اللغوي</a:t>
+            </a:r>
+          </a:p>
+          <a:p>
+            <a:pPr algn="ctr" rtl="0"/>
+            <a:r>
+              <a:rPr sz="1100">
+                <a:solidFill>
+                  <a:srgbClr val="666666"/>
+                </a:solidFill>
+                <a:latin typeface="Calibri"/>
+              </a:rPr>
+              <a:t>LLM-based</a:t>
+            </a:r>
+          </a:p>
+        </p:txBody>
+      </p:sp>
+      <p:sp>
+        <p:nvSpPr>
+          <p:cNvPr id="12" name="Rounded Rectangle 11"/>
+          <p:cNvSpPr/>
+          <p:nvPr/>
+        </p:nvSpPr>
+        <p:spPr>
+          <a:xfrm>
+            <a:off x="3566160" y="4892040"/>
+            <a:ext cx="5669280" cy="777240"/>
+          </a:xfrm>
+          <a:prstGeom prst="roundRect">
+            <a:avLst/>
+          </a:prstGeom>
+          <a:solidFill>
+            <a:srgbClr val="EDEDED"/>
+          </a:solidFill>
+          <a:ln w="12700">
+            <a:solidFill>
+              <a:srgbClr val="1F4E79"/>
+            </a:solidFill>
+          </a:ln>
+          <a:effectLst/>
+        </p:spPr>
+        <p:style>
+          <a:lnRef idx="1">
+            <a:schemeClr val="accent1"/>
+          </a:lnRef>
+          <a:fillRef idx="3">
+            <a:schemeClr val="accent1"/>
+          </a:fillRef>
+          <a:effectRef idx="2">
+            <a:schemeClr val="accent1"/>
+          </a:effectRef>
+          <a:fontRef idx="minor">
+            <a:schemeClr val="lt1"/>
+          </a:fontRef>
+        </p:style>
+        <p:txBody>
+          <a:bodyPr rtlCol="0" anchor="ctr" wrap="square"/>
+          <a:lstStyle/>
+          <a:p>
+            <a:pPr algn="ctr" rtl="1"/>
+            <a:r>
+              <a:rPr sz="1300" b="1">
+                <a:solidFill>
+                  <a:srgbClr val="333333"/>
+                </a:solidFill>
+                <a:latin typeface="Arial"/>
+              </a:rPr>
+              <a:t>الأدق — الأغلى حسابيًا</a:t>
+            </a:r>
+          </a:p>
+        </p:txBody>
+      </p:sp>
+      <p:sp>
+        <p:nvSpPr>
+          <p:cNvPr id="13" name="TextBox 12"/>
           <p:cNvSpPr txBox="1"/>
           <p:nvPr/>
         </p:nvSpPr>
         <p:spPr>
           <a:xfrm>
-            <a:off x="640080" y="182880"/>
-            <a:ext cx="10972800" cy="640080"/>
+            <a:off x="640080" y="6126480"/>
+            <a:ext cx="10972800" cy="548640"/>
           </a:xfrm>
           <a:prstGeom prst="rect">
             <a:avLst/>
@@ -5132,29 +5677,33 @@
           <a:p>
             <a:pPr algn="r" rtl="1"/>
             <a:r>
-              <a:rPr sz="3200" b="1">
-                <a:solidFill>
-                  <a:srgbClr val="1F3B5C"/>
+              <a:rPr sz="1400">
+                <a:solidFill>
+                  <a:srgbClr val="666666"/>
                 </a:solidFill>
                 <a:latin typeface="Arial"/>
-                <a:cs typeface="Arial"/>
-                <a:ea typeface="Calibri"/>
-              </a:rPr>
-              <a:t>إجابات الاختبار / Quiz Answers</a:t>
-            </a:r>
-          </a:p>
-        </p:txBody>
-      </p:sp>
-      <p:sp>
-        <p:nvSpPr>
-          <p:cNvPr id="4" name="TextBox 3"/>
+              </a:rPr>
+              <a:t>★ التقسيم التكراري: فصل بالفقرات ثم تقسيم ما تجاوز الحد الأقصى.</a:t>
+            </a:r>
+          </a:p>
+          <a:p>
+            <a:pPr algn="r" rtl="0"/>
+            <a:r>
+              <a:t>★ Recursive: split by paragraphs, then oversized chunks.</a:t>
+            </a:r>
+          </a:p>
+        </p:txBody>
+      </p:sp>
+      <p:sp>
+        <p:nvSpPr>
+          <p:cNvPr id="14" name="TextBox 13"/>
           <p:cNvSpPr txBox="1"/>
           <p:nvPr/>
         </p:nvSpPr>
         <p:spPr>
           <a:xfrm>
-            <a:off x="640080" y="1280160"/>
-            <a:ext cx="10972800" cy="5212080"/>
+            <a:off x="640080" y="6400800"/>
+            <a:ext cx="8686800" cy="320040"/>
           </a:xfrm>
           <a:prstGeom prst="rect">
             <a:avLst/>
@@ -5167,227 +5716,29 @@
           </a:bodyPr>
           <a:lstStyle/>
           <a:p>
-            <a:pPr algn="r" rtl="1">
-              <a:spcBef>
-                <a:spcPts val="200"/>
-              </a:spcBef>
-              <a:spcAft>
-                <a:spcPts val="1000"/>
-              </a:spcAft>
-            </a:pPr>
-            <a:r>
-              <a:rPr sz="1800">
-                <a:solidFill>
-                  <a:srgbClr val="333333"/>
+            <a:pPr algn="r" rtl="1"/>
+            <a:r>
+              <a:rPr sz="1000" b="0">
+                <a:solidFill>
+                  <a:srgbClr val="666666"/>
                 </a:solidFill>
                 <a:latin typeface="Arial"/>
-                <a:cs typeface="Arial"/>
-                <a:ea typeface="Calibri"/>
-              </a:rPr>
-              <a:t>• 1. التقسيم التكراري Recursive Chunking.</a:t>
-            </a:r>
-          </a:p>
-          <a:p>
-            <a:pPr algn="r" rtl="0">
-              <a:spcBef>
-                <a:spcPts val="200"/>
-              </a:spcBef>
-              <a:spcAft>
-                <a:spcPts val="1000"/>
-              </a:spcAft>
-            </a:pPr>
-            <a:r>
-              <a:rPr sz="1500">
-                <a:solidFill>
-                  <a:srgbClr val="666666"/>
-                </a:solidFill>
-                <a:latin typeface="Calibri"/>
-                <a:cs typeface="Arial"/>
-                <a:ea typeface="Calibri"/>
-              </a:rPr>
-              <a:t>• Recursive chunking.</a:t>
-            </a:r>
-          </a:p>
-          <a:p>
-            <a:pPr algn="r" rtl="1">
-              <a:spcBef>
-                <a:spcPts val="200"/>
-              </a:spcBef>
-              <a:spcAft>
-                <a:spcPts val="1000"/>
-              </a:spcAft>
-            </a:pPr>
-            <a:r>
-              <a:rPr sz="1800">
-                <a:solidFill>
-                  <a:srgbClr val="333333"/>
-                </a:solidFill>
-                <a:latin typeface="Arial"/>
-                <a:cs typeface="Arial"/>
-                <a:ea typeface="Calibri"/>
-              </a:rPr>
-              <a:t>• 2. الكثيف يفهم المعنى وBM25 يطابق الكلمات النادرة حرفيًا.</a:t>
-            </a:r>
-          </a:p>
-          <a:p>
-            <a:pPr algn="r" rtl="0">
-              <a:spcBef>
-                <a:spcPts val="200"/>
-              </a:spcBef>
-              <a:spcAft>
-                <a:spcPts val="1000"/>
-              </a:spcAft>
-            </a:pPr>
-            <a:r>
-              <a:rPr sz="1500">
-                <a:solidFill>
-                  <a:srgbClr val="666666"/>
-                </a:solidFill>
-                <a:latin typeface="Calibri"/>
-                <a:cs typeface="Arial"/>
-                <a:ea typeface="Calibri"/>
-              </a:rPr>
-              <a:t>• Dense captures meaning; BM25 matches rare exact keywords.</a:t>
-            </a:r>
-          </a:p>
-          <a:p>
-            <a:pPr algn="r" rtl="1">
-              <a:spcBef>
-                <a:spcPts val="200"/>
-              </a:spcBef>
-              <a:spcAft>
-                <a:spcPts val="1000"/>
-              </a:spcAft>
-            </a:pPr>
-            <a:r>
-              <a:rPr sz="1800">
-                <a:solidFill>
-                  <a:srgbClr val="333333"/>
-                </a:solidFill>
-                <a:latin typeface="Arial"/>
-                <a:cs typeface="Arial"/>
-                <a:ea typeface="Calibri"/>
-              </a:rPr>
-              <a:t>• 3. الوفاء، ملاءمة الإجابة، دقة السياق.</a:t>
-            </a:r>
-          </a:p>
-          <a:p>
-            <a:pPr algn="r" rtl="0">
-              <a:spcBef>
-                <a:spcPts val="200"/>
-              </a:spcBef>
-              <a:spcAft>
-                <a:spcPts val="1000"/>
-              </a:spcAft>
-            </a:pPr>
-            <a:r>
-              <a:rPr sz="1500">
-                <a:solidFill>
-                  <a:srgbClr val="666666"/>
-                </a:solidFill>
-                <a:latin typeface="Calibri"/>
-                <a:cs typeface="Arial"/>
-                <a:ea typeface="Calibri"/>
-              </a:rPr>
-              <a:t>• Faithfulness, answer relevancy, context precision.</a:t>
-            </a:r>
-          </a:p>
-          <a:p>
-            <a:pPr algn="r" rtl="1">
-              <a:spcBef>
-                <a:spcPts val="200"/>
-              </a:spcBef>
-              <a:spcAft>
-                <a:spcPts val="1000"/>
-              </a:spcAft>
-            </a:pPr>
-            <a:r>
-              <a:rPr sz="1800">
-                <a:solidFill>
-                  <a:srgbClr val="333333"/>
-                </a:solidFill>
-                <a:latin typeface="Arial"/>
-                <a:cs typeface="Arial"/>
-                <a:ea typeface="Calibri"/>
-              </a:rPr>
-              <a:t>• 4. يعيد ترتيب المرشحين بنموذج أدق لرفع ملاءمة النتائج.</a:t>
-            </a:r>
-          </a:p>
-          <a:p>
-            <a:pPr algn="r" rtl="0">
-              <a:spcBef>
-                <a:spcPts val="200"/>
-              </a:spcBef>
-              <a:spcAft>
-                <a:spcPts val="1000"/>
-              </a:spcAft>
-            </a:pPr>
-            <a:r>
-              <a:rPr sz="1500">
-                <a:solidFill>
-                  <a:srgbClr val="666666"/>
-                </a:solidFill>
-                <a:latin typeface="Calibri"/>
-                <a:cs typeface="Arial"/>
-                <a:ea typeface="Calibri"/>
-              </a:rPr>
-              <a:t>• Re-scores candidates with a more accurate model.</a:t>
-            </a:r>
-          </a:p>
-          <a:p>
-            <a:pPr algn="r" rtl="1">
-              <a:spcBef>
-                <a:spcPts val="200"/>
-              </a:spcBef>
-              <a:spcAft>
-                <a:spcPts val="1000"/>
-              </a:spcAft>
-            </a:pPr>
-            <a:r>
-              <a:rPr sz="1800">
-                <a:solidFill>
-                  <a:srgbClr val="333333"/>
-                </a:solidFill>
-                <a:latin typeface="Arial"/>
-                <a:cs typeface="Arial"/>
-                <a:ea typeface="Calibri"/>
-              </a:rPr>
-              <a:t>• 5. يعيد استخدام إجابات الأسئلة المشابهة بدل استدعاء النموذج كل مرة.</a:t>
-            </a:r>
-          </a:p>
-          <a:p>
-            <a:pPr algn="r" rtl="0">
-              <a:spcBef>
-                <a:spcPts val="200"/>
-              </a:spcBef>
-              <a:spcAft>
-                <a:spcPts val="1000"/>
-              </a:spcAft>
-            </a:pPr>
-            <a:r>
-              <a:rPr sz="1500">
-                <a:solidFill>
-                  <a:srgbClr val="666666"/>
-                </a:solidFill>
-                <a:latin typeface="Calibri"/>
-                <a:cs typeface="Arial"/>
-                <a:ea typeface="Calibri"/>
-              </a:rPr>
-              <a:t>• Reuses answers for similar questions.</a:t>
-            </a:r>
-          </a:p>
-        </p:txBody>
-      </p:sp>
-      <p:sp>
-        <p:nvSpPr>
-          <p:cNvPr id="5" name="TextBox 4"/>
+              </a:rPr>
+              <a:t>Module 02 — Data &amp; AI Engineering Track  |  الوحدة الثانية</a:t>
+            </a:r>
+          </a:p>
+        </p:txBody>
+      </p:sp>
+      <p:sp>
+        <p:nvSpPr>
+          <p:cNvPr id="15" name="TextBox 14"/>
           <p:cNvSpPr txBox="1"/>
           <p:nvPr/>
         </p:nvSpPr>
         <p:spPr>
           <a:xfrm>
-            <a:off x="640080" y="6400800"/>
-            <a:ext cx="8686800" cy="320040"/>
+            <a:off x="9601200" y="6400800"/>
+            <a:ext cx="1920240" cy="320040"/>
           </a:xfrm>
           <a:prstGeom prst="rect">
             <a:avLst/>
@@ -5400,202 +5751,15 @@
           </a:bodyPr>
           <a:lstStyle/>
           <a:p>
-            <a:pPr algn="r" rtl="1"/>
+            <a:pPr algn="l" rtl="0"/>
             <a:r>
               <a:rPr sz="1000" b="0">
                 <a:solidFill>
                   <a:srgbClr val="666666"/>
                 </a:solidFill>
-                <a:latin typeface="Arial"/>
-                <a:cs typeface="Arial"/>
-                <a:ea typeface="Calibri"/>
-              </a:rPr>
-              <a:t>Module 02 — Data &amp; AI Engineering Track  |  الوحدة الثانية</a:t>
-            </a:r>
-          </a:p>
-        </p:txBody>
-      </p:sp>
-      <p:sp>
-        <p:nvSpPr>
-          <p:cNvPr id="6" name="TextBox 5"/>
-          <p:cNvSpPr txBox="1"/>
-          <p:nvPr/>
-        </p:nvSpPr>
-        <p:spPr>
-          <a:xfrm>
-            <a:off x="9601200" y="6400800"/>
-            <a:ext cx="1920240" cy="320040"/>
-          </a:xfrm>
-          <a:prstGeom prst="rect">
-            <a:avLst/>
-          </a:prstGeom>
-          <a:noFill/>
-        </p:spPr>
-        <p:txBody>
-          <a:bodyPr wrap="square">
-            <a:spAutoFit/>
-          </a:bodyPr>
-          <a:lstStyle/>
-          <a:p>
-            <a:pPr algn="l" rtl="0"/>
-            <a:r>
-              <a:rPr sz="1000" b="0">
-                <a:solidFill>
-                  <a:srgbClr val="666666"/>
-                </a:solidFill>
                 <a:latin typeface="Calibri"/>
-                <a:cs typeface="Arial"/>
-                <a:ea typeface="Calibri"/>
-              </a:rPr>
-              <a:t>V09  •  10/14</a:t>
-            </a:r>
-          </a:p>
-        </p:txBody>
-      </p:sp>
-      <p:sp>
-        <p:nvSpPr>
-          <p:cNvPr id="7" name="TextBox 6"/>
-          <p:cNvSpPr txBox="1"/>
-          <p:nvPr/>
-        </p:nvSpPr>
-        <p:spPr>
-          <a:xfrm>
-            <a:off x="640080" y="6400800"/>
-            <a:ext cx="8686800" cy="320040"/>
-          </a:xfrm>
-          <a:prstGeom prst="rect">
-            <a:avLst/>
-          </a:prstGeom>
-          <a:noFill/>
-        </p:spPr>
-        <p:txBody>
-          <a:bodyPr wrap="square">
-            <a:spAutoFit/>
-          </a:bodyPr>
-          <a:lstStyle/>
-          <a:p>
-            <a:pPr algn="r" rtl="1"/>
-            <a:r>
-              <a:rPr sz="1000" b="0">
-                <a:solidFill>
-                  <a:srgbClr val="666666"/>
-                </a:solidFill>
-                <a:latin typeface="Arial"/>
-                <a:cs typeface="Arial"/>
-                <a:ea typeface="Calibri"/>
-              </a:rPr>
-              <a:t>Module 02 — Data &amp; AI Engineering Track  |  الوحدة الثانية</a:t>
-            </a:r>
-          </a:p>
-        </p:txBody>
-      </p:sp>
-      <p:sp>
-        <p:nvSpPr>
-          <p:cNvPr id="8" name="TextBox 7"/>
-          <p:cNvSpPr txBox="1"/>
-          <p:nvPr/>
-        </p:nvSpPr>
-        <p:spPr>
-          <a:xfrm>
-            <a:off x="9601200" y="6400800"/>
-            <a:ext cx="1920240" cy="320040"/>
-          </a:xfrm>
-          <a:prstGeom prst="rect">
-            <a:avLst/>
-          </a:prstGeom>
-          <a:noFill/>
-        </p:spPr>
-        <p:txBody>
-          <a:bodyPr wrap="square">
-            <a:spAutoFit/>
-          </a:bodyPr>
-          <a:lstStyle/>
-          <a:p>
-            <a:pPr algn="l" rtl="0"/>
-            <a:r>
-              <a:rPr sz="1000" b="0">
-                <a:solidFill>
-                  <a:srgbClr val="666666"/>
-                </a:solidFill>
-                <a:latin typeface="Calibri"/>
-                <a:cs typeface="Arial"/>
-                <a:ea typeface="Calibri"/>
-              </a:rPr>
-              <a:t>09_  •  13/14</a:t>
-            </a:r>
-          </a:p>
-        </p:txBody>
-      </p:sp>
-      <p:sp>
-        <p:nvSpPr>
-          <p:cNvPr id="9" name="TextBox 8"/>
-          <p:cNvSpPr txBox="1"/>
-          <p:nvPr/>
-        </p:nvSpPr>
-        <p:spPr>
-          <a:xfrm>
-            <a:off x="640080" y="6400800"/>
-            <a:ext cx="8686800" cy="320040"/>
-          </a:xfrm>
-          <a:prstGeom prst="rect">
-            <a:avLst/>
-          </a:prstGeom>
-          <a:noFill/>
-        </p:spPr>
-        <p:txBody>
-          <a:bodyPr wrap="square">
-            <a:spAutoFit/>
-          </a:bodyPr>
-          <a:lstStyle/>
-          <a:p>
-            <a:pPr algn="r" rtl="1"/>
-            <a:r>
-              <a:rPr sz="1000" b="0">
-                <a:solidFill>
-                  <a:srgbClr val="666666"/>
-                </a:solidFill>
-                <a:latin typeface="Arial"/>
-                <a:cs typeface="Arial"/>
-                <a:ea typeface="Calibri"/>
-              </a:rPr>
-              <a:t>Module 02 — Data &amp; AI Engineering Track  |  الوحدة الثانية</a:t>
-            </a:r>
-          </a:p>
-        </p:txBody>
-      </p:sp>
-      <p:sp>
-        <p:nvSpPr>
-          <p:cNvPr id="10" name="TextBox 9"/>
-          <p:cNvSpPr txBox="1"/>
-          <p:nvPr/>
-        </p:nvSpPr>
-        <p:spPr>
-          <a:xfrm>
-            <a:off x="9601200" y="6400800"/>
-            <a:ext cx="1920240" cy="320040"/>
-          </a:xfrm>
-          <a:prstGeom prst="rect">
-            <a:avLst/>
-          </a:prstGeom>
-          <a:noFill/>
-        </p:spPr>
-        <p:txBody>
-          <a:bodyPr wrap="square">
-            <a:spAutoFit/>
-          </a:bodyPr>
-          <a:lstStyle/>
-          <a:p>
-            <a:pPr algn="l" rtl="0"/>
-            <a:r>
-              <a:rPr sz="1000" b="0">
-                <a:solidFill>
-                  <a:srgbClr val="666666"/>
-                </a:solidFill>
-                <a:latin typeface="Calibri"/>
-                <a:cs typeface="Arial"/>
-                <a:ea typeface="Calibri"/>
-              </a:rPr>
-              <a:t>09_  •  13/14</a:t>
+              </a:rPr>
+              <a:t>V09  •  6/15</a:t>
             </a:r>
           </a:p>
         </p:txBody>
@@ -5628,22 +5792,57 @@
       <p:grpSpPr/>
       <p:sp>
         <p:nvSpPr>
-          <p:cNvPr id="2" name="Rectangle 1"/>
+          <p:cNvPr id="2" name="TextBox 1"/>
+          <p:cNvSpPr txBox="1"/>
+          <p:nvPr/>
+        </p:nvSpPr>
+        <p:spPr>
+          <a:xfrm>
+            <a:off x="640080" y="137160"/>
+            <a:ext cx="10972800" cy="640080"/>
+          </a:xfrm>
+          <a:prstGeom prst="rect">
+            <a:avLst/>
+          </a:prstGeom>
+          <a:noFill/>
+        </p:spPr>
+        <p:txBody>
+          <a:bodyPr wrap="none">
+            <a:spAutoFit/>
+          </a:bodyPr>
+          <a:lstStyle/>
+          <a:p>
+            <a:pPr algn="r" rtl="1"/>
+            <a:r>
+              <a:rPr sz="3000" b="1">
+                <a:solidFill>
+                  <a:srgbClr val="1F3B5C"/>
+                </a:solidFill>
+                <a:latin typeface="Arial"/>
+              </a:rPr>
+              <a:t>نمط الإجابة المؤرَّضة / Grounded Answer Pattern</a:t>
+            </a:r>
+          </a:p>
+        </p:txBody>
+      </p:sp>
+      <p:sp>
+        <p:nvSpPr>
+          <p:cNvPr id="3" name="Rounded Rectangle 2"/>
           <p:cNvSpPr/>
           <p:nvPr/>
         </p:nvSpPr>
         <p:spPr>
           <a:xfrm>
-            <a:off x="0" y="0"/>
-            <a:ext cx="12191695" cy="1005840"/>
-          </a:xfrm>
-          <a:prstGeom prst="rect">
+            <a:off x="640080" y="1417320"/>
+            <a:ext cx="2743200" cy="1097280"/>
+          </a:xfrm>
+          <a:prstGeom prst="roundRect">
             <a:avLst/>
           </a:prstGeom>
           <a:solidFill>
-            <a:srgbClr val="FFFFFF"/>
+            <a:srgbClr val="DCE6F1"/>
           </a:solidFill>
-          <a:ln w="25400">
+          <a:ln w="12700">
             <a:solidFill>
               <a:srgbClr val="1F4E79"/>
             </a:solidFill>
@@ -5665,6 +5864,138 @@
           </a:fontRef>
         </p:style>
         <p:txBody>
+          <a:bodyPr rtlCol="0" anchor="ctr" wrap="square"/>
+          <a:lstStyle/>
+          <a:p>
+            <a:pPr algn="ctr" rtl="1"/>
+            <a:r>
+              <a:rPr sz="1800" b="1">
+                <a:solidFill>
+                  <a:srgbClr val="333333"/>
+                </a:solidFill>
+                <a:latin typeface="Arial"/>
+              </a:rPr>
+              <a:t>سؤال المتعلِّم</a:t>
+            </a:r>
+          </a:p>
+          <a:p>
+            <a:pPr algn="ctr" rtl="0"/>
+            <a:r>
+              <a:rPr sz="1300">
+                <a:solidFill>
+                  <a:srgbClr val="666666"/>
+                </a:solidFill>
+                <a:latin typeface="Calibri"/>
+              </a:rPr>
+              <a:t>Learner question</a:t>
+            </a:r>
+          </a:p>
+        </p:txBody>
+      </p:sp>
+      <p:sp>
+        <p:nvSpPr>
+          <p:cNvPr id="4" name="Rounded Rectangle 3"/>
+          <p:cNvSpPr/>
+          <p:nvPr/>
+        </p:nvSpPr>
+        <p:spPr>
+          <a:xfrm>
+            <a:off x="640080" y="2697480"/>
+            <a:ext cx="2743200" cy="1143000"/>
+          </a:xfrm>
+          <a:prstGeom prst="roundRect">
+            <a:avLst/>
+          </a:prstGeom>
+          <a:solidFill>
+            <a:srgbClr val="EDEDED"/>
+          </a:solidFill>
+          <a:ln w="12700">
+            <a:solidFill>
+              <a:srgbClr val="1F4E79"/>
+            </a:solidFill>
+          </a:ln>
+          <a:effectLst/>
+        </p:spPr>
+        <p:style>
+          <a:lnRef idx="1">
+            <a:schemeClr val="accent1"/>
+          </a:lnRef>
+          <a:fillRef idx="3">
+            <a:schemeClr val="accent1"/>
+          </a:fillRef>
+          <a:effectRef idx="2">
+            <a:schemeClr val="accent1"/>
+          </a:effectRef>
+          <a:fontRef idx="minor">
+            <a:schemeClr val="lt1"/>
+          </a:fontRef>
+        </p:style>
+        <p:txBody>
+          <a:bodyPr rtlCol="0" anchor="ctr" wrap="square"/>
+          <a:lstStyle/>
+          <a:p>
+            <a:pPr algn="ctr" rtl="1"/>
+            <a:r>
+              <a:rPr sz="1400" b="1">
+                <a:solidFill>
+                  <a:srgbClr val="333333"/>
+                </a:solidFill>
+                <a:latin typeface="Arial"/>
+              </a:rPr>
+              <a:t>ما الاستراتيجية الافتراضية للتقسيم؟</a:t>
+            </a:r>
+          </a:p>
+          <a:p>
+            <a:pPr algn="ctr" rtl="0"/>
+            <a:r>
+              <a:rPr sz="1100">
+                <a:solidFill>
+                  <a:srgbClr val="666666"/>
+                </a:solidFill>
+                <a:latin typeface="Calibri"/>
+              </a:rPr>
+              <a:t>Which chunking default should I use?</a:t>
+            </a:r>
+          </a:p>
+        </p:txBody>
+      </p:sp>
+      <p:sp>
+        <p:nvSpPr>
+          <p:cNvPr id="5" name="Right Arrow 4"/>
+          <p:cNvSpPr/>
+          <p:nvPr/>
+        </p:nvSpPr>
+        <p:spPr>
+          <a:xfrm>
+            <a:off x="3520440" y="3063240"/>
+            <a:ext cx="594360" cy="274320"/>
+          </a:xfrm>
+          <a:prstGeom prst="rightArrow">
+            <a:avLst/>
+          </a:prstGeom>
+          <a:solidFill>
+            <a:srgbClr val="1F4E79"/>
+          </a:solidFill>
+          <a:ln>
+            <a:noFill/>
+          </a:ln>
+          <a:effectLst/>
+        </p:spPr>
+        <p:style>
+          <a:lnRef idx="1">
+            <a:schemeClr val="accent1"/>
+          </a:lnRef>
+          <a:fillRef idx="3">
+            <a:schemeClr val="accent1"/>
+          </a:fillRef>
+          <a:effectRef idx="2">
+            <a:schemeClr val="accent1"/>
+          </a:effectRef>
+          <a:fontRef idx="minor">
+            <a:schemeClr val="lt1"/>
+          </a:fontRef>
+        </p:style>
+        <p:txBody>
           <a:bodyPr rtlCol="0" anchor="ctr"/>
           <a:lstStyle/>
           <a:p>
@@ -5674,14 +6005,448 @@
       </p:sp>
       <p:sp>
         <p:nvSpPr>
-          <p:cNvPr id="3" name="TextBox 2"/>
+          <p:cNvPr id="6" name="Rounded Rectangle 5"/>
+          <p:cNvSpPr/>
+          <p:nvPr/>
+        </p:nvSpPr>
+        <p:spPr>
+          <a:xfrm>
+            <a:off x="4251960" y="1280160"/>
+            <a:ext cx="3063240" cy="1005840"/>
+          </a:xfrm>
+          <a:prstGeom prst="roundRect">
+            <a:avLst/>
+          </a:prstGeom>
+          <a:solidFill>
+            <a:srgbClr val="E2EFDA"/>
+          </a:solidFill>
+          <a:ln w="12700">
+            <a:solidFill>
+              <a:srgbClr val="1F4E79"/>
+            </a:solidFill>
+          </a:ln>
+          <a:effectLst/>
+        </p:spPr>
+        <p:style>
+          <a:lnRef idx="1">
+            <a:schemeClr val="accent1"/>
+          </a:lnRef>
+          <a:fillRef idx="3">
+            <a:schemeClr val="accent1"/>
+          </a:fillRef>
+          <a:effectRef idx="2">
+            <a:schemeClr val="accent1"/>
+          </a:effectRef>
+          <a:fontRef idx="minor">
+            <a:schemeClr val="lt1"/>
+          </a:fontRef>
+        </p:style>
+        <p:txBody>
+          <a:bodyPr rtlCol="0" anchor="ctr" wrap="square"/>
+          <a:lstStyle/>
+          <a:p>
+            <a:pPr algn="ctr" rtl="1"/>
+            <a:r>
+              <a:rPr sz="1800" b="1">
+                <a:solidFill>
+                  <a:srgbClr val="333333"/>
+                </a:solidFill>
+                <a:latin typeface="Arial"/>
+              </a:rPr>
+              <a:t>أدلة مسترجعة</a:t>
+            </a:r>
+          </a:p>
+          <a:p>
+            <a:pPr algn="ctr" rtl="0"/>
+            <a:r>
+              <a:rPr sz="1300">
+                <a:solidFill>
+                  <a:srgbClr val="666666"/>
+                </a:solidFill>
+                <a:latin typeface="Calibri"/>
+              </a:rPr>
+              <a:t>Retrieved evidence</a:t>
+            </a:r>
+          </a:p>
+        </p:txBody>
+      </p:sp>
+      <p:sp>
+        <p:nvSpPr>
+          <p:cNvPr id="7" name="Rounded Rectangle 6"/>
+          <p:cNvSpPr/>
+          <p:nvPr/>
+        </p:nvSpPr>
+        <p:spPr>
+          <a:xfrm>
+            <a:off x="4251960" y="2514600"/>
+            <a:ext cx="3063240" cy="658368"/>
+          </a:xfrm>
+          <a:prstGeom prst="roundRect">
+            <a:avLst/>
+          </a:prstGeom>
+          <a:solidFill>
+            <a:srgbClr val="EDEDED"/>
+          </a:solidFill>
+          <a:ln w="12700">
+            <a:solidFill>
+              <a:srgbClr val="1F4E79"/>
+            </a:solidFill>
+          </a:ln>
+          <a:effectLst/>
+        </p:spPr>
+        <p:style>
+          <a:lnRef idx="1">
+            <a:schemeClr val="accent1"/>
+          </a:lnRef>
+          <a:fillRef idx="3">
+            <a:schemeClr val="accent1"/>
+          </a:fillRef>
+          <a:effectRef idx="2">
+            <a:schemeClr val="accent1"/>
+          </a:effectRef>
+          <a:fontRef idx="minor">
+            <a:schemeClr val="lt1"/>
+          </a:fontRef>
+        </p:style>
+        <p:txBody>
+          <a:bodyPr rtlCol="0" anchor="ctr" wrap="square"/>
+          <a:lstStyle/>
+          <a:p>
+            <a:pPr algn="ctr" rtl="1"/>
+            <a:r>
+              <a:rPr sz="1200" b="1">
+                <a:solidFill>
+                  <a:srgbClr val="333333"/>
+                </a:solidFill>
+                <a:latin typeface="Arial"/>
+              </a:rPr>
+              <a:t>[1] الفقرات ← الجمل ← التقسيم</a:t>
+            </a:r>
+          </a:p>
+          <a:p>
+            <a:pPr algn="ctr" rtl="0"/>
+            <a:r>
+              <a:rPr sz="1000">
+                <a:solidFill>
+                  <a:srgbClr val="666666"/>
+                </a:solidFill>
+                <a:latin typeface="Calibri"/>
+              </a:rPr>
+              <a:t>[1] paragraphs → sentences → split</a:t>
+            </a:r>
+          </a:p>
+        </p:txBody>
+      </p:sp>
+      <p:sp>
+        <p:nvSpPr>
+          <p:cNvPr id="8" name="Rounded Rectangle 7"/>
+          <p:cNvSpPr/>
+          <p:nvPr/>
+        </p:nvSpPr>
+        <p:spPr>
+          <a:xfrm>
+            <a:off x="4251960" y="3310128"/>
+            <a:ext cx="3063240" cy="658368"/>
+          </a:xfrm>
+          <a:prstGeom prst="roundRect">
+            <a:avLst/>
+          </a:prstGeom>
+          <a:solidFill>
+            <a:srgbClr val="EDEDED"/>
+          </a:solidFill>
+          <a:ln w="12700">
+            <a:solidFill>
+              <a:srgbClr val="1F4E79"/>
+            </a:solidFill>
+          </a:ln>
+          <a:effectLst/>
+        </p:spPr>
+        <p:style>
+          <a:lnRef idx="1">
+            <a:schemeClr val="accent1"/>
+          </a:lnRef>
+          <a:fillRef idx="3">
+            <a:schemeClr val="accent1"/>
+          </a:fillRef>
+          <a:effectRef idx="2">
+            <a:schemeClr val="accent1"/>
+          </a:effectRef>
+          <a:fontRef idx="minor">
+            <a:schemeClr val="lt1"/>
+          </a:fontRef>
+        </p:style>
+        <p:txBody>
+          <a:bodyPr rtlCol="0" anchor="ctr" wrap="square"/>
+          <a:lstStyle/>
+          <a:p>
+            <a:pPr algn="ctr" rtl="1"/>
+            <a:r>
+              <a:rPr sz="1200" b="1">
+                <a:solidFill>
+                  <a:srgbClr val="333333"/>
+                </a:solidFill>
+                <a:latin typeface="Arial"/>
+              </a:rPr>
+              <a:t>[2] التكراري هو الخيار الموصى به</a:t>
+            </a:r>
+          </a:p>
+          <a:p>
+            <a:pPr algn="ctr" rtl="0"/>
+            <a:r>
+              <a:rPr sz="1000">
+                <a:solidFill>
+                  <a:srgbClr val="666666"/>
+                </a:solidFill>
+                <a:latin typeface="Calibri"/>
+              </a:rPr>
+              <a:t>[2] recursive is the recommended default</a:t>
+            </a:r>
+          </a:p>
+        </p:txBody>
+      </p:sp>
+      <p:sp>
+        <p:nvSpPr>
+          <p:cNvPr id="9" name="Right Arrow 8"/>
+          <p:cNvSpPr/>
+          <p:nvPr/>
+        </p:nvSpPr>
+        <p:spPr>
+          <a:xfrm>
+            <a:off x="7452360" y="3063240"/>
+            <a:ext cx="594360" cy="274320"/>
+          </a:xfrm>
+          <a:prstGeom prst="rightArrow">
+            <a:avLst/>
+          </a:prstGeom>
+          <a:solidFill>
+            <a:srgbClr val="1F4E79"/>
+          </a:solidFill>
+          <a:ln>
+            <a:noFill/>
+          </a:ln>
+          <a:effectLst/>
+        </p:spPr>
+        <p:style>
+          <a:lnRef idx="1">
+            <a:schemeClr val="accent1"/>
+          </a:lnRef>
+          <a:fillRef idx="3">
+            <a:schemeClr val="accent1"/>
+          </a:fillRef>
+          <a:effectRef idx="2">
+            <a:schemeClr val="accent1"/>
+          </a:effectRef>
+          <a:fontRef idx="minor">
+            <a:schemeClr val="lt1"/>
+          </a:fontRef>
+        </p:style>
+        <p:txBody>
+          <a:bodyPr rtlCol="0" anchor="ctr"/>
+          <a:lstStyle/>
+          <a:p>
+            <a:pPr algn="ctr"/>
+          </a:p>
+        </p:txBody>
+      </p:sp>
+      <p:sp>
+        <p:nvSpPr>
+          <p:cNvPr id="10" name="Rounded Rectangle 9"/>
+          <p:cNvSpPr/>
+          <p:nvPr/>
+        </p:nvSpPr>
+        <p:spPr>
+          <a:xfrm>
+            <a:off x="8183879" y="1417320"/>
+            <a:ext cx="3337560" cy="1097280"/>
+          </a:xfrm>
+          <a:prstGeom prst="roundRect">
+            <a:avLst/>
+          </a:prstGeom>
+          <a:solidFill>
+            <a:srgbClr val="FDE9D9"/>
+          </a:solidFill>
+          <a:ln w="12700">
+            <a:solidFill>
+              <a:srgbClr val="1F4E79"/>
+            </a:solidFill>
+          </a:ln>
+          <a:effectLst/>
+        </p:spPr>
+        <p:style>
+          <a:lnRef idx="1">
+            <a:schemeClr val="accent1"/>
+          </a:lnRef>
+          <a:fillRef idx="3">
+            <a:schemeClr val="accent1"/>
+          </a:fillRef>
+          <a:effectRef idx="2">
+            <a:schemeClr val="accent1"/>
+          </a:effectRef>
+          <a:fontRef idx="minor">
+            <a:schemeClr val="lt1"/>
+          </a:fontRef>
+        </p:style>
+        <p:txBody>
+          <a:bodyPr rtlCol="0" anchor="ctr" wrap="square"/>
+          <a:lstStyle/>
+          <a:p>
+            <a:pPr algn="ctr" rtl="1"/>
+            <a:r>
+              <a:rPr sz="1800" b="1">
+                <a:solidFill>
+                  <a:srgbClr val="333333"/>
+                </a:solidFill>
+                <a:latin typeface="Arial"/>
+              </a:rPr>
+              <a:t>إجابة موثقة</a:t>
+            </a:r>
+          </a:p>
+          <a:p>
+            <a:pPr algn="ctr" rtl="0"/>
+            <a:r>
+              <a:rPr sz="1300">
+                <a:solidFill>
+                  <a:srgbClr val="666666"/>
+                </a:solidFill>
+                <a:latin typeface="Calibri"/>
+              </a:rPr>
+              <a:t>Grounded answer</a:t>
+            </a:r>
+          </a:p>
+        </p:txBody>
+      </p:sp>
+      <p:sp>
+        <p:nvSpPr>
+          <p:cNvPr id="11" name="Rounded Rectangle 10"/>
+          <p:cNvSpPr/>
+          <p:nvPr/>
+        </p:nvSpPr>
+        <p:spPr>
+          <a:xfrm>
+            <a:off x="8183879" y="2697480"/>
+            <a:ext cx="3337560" cy="1143000"/>
+          </a:xfrm>
+          <a:prstGeom prst="roundRect">
+            <a:avLst/>
+          </a:prstGeom>
+          <a:solidFill>
+            <a:srgbClr val="EDEDED"/>
+          </a:solidFill>
+          <a:ln w="12700">
+            <a:solidFill>
+              <a:srgbClr val="1F4E79"/>
+            </a:solidFill>
+          </a:ln>
+          <a:effectLst/>
+        </p:spPr>
+        <p:style>
+          <a:lnRef idx="1">
+            <a:schemeClr val="accent1"/>
+          </a:lnRef>
+          <a:fillRef idx="3">
+            <a:schemeClr val="accent1"/>
+          </a:fillRef>
+          <a:effectRef idx="2">
+            <a:schemeClr val="accent1"/>
+          </a:effectRef>
+          <a:fontRef idx="minor">
+            <a:schemeClr val="lt1"/>
+          </a:fontRef>
+        </p:style>
+        <p:txBody>
+          <a:bodyPr rtlCol="0" anchor="ctr" wrap="square"/>
+          <a:lstStyle/>
+          <a:p>
+            <a:pPr algn="ctr" rtl="1"/>
+            <a:r>
+              <a:rPr sz="1400" b="1">
+                <a:solidFill>
+                  <a:srgbClr val="333333"/>
+                </a:solidFill>
+                <a:latin typeface="Arial"/>
+              </a:rPr>
+              <a:t>ابدأ بالتقسيم التكراري [1][2]</a:t>
+            </a:r>
+          </a:p>
+          <a:p>
+            <a:pPr algn="ctr" rtl="0"/>
+            <a:r>
+              <a:rPr sz="1100">
+                <a:solidFill>
+                  <a:srgbClr val="666666"/>
+                </a:solidFill>
+                <a:latin typeface="Calibri"/>
+              </a:rPr>
+              <a:t>Start with recursive chunking [1][2]</a:t>
+            </a:r>
+          </a:p>
+        </p:txBody>
+      </p:sp>
+      <p:sp>
+        <p:nvSpPr>
+          <p:cNvPr id="12" name="Rounded Rectangle 11"/>
+          <p:cNvSpPr/>
+          <p:nvPr/>
+        </p:nvSpPr>
+        <p:spPr>
+          <a:xfrm>
+            <a:off x="2194560" y="4892040"/>
+            <a:ext cx="7818120" cy="685800"/>
+          </a:xfrm>
+          <a:prstGeom prst="roundRect">
+            <a:avLst/>
+          </a:prstGeom>
+          <a:solidFill>
+            <a:srgbClr val="FDE9D9"/>
+          </a:solidFill>
+          <a:ln w="12700">
+            <a:solidFill>
+              <a:srgbClr val="1F4E79"/>
+            </a:solidFill>
+          </a:ln>
+          <a:effectLst/>
+        </p:spPr>
+        <p:style>
+          <a:lnRef idx="1">
+            <a:schemeClr val="accent1"/>
+          </a:lnRef>
+          <a:fillRef idx="3">
+            <a:schemeClr val="accent1"/>
+          </a:fillRef>
+          <a:effectRef idx="2">
+            <a:schemeClr val="accent1"/>
+          </a:effectRef>
+          <a:fontRef idx="minor">
+            <a:schemeClr val="lt1"/>
+          </a:fontRef>
+        </p:style>
+        <p:txBody>
+          <a:bodyPr rtlCol="0" anchor="ctr" wrap="square"/>
+          <a:lstStyle/>
+          <a:p>
+            <a:pPr algn="ctr" rtl="1"/>
+            <a:r>
+              <a:rPr sz="1400" b="1">
+                <a:solidFill>
+                  <a:srgbClr val="333333"/>
+                </a:solidFill>
+                <a:latin typeface="Arial"/>
+              </a:rPr>
+              <a:t>لا دليل مسترجع؟ قل: لا أعرف / No retrieved evidence? Say: I don't know.</a:t>
+            </a:r>
+          </a:p>
+        </p:txBody>
+      </p:sp>
+      <p:sp>
+        <p:nvSpPr>
+          <p:cNvPr id="13" name="TextBox 12"/>
           <p:cNvSpPr txBox="1"/>
           <p:nvPr/>
         </p:nvSpPr>
         <p:spPr>
           <a:xfrm>
-            <a:off x="640080" y="182880"/>
-            <a:ext cx="10972800" cy="640080"/>
+            <a:off x="640080" y="6126480"/>
+            <a:ext cx="10972800" cy="548640"/>
           </a:xfrm>
           <a:prstGeom prst="rect">
             <a:avLst/>
@@ -5696,29 +6461,33 @@
           <a:p>
             <a:pPr algn="r" rtl="1"/>
             <a:r>
-              <a:rPr sz="3200" b="1">
-                <a:solidFill>
-                  <a:srgbClr val="1F3B5C"/>
+              <a:rPr sz="1400">
+                <a:solidFill>
+                  <a:srgbClr val="666666"/>
                 </a:solidFill>
                 <a:latin typeface="Arial"/>
-                <a:cs typeface="Arial"/>
-                <a:ea typeface="Calibri"/>
-              </a:rPr>
-              <a:t>للاستزادة / Further Reading</a:t>
-            </a:r>
-          </a:p>
-        </p:txBody>
-      </p:sp>
-      <p:sp>
-        <p:nvSpPr>
-          <p:cNvPr id="4" name="TextBox 3"/>
+              </a:rPr>
+              <a:t>القاعدة: لا تتجاوز الأدلة، واربط كل ادعاء بمصدر.</a:t>
+            </a:r>
+          </a:p>
+          <a:p>
+            <a:pPr algn="r" rtl="0"/>
+            <a:r>
+              <a:t>Rule: do not go beyond the evidence; connect every claim to a source.</a:t>
+            </a:r>
+          </a:p>
+        </p:txBody>
+      </p:sp>
+      <p:sp>
+        <p:nvSpPr>
+          <p:cNvPr id="14" name="TextBox 13"/>
           <p:cNvSpPr txBox="1"/>
           <p:nvPr/>
         </p:nvSpPr>
         <p:spPr>
           <a:xfrm>
-            <a:off x="640080" y="1280160"/>
-            <a:ext cx="10972800" cy="5212080"/>
+            <a:off x="640080" y="6400800"/>
+            <a:ext cx="8686800" cy="320040"/>
           </a:xfrm>
           <a:prstGeom prst="rect">
             <a:avLst/>
@@ -5731,143 +6500,29 @@
           </a:bodyPr>
           <a:lstStyle/>
           <a:p>
-            <a:pPr algn="r" rtl="1">
-              <a:spcBef>
-                <a:spcPts val="200"/>
-              </a:spcBef>
-              <a:spcAft>
-                <a:spcPts val="1000"/>
-              </a:spcAft>
-            </a:pPr>
-            <a:r>
-              <a:rPr sz="2000">
-                <a:solidFill>
-                  <a:srgbClr val="333333"/>
+            <a:pPr algn="r" rtl="1"/>
+            <a:r>
+              <a:rPr sz="1000" b="0">
+                <a:solidFill>
+                  <a:srgbClr val="666666"/>
                 </a:solidFill>
                 <a:latin typeface="Arial"/>
-                <a:cs typeface="Arial"/>
-                <a:ea typeface="Calibri"/>
-              </a:rPr>
-              <a:t>• Daily Dose of DS — استراتيجيات تقسيم RAG.</a:t>
-            </a:r>
-          </a:p>
-          <a:p>
-            <a:pPr algn="r" rtl="0">
-              <a:spcBef>
-                <a:spcPts val="200"/>
-              </a:spcBef>
-              <a:spcAft>
-                <a:spcPts val="1000"/>
-              </a:spcAft>
-            </a:pPr>
-            <a:r>
-              <a:rPr sz="1700">
-                <a:solidFill>
-                  <a:srgbClr val="666666"/>
-                </a:solidFill>
-                <a:latin typeface="Calibri"/>
-                <a:cs typeface="Arial"/>
-                <a:ea typeface="Calibri"/>
-              </a:rPr>
-              <a:t>• Daily Dose of DS — RAG chunking strategies.</a:t>
-            </a:r>
-          </a:p>
-          <a:p>
-            <a:pPr algn="r" rtl="1">
-              <a:spcBef>
-                <a:spcPts val="200"/>
-              </a:spcBef>
-              <a:spcAft>
-                <a:spcPts val="1000"/>
-              </a:spcAft>
-            </a:pPr>
-            <a:r>
-              <a:rPr sz="2000">
-                <a:solidFill>
-                  <a:srgbClr val="333333"/>
-                </a:solidFill>
-                <a:latin typeface="Arial"/>
-                <a:cs typeface="Arial"/>
-                <a:ea typeface="Calibri"/>
-              </a:rPr>
-              <a:t>• توثيق RAGAS لإطار التقييم.</a:t>
-            </a:r>
-          </a:p>
-          <a:p>
-            <a:pPr algn="r" rtl="0">
-              <a:spcBef>
-                <a:spcPts val="200"/>
-              </a:spcBef>
-              <a:spcAft>
-                <a:spcPts val="1000"/>
-              </a:spcAft>
-            </a:pPr>
-            <a:r>
-              <a:rPr sz="1700">
-                <a:solidFill>
-                  <a:srgbClr val="666666"/>
-                </a:solidFill>
-                <a:latin typeface="Calibri"/>
-                <a:cs typeface="Arial"/>
-                <a:ea typeface="Calibri"/>
-              </a:rPr>
-              <a:t>• RAGAS evaluation framework docs.</a:t>
-            </a:r>
-          </a:p>
-          <a:p>
-            <a:pPr algn="r" rtl="1">
-              <a:spcBef>
-                <a:spcPts val="200"/>
-              </a:spcBef>
-              <a:spcAft>
-                <a:spcPts val="1000"/>
-              </a:spcAft>
-            </a:pPr>
-            <a:r>
-              <a:rPr sz="2000">
-                <a:solidFill>
-                  <a:srgbClr val="333333"/>
-                </a:solidFill>
-                <a:latin typeface="Arial"/>
-                <a:cs typeface="Arial"/>
-                <a:ea typeface="Calibri"/>
-              </a:rPr>
-              <a:t>• توثيق ChromaDB والفهرسة HNSW.</a:t>
-            </a:r>
-          </a:p>
-          <a:p>
-            <a:pPr algn="r" rtl="0">
-              <a:spcBef>
-                <a:spcPts val="200"/>
-              </a:spcBef>
-              <a:spcAft>
-                <a:spcPts val="1000"/>
-              </a:spcAft>
-            </a:pPr>
-            <a:r>
-              <a:rPr sz="1700">
-                <a:solidFill>
-                  <a:srgbClr val="666666"/>
-                </a:solidFill>
-                <a:latin typeface="Calibri"/>
-                <a:cs typeface="Arial"/>
-                <a:ea typeface="Calibri"/>
-              </a:rPr>
-              <a:t>• ChromaDB docs and HNSW indexing.</a:t>
-            </a:r>
-          </a:p>
-        </p:txBody>
-      </p:sp>
-      <p:sp>
-        <p:nvSpPr>
-          <p:cNvPr id="5" name="TextBox 4"/>
+              </a:rPr>
+              <a:t>Module 02 — Data &amp; AI Engineering Track  |  الوحدة الثانية</a:t>
+            </a:r>
+          </a:p>
+        </p:txBody>
+      </p:sp>
+      <p:sp>
+        <p:nvSpPr>
+          <p:cNvPr id="15" name="TextBox 14"/>
           <p:cNvSpPr txBox="1"/>
           <p:nvPr/>
         </p:nvSpPr>
         <p:spPr>
           <a:xfrm>
-            <a:off x="640080" y="6400800"/>
-            <a:ext cx="8686800" cy="320040"/>
+            <a:off x="9601200" y="6400800"/>
+            <a:ext cx="1920240" cy="320040"/>
           </a:xfrm>
           <a:prstGeom prst="rect">
             <a:avLst/>
@@ -5880,31 +6535,337 @@
           </a:bodyPr>
           <a:lstStyle/>
           <a:p>
+            <a:pPr algn="l" rtl="0"/>
+            <a:r>
+              <a:rPr sz="1000" b="0">
+                <a:solidFill>
+                  <a:srgbClr val="666666"/>
+                </a:solidFill>
+                <a:latin typeface="Calibri"/>
+              </a:rPr>
+              <a:t>V09  •  9/15</a:t>
+            </a:r>
+          </a:p>
+        </p:txBody>
+      </p:sp>
+    </p:spTree>
+  </p:cSld>
+  <p:clrMapOvr>
+    <a:masterClrMapping/>
+  </p:clrMapOvr>
+</p:sld>
+</file>
+
+<file path=ppt/slides/slide15.xml><?xml version="1.0" encoding="utf-8"?>
+<p:sld xmlns:a="http://schemas.openxmlformats.org/drawingml/2006/main" xmlns:p="http://schemas.openxmlformats.org/presentationml/2006/main" xmlns:r="http://schemas.openxmlformats.org/officeDocument/2006/relationships">
+  <p:cSld>
+    <p:bg>
+      <p:bgPr>
+        <a:solidFill>
+          <a:srgbClr val="FFFFFF"/>
+        </a:solidFill>
+        <a:effectLst/>
+      </p:bgPr>
+    </p:bg>
+    <p:spTree>
+      <p:nvGrpSpPr>
+        <p:cNvPr id="1" name=""/>
+        <p:cNvGrpSpPr/>
+        <p:nvPr/>
+      </p:nvGrpSpPr>
+      <p:grpSpPr/>
+      <p:sp>
+        <p:nvSpPr>
+          <p:cNvPr id="2" name="TextBox 1"/>
+          <p:cNvSpPr txBox="1"/>
+          <p:nvPr/>
+        </p:nvSpPr>
+        <p:spPr>
+          <a:xfrm>
+            <a:off x="640080" y="137160"/>
+            <a:ext cx="10972800" cy="640080"/>
+          </a:xfrm>
+          <a:prstGeom prst="rect">
+            <a:avLst/>
+          </a:prstGeom>
+          <a:noFill/>
+        </p:spPr>
+        <p:txBody>
+          <a:bodyPr wrap="none">
+            <a:spAutoFit/>
+          </a:bodyPr>
+          <a:lstStyle/>
+          <a:p>
             <a:pPr algn="r" rtl="1"/>
             <a:r>
-              <a:rPr sz="1000" b="0">
+              <a:rPr sz="3000" b="1">
+                <a:solidFill>
+                  <a:srgbClr val="1F3B5C"/>
+                </a:solidFill>
+                <a:latin typeface="Arial"/>
+              </a:rPr>
+              <a:t>مثلث تقييم RAG / RAG Evaluation Triad</a:t>
+            </a:r>
+          </a:p>
+        </p:txBody>
+      </p:sp>
+      <p:sp>
+        <p:nvSpPr>
+          <p:cNvPr id="3" name="Isosceles Triangle 2"/>
+          <p:cNvSpPr/>
+          <p:nvPr/>
+        </p:nvSpPr>
+        <p:spPr>
+          <a:xfrm>
+            <a:off x="3749039" y="1463040"/>
+            <a:ext cx="4572000" cy="3840480"/>
+          </a:xfrm>
+          <a:prstGeom prst="triangle">
+            <a:avLst/>
+          </a:prstGeom>
+          <a:solidFill>
+            <a:srgbClr val="DCE6F1"/>
+          </a:solidFill>
+          <a:ln>
+            <a:solidFill>
+              <a:srgbClr val="1F4E79"/>
+            </a:solidFill>
+          </a:ln>
+          <a:effectLst/>
+        </p:spPr>
+        <p:style>
+          <a:lnRef idx="1">
+            <a:schemeClr val="accent1"/>
+          </a:lnRef>
+          <a:fillRef idx="3">
+            <a:schemeClr val="accent1"/>
+          </a:fillRef>
+          <a:effectRef idx="2">
+            <a:schemeClr val="accent1"/>
+          </a:effectRef>
+          <a:fontRef idx="minor">
+            <a:schemeClr val="lt1"/>
+          </a:fontRef>
+        </p:style>
+        <p:txBody>
+          <a:bodyPr rtlCol="0" anchor="ctr"/>
+          <a:lstStyle/>
+          <a:p>
+            <a:pPr algn="ctr"/>
+          </a:p>
+        </p:txBody>
+      </p:sp>
+      <p:sp>
+        <p:nvSpPr>
+          <p:cNvPr id="4" name="Rounded Rectangle 3"/>
+          <p:cNvSpPr/>
+          <p:nvPr/>
+        </p:nvSpPr>
+        <p:spPr>
+          <a:xfrm>
+            <a:off x="4480560" y="1188720"/>
+            <a:ext cx="3108960" cy="731520"/>
+          </a:xfrm>
+          <a:prstGeom prst="roundRect">
+            <a:avLst/>
+          </a:prstGeom>
+          <a:solidFill>
+            <a:srgbClr val="E2EFDA"/>
+          </a:solidFill>
+          <a:ln w="12700">
+            <a:solidFill>
+              <a:srgbClr val="1F4E79"/>
+            </a:solidFill>
+          </a:ln>
+          <a:effectLst/>
+        </p:spPr>
+        <p:style>
+          <a:lnRef idx="1">
+            <a:schemeClr val="accent1"/>
+          </a:lnRef>
+          <a:fillRef idx="3">
+            <a:schemeClr val="accent1"/>
+          </a:fillRef>
+          <a:effectRef idx="2">
+            <a:schemeClr val="accent1"/>
+          </a:effectRef>
+          <a:fontRef idx="minor">
+            <a:schemeClr val="lt1"/>
+          </a:fontRef>
+        </p:style>
+        <p:txBody>
+          <a:bodyPr rtlCol="0" anchor="ctr" wrap="square"/>
+          <a:lstStyle/>
+          <a:p>
+            <a:pPr algn="ctr" rtl="1"/>
+            <a:r>
+              <a:rPr sz="1600" b="1">
+                <a:solidFill>
+                  <a:srgbClr val="333333"/>
+                </a:solidFill>
+                <a:latin typeface="Arial"/>
+              </a:rPr>
+              <a:t>الوفاء بالمصدر</a:t>
+            </a:r>
+          </a:p>
+          <a:p>
+            <a:pPr algn="ctr" rtl="0"/>
+            <a:r>
+              <a:rPr sz="1200">
                 <a:solidFill>
                   <a:srgbClr val="666666"/>
                 </a:solidFill>
+                <a:latin typeface="Calibri"/>
+              </a:rPr>
+              <a:t>Faithfulness</a:t>
+            </a:r>
+          </a:p>
+        </p:txBody>
+      </p:sp>
+      <p:sp>
+        <p:nvSpPr>
+          <p:cNvPr id="5" name="Rounded Rectangle 4"/>
+          <p:cNvSpPr/>
+          <p:nvPr/>
+        </p:nvSpPr>
+        <p:spPr>
+          <a:xfrm>
+            <a:off x="2194560" y="4846320"/>
+            <a:ext cx="3108960" cy="731520"/>
+          </a:xfrm>
+          <a:prstGeom prst="roundRect">
+            <a:avLst/>
+          </a:prstGeom>
+          <a:solidFill>
+            <a:srgbClr val="FDE9D9"/>
+          </a:solidFill>
+          <a:ln w="12700">
+            <a:solidFill>
+              <a:srgbClr val="1F4E79"/>
+            </a:solidFill>
+          </a:ln>
+          <a:effectLst/>
+        </p:spPr>
+        <p:style>
+          <a:lnRef idx="1">
+            <a:schemeClr val="accent1"/>
+          </a:lnRef>
+          <a:fillRef idx="3">
+            <a:schemeClr val="accent1"/>
+          </a:fillRef>
+          <a:effectRef idx="2">
+            <a:schemeClr val="accent1"/>
+          </a:effectRef>
+          <a:fontRef idx="minor">
+            <a:schemeClr val="lt1"/>
+          </a:fontRef>
+        </p:style>
+        <p:txBody>
+          <a:bodyPr rtlCol="0" anchor="ctr" wrap="square"/>
+          <a:lstStyle/>
+          <a:p>
+            <a:pPr algn="ctr" rtl="1"/>
+            <a:r>
+              <a:rPr sz="1600" b="1">
+                <a:solidFill>
+                  <a:srgbClr val="333333"/>
+                </a:solidFill>
                 <a:latin typeface="Arial"/>
-                <a:cs typeface="Arial"/>
-                <a:ea typeface="Calibri"/>
-              </a:rPr>
-              <a:t>Module 02 — Data &amp; AI Engineering Track  |  الوحدة الثانية</a:t>
-            </a:r>
-          </a:p>
-        </p:txBody>
-      </p:sp>
-      <p:sp>
-        <p:nvSpPr>
-          <p:cNvPr id="6" name="TextBox 5"/>
+              </a:rPr>
+              <a:t>ملاءمة الإجابة</a:t>
+            </a:r>
+          </a:p>
+          <a:p>
+            <a:pPr algn="ctr" rtl="0"/>
+            <a:r>
+              <a:rPr sz="1200">
+                <a:solidFill>
+                  <a:srgbClr val="666666"/>
+                </a:solidFill>
+                <a:latin typeface="Calibri"/>
+              </a:rPr>
+              <a:t>Answer Relevancy</a:t>
+            </a:r>
+          </a:p>
+        </p:txBody>
+      </p:sp>
+      <p:sp>
+        <p:nvSpPr>
+          <p:cNvPr id="6" name="Rounded Rectangle 5"/>
+          <p:cNvSpPr/>
+          <p:nvPr/>
+        </p:nvSpPr>
+        <p:spPr>
+          <a:xfrm>
+            <a:off x="6766560" y="4846320"/>
+            <a:ext cx="3108960" cy="731520"/>
+          </a:xfrm>
+          <a:prstGeom prst="roundRect">
+            <a:avLst/>
+          </a:prstGeom>
+          <a:solidFill>
+            <a:srgbClr val="EDEDED"/>
+          </a:solidFill>
+          <a:ln w="12700">
+            <a:solidFill>
+              <a:srgbClr val="1F4E79"/>
+            </a:solidFill>
+          </a:ln>
+          <a:effectLst/>
+        </p:spPr>
+        <p:style>
+          <a:lnRef idx="1">
+            <a:schemeClr val="accent1"/>
+          </a:lnRef>
+          <a:fillRef idx="3">
+            <a:schemeClr val="accent1"/>
+          </a:fillRef>
+          <a:effectRef idx="2">
+            <a:schemeClr val="accent1"/>
+          </a:effectRef>
+          <a:fontRef idx="minor">
+            <a:schemeClr val="lt1"/>
+          </a:fontRef>
+        </p:style>
+        <p:txBody>
+          <a:bodyPr rtlCol="0" anchor="ctr" wrap="square"/>
+          <a:lstStyle/>
+          <a:p>
+            <a:pPr algn="ctr" rtl="1"/>
+            <a:r>
+              <a:rPr sz="1600" b="1">
+                <a:solidFill>
+                  <a:srgbClr val="333333"/>
+                </a:solidFill>
+                <a:latin typeface="Arial"/>
+              </a:rPr>
+              <a:t>دقة السياق</a:t>
+            </a:r>
+          </a:p>
+          <a:p>
+            <a:pPr algn="ctr" rtl="0"/>
+            <a:r>
+              <a:rPr sz="1200">
+                <a:solidFill>
+                  <a:srgbClr val="666666"/>
+                </a:solidFill>
+                <a:latin typeface="Calibri"/>
+              </a:rPr>
+              <a:t>Context Precision</a:t>
+            </a:r>
+          </a:p>
+        </p:txBody>
+      </p:sp>
+      <p:sp>
+        <p:nvSpPr>
+          <p:cNvPr id="7" name="TextBox 6"/>
           <p:cNvSpPr txBox="1"/>
           <p:nvPr/>
         </p:nvSpPr>
         <p:spPr>
           <a:xfrm>
-            <a:off x="9601200" y="6400800"/>
-            <a:ext cx="1920240" cy="320040"/>
+            <a:off x="640080" y="6126480"/>
+            <a:ext cx="10972800" cy="548640"/>
           </a:xfrm>
           <a:prstGeom prst="rect">
             <a:avLst/>
@@ -5917,24 +6878,28 @@
           </a:bodyPr>
           <a:lstStyle/>
           <a:p>
-            <a:pPr algn="l" rtl="0"/>
-            <a:r>
-              <a:rPr sz="1000" b="0">
+            <a:pPr algn="r" rtl="1"/>
+            <a:r>
+              <a:rPr sz="1400">
                 <a:solidFill>
                   <a:srgbClr val="666666"/>
                 </a:solidFill>
-                <a:latin typeface="Calibri"/>
-                <a:cs typeface="Arial"/>
-                <a:ea typeface="Calibri"/>
-              </a:rPr>
-              <a:t>V09  •  11/14</a:t>
-            </a:r>
-          </a:p>
-        </p:txBody>
-      </p:sp>
-      <p:sp>
-        <p:nvSpPr>
-          <p:cNvPr id="7" name="TextBox 6"/>
+                <a:latin typeface="Arial"/>
+              </a:rPr>
+              <a:t>يُقاس بإطار RAGAS — الوفاء يمنع الهلوسة والملاءمة تجعل الإجابة نافعة.</a:t>
+            </a:r>
+          </a:p>
+          <a:p>
+            <a:pPr algn="r" rtl="0"/>
+            <a:r>
+              <a:t>Measured with RAGAS — faithfulness prevents hallucination; relevancy keeps answers useful.</a:t>
+            </a:r>
+          </a:p>
+        </p:txBody>
+      </p:sp>
+      <p:sp>
+        <p:nvSpPr>
+          <p:cNvPr id="8" name="TextBox 7"/>
           <p:cNvSpPr txBox="1"/>
           <p:nvPr/>
         </p:nvSpPr>
@@ -5961,8 +6926,6 @@
                   <a:srgbClr val="666666"/>
                 </a:solidFill>
                 <a:latin typeface="Arial"/>
-                <a:cs typeface="Arial"/>
-                <a:ea typeface="Calibri"/>
               </a:rPr>
               <a:t>Module 02 — Data &amp; AI Engineering Track  |  الوحدة الثانية</a:t>
             </a:r>
@@ -5971,7 +6934,7 @@
       </p:sp>
       <p:sp>
         <p:nvSpPr>
-          <p:cNvPr id="8" name="TextBox 7"/>
+          <p:cNvPr id="9" name="TextBox 8"/>
           <p:cNvSpPr txBox="1"/>
           <p:nvPr/>
         </p:nvSpPr>
@@ -5998,84 +6961,8 @@
                   <a:srgbClr val="666666"/>
                 </a:solidFill>
                 <a:latin typeface="Calibri"/>
-                <a:cs typeface="Arial"/>
-                <a:ea typeface="Calibri"/>
-              </a:rPr>
-              <a:t>09_  •  14/14</a:t>
-            </a:r>
-          </a:p>
-        </p:txBody>
-      </p:sp>
-      <p:sp>
-        <p:nvSpPr>
-          <p:cNvPr id="9" name="TextBox 8"/>
-          <p:cNvSpPr txBox="1"/>
-          <p:nvPr/>
-        </p:nvSpPr>
-        <p:spPr>
-          <a:xfrm>
-            <a:off x="640080" y="6400800"/>
-            <a:ext cx="8686800" cy="320040"/>
-          </a:xfrm>
-          <a:prstGeom prst="rect">
-            <a:avLst/>
-          </a:prstGeom>
-          <a:noFill/>
-        </p:spPr>
-        <p:txBody>
-          <a:bodyPr wrap="square">
-            <a:spAutoFit/>
-          </a:bodyPr>
-          <a:lstStyle/>
-          <a:p>
-            <a:pPr algn="r" rtl="1"/>
-            <a:r>
-              <a:rPr sz="1000" b="0">
-                <a:solidFill>
-                  <a:srgbClr val="666666"/>
-                </a:solidFill>
-                <a:latin typeface="Arial"/>
-                <a:cs typeface="Arial"/>
-                <a:ea typeface="Calibri"/>
-              </a:rPr>
-              <a:t>Module 02 — Data &amp; AI Engineering Track  |  الوحدة الثانية</a:t>
-            </a:r>
-          </a:p>
-        </p:txBody>
-      </p:sp>
-      <p:sp>
-        <p:nvSpPr>
-          <p:cNvPr id="10" name="TextBox 9"/>
-          <p:cNvSpPr txBox="1"/>
-          <p:nvPr/>
-        </p:nvSpPr>
-        <p:spPr>
-          <a:xfrm>
-            <a:off x="9601200" y="6400800"/>
-            <a:ext cx="1920240" cy="320040"/>
-          </a:xfrm>
-          <a:prstGeom prst="rect">
-            <a:avLst/>
-          </a:prstGeom>
-          <a:noFill/>
-        </p:spPr>
-        <p:txBody>
-          <a:bodyPr wrap="square">
-            <a:spAutoFit/>
-          </a:bodyPr>
-          <a:lstStyle/>
-          <a:p>
-            <a:pPr algn="l" rtl="0"/>
-            <a:r>
-              <a:rPr sz="1000" b="0">
-                <a:solidFill>
-                  <a:srgbClr val="666666"/>
-                </a:solidFill>
-                <a:latin typeface="Calibri"/>
-                <a:cs typeface="Arial"/>
-                <a:ea typeface="Calibri"/>
-              </a:rPr>
-              <a:t>09_  •  14/14</a:t>
+              </a:rPr>
+              <a:t>V09  •  11/15</a:t>
             </a:r>
           </a:p>
         </p:txBody>
@@ -6181,8 +7068,6 @@
                   <a:srgbClr val="1F3B5C"/>
                 </a:solidFill>
                 <a:latin typeface="Arial"/>
-                <a:cs typeface="Arial"/>
-                <a:ea typeface="Calibri"/>
               </a:rPr>
               <a:t>أجندة العرض / Agenda</a:t>
             </a:r>
@@ -6225,14 +7110,12 @@
                   <a:srgbClr val="333333"/>
                 </a:solidFill>
                 <a:latin typeface="Arial"/>
-                <a:cs typeface="Arial"/>
-                <a:ea typeface="Calibri"/>
               </a:rPr>
               <a:t>• V09 — قواعد البيانات المتجهية + RAG التطبيقي</a:t>
             </a:r>
           </a:p>
           <a:p>
-            <a:pPr algn="r" rtl="0">
+            <a:pPr algn="l" rtl="0">
               <a:spcBef>
                 <a:spcPts val="200"/>
               </a:spcBef>
@@ -6246,8 +7129,6 @@
                   <a:srgbClr val="666666"/>
                 </a:solidFill>
                 <a:latin typeface="Calibri"/>
-                <a:cs typeface="Arial"/>
-                <a:ea typeface="Calibri"/>
               </a:rPr>
               <a:t>• V09 — Vector Databases + Applied RAG</a:t>
             </a:r>
@@ -6267,8 +7148,6 @@
                   <a:srgbClr val="333333"/>
                 </a:solidFill>
                 <a:latin typeface="Arial"/>
-                <a:cs typeface="Arial"/>
-                <a:ea typeface="Calibri"/>
               </a:rPr>
               <a:t>• قواعد البيانات المتجهية / Vector Databases</a:t>
             </a:r>
@@ -6288,8 +7167,6 @@
                   <a:srgbClr val="333333"/>
                 </a:solidFill>
                 <a:latin typeface="Arial"/>
-                <a:cs typeface="Arial"/>
-                <a:ea typeface="Calibri"/>
               </a:rPr>
               <a:t>• 1) الفهرسة: استراتيجيات التقسيم / Indexing: Chunking</a:t>
             </a:r>
@@ -6309,8 +7186,6 @@
                   <a:srgbClr val="333333"/>
                 </a:solidFill>
                 <a:latin typeface="Arial"/>
-                <a:cs typeface="Arial"/>
-                <a:ea typeface="Calibri"/>
               </a:rPr>
               <a:t>• 2) الاسترجاع / Retrieval</a:t>
             </a:r>
@@ -6330,8 +7205,6 @@
                   <a:srgbClr val="333333"/>
                 </a:solidFill>
                 <a:latin typeface="Arial"/>
-                <a:cs typeface="Arial"/>
-                <a:ea typeface="Calibri"/>
               </a:rPr>
               <a:t>• 3) التوليد / Generation</a:t>
             </a:r>
@@ -6351,8 +7224,6 @@
                   <a:srgbClr val="333333"/>
                 </a:solidFill>
                 <a:latin typeface="Arial"/>
-                <a:cs typeface="Arial"/>
-                <a:ea typeface="Calibri"/>
               </a:rPr>
               <a:t>• 4) التقييم + 5) التحسين / Evaluation + Optimization</a:t>
             </a:r>
@@ -6372,8 +7243,6 @@
                   <a:srgbClr val="333333"/>
                 </a:solidFill>
                 <a:latin typeface="Arial"/>
-                <a:cs typeface="Arial"/>
-                <a:ea typeface="Calibri"/>
               </a:rPr>
               <a:t>• الأخطاء الشائعة / Common Pitfalls</a:t>
             </a:r>
@@ -6409,8 +7278,6 @@
                   <a:srgbClr val="666666"/>
                 </a:solidFill>
                 <a:latin typeface="Arial"/>
-                <a:cs typeface="Arial"/>
-                <a:ea typeface="Calibri"/>
               </a:rPr>
               <a:t>Module 02 — Data &amp; AI Engineering Track  |  الوحدة الثانية</a:t>
             </a:r>
@@ -6446,158 +7313,8 @@
                   <a:srgbClr val="666666"/>
                 </a:solidFill>
                 <a:latin typeface="Calibri"/>
-                <a:cs typeface="Arial"/>
-                <a:ea typeface="Calibri"/>
-              </a:rPr>
-              <a:t>V09  •  2/14</a:t>
-            </a:r>
-          </a:p>
-        </p:txBody>
-      </p:sp>
-      <p:sp>
-        <p:nvSpPr>
-          <p:cNvPr id="7" name="TextBox 6"/>
-          <p:cNvSpPr txBox="1"/>
-          <p:nvPr/>
-        </p:nvSpPr>
-        <p:spPr>
-          <a:xfrm>
-            <a:off x="640080" y="6400800"/>
-            <a:ext cx="8686800" cy="320040"/>
-          </a:xfrm>
-          <a:prstGeom prst="rect">
-            <a:avLst/>
-          </a:prstGeom>
-          <a:noFill/>
-        </p:spPr>
-        <p:txBody>
-          <a:bodyPr wrap="square">
-            <a:spAutoFit/>
-          </a:bodyPr>
-          <a:lstStyle/>
-          <a:p>
-            <a:pPr algn="r" rtl="1"/>
-            <a:r>
-              <a:rPr sz="1000" b="0">
-                <a:solidFill>
-                  <a:srgbClr val="666666"/>
-                </a:solidFill>
-                <a:latin typeface="Arial"/>
-                <a:cs typeface="Arial"/>
-                <a:ea typeface="Calibri"/>
-              </a:rPr>
-              <a:t>Module 02 — Data &amp; AI Engineering Track  |  الوحدة الثانية</a:t>
-            </a:r>
-          </a:p>
-        </p:txBody>
-      </p:sp>
-      <p:sp>
-        <p:nvSpPr>
-          <p:cNvPr id="8" name="TextBox 7"/>
-          <p:cNvSpPr txBox="1"/>
-          <p:nvPr/>
-        </p:nvSpPr>
-        <p:spPr>
-          <a:xfrm>
-            <a:off x="9601200" y="6400800"/>
-            <a:ext cx="1920240" cy="320040"/>
-          </a:xfrm>
-          <a:prstGeom prst="rect">
-            <a:avLst/>
-          </a:prstGeom>
-          <a:noFill/>
-        </p:spPr>
-        <p:txBody>
-          <a:bodyPr wrap="square">
-            <a:spAutoFit/>
-          </a:bodyPr>
-          <a:lstStyle/>
-          <a:p>
-            <a:pPr algn="l" rtl="0"/>
-            <a:r>
-              <a:rPr sz="1000" b="0">
-                <a:solidFill>
-                  <a:srgbClr val="666666"/>
-                </a:solidFill>
-                <a:latin typeface="Calibri"/>
-                <a:cs typeface="Arial"/>
-                <a:ea typeface="Calibri"/>
-              </a:rPr>
-              <a:t>09_  •  2/14</a:t>
-            </a:r>
-          </a:p>
-        </p:txBody>
-      </p:sp>
-      <p:sp>
-        <p:nvSpPr>
-          <p:cNvPr id="9" name="TextBox 8"/>
-          <p:cNvSpPr txBox="1"/>
-          <p:nvPr/>
-        </p:nvSpPr>
-        <p:spPr>
-          <a:xfrm>
-            <a:off x="640080" y="6400800"/>
-            <a:ext cx="8686800" cy="320040"/>
-          </a:xfrm>
-          <a:prstGeom prst="rect">
-            <a:avLst/>
-          </a:prstGeom>
-          <a:noFill/>
-        </p:spPr>
-        <p:txBody>
-          <a:bodyPr wrap="square">
-            <a:spAutoFit/>
-          </a:bodyPr>
-          <a:lstStyle/>
-          <a:p>
-            <a:pPr algn="r" rtl="1"/>
-            <a:r>
-              <a:rPr sz="1000" b="0">
-                <a:solidFill>
-                  <a:srgbClr val="666666"/>
-                </a:solidFill>
-                <a:latin typeface="Arial"/>
-                <a:cs typeface="Arial"/>
-                <a:ea typeface="Calibri"/>
-              </a:rPr>
-              <a:t>Module 02 — Data &amp; AI Engineering Track  |  الوحدة الثانية</a:t>
-            </a:r>
-          </a:p>
-        </p:txBody>
-      </p:sp>
-      <p:sp>
-        <p:nvSpPr>
-          <p:cNvPr id="10" name="TextBox 9"/>
-          <p:cNvSpPr txBox="1"/>
-          <p:nvPr/>
-        </p:nvSpPr>
-        <p:spPr>
-          <a:xfrm>
-            <a:off x="9601200" y="6400800"/>
-            <a:ext cx="1920240" cy="320040"/>
-          </a:xfrm>
-          <a:prstGeom prst="rect">
-            <a:avLst/>
-          </a:prstGeom>
-          <a:noFill/>
-        </p:spPr>
-        <p:txBody>
-          <a:bodyPr wrap="square">
-            <a:spAutoFit/>
-          </a:bodyPr>
-          <a:lstStyle/>
-          <a:p>
-            <a:pPr algn="l" rtl="0"/>
-            <a:r>
-              <a:rPr sz="1000" b="0">
-                <a:solidFill>
-                  <a:srgbClr val="666666"/>
-                </a:solidFill>
-                <a:latin typeface="Calibri"/>
-                <a:cs typeface="Arial"/>
-                <a:ea typeface="Calibri"/>
-              </a:rPr>
-              <a:t>09_  •  2/14</a:t>
+              </a:rPr>
+              <a:t>V09  •  2/15</a:t>
             </a:r>
           </a:p>
         </p:txBody>
@@ -6703,8 +7420,6 @@
                   <a:srgbClr val="1F3B5C"/>
                 </a:solidFill>
                 <a:latin typeface="Arial"/>
-                <a:cs typeface="Arial"/>
-                <a:ea typeface="Calibri"/>
               </a:rPr>
               <a:t>قواعد البيانات المتجهية / Vector Databases</a:t>
             </a:r>
@@ -6747,14 +7462,12 @@
                   <a:srgbClr val="333333"/>
                 </a:solidFill>
                 <a:latin typeface="Arial"/>
-                <a:cs typeface="Arial"/>
-                <a:ea typeface="Calibri"/>
               </a:rPr>
               <a:t>• تخزين التمثيلات المتجهية (Embeddings) والبحث فيها بالتشابه: Pinecone، Weaviate، pgvector، ChromaDB.</a:t>
             </a:r>
           </a:p>
           <a:p>
-            <a:pPr algn="r" rtl="0">
+            <a:pPr algn="l" rtl="0">
               <a:spcBef>
                 <a:spcPts val="200"/>
               </a:spcBef>
@@ -6768,8 +7481,6 @@
                   <a:srgbClr val="666666"/>
                 </a:solidFill>
                 <a:latin typeface="Calibri"/>
-                <a:cs typeface="Arial"/>
-                <a:ea typeface="Calibri"/>
               </a:rPr>
               <a:t>• Store embeddings and search by similarity: Pinecone, Weaviate, pgvector, ChromaDB.</a:t>
             </a:r>
@@ -6789,14 +7500,12 @@
                   <a:srgbClr val="333333"/>
                 </a:solidFill>
                 <a:latin typeface="Arial"/>
-                <a:cs typeface="Arial"/>
-                <a:ea typeface="Calibri"/>
               </a:rPr>
               <a:t>• فهرس HNSW يمنح بحثًا تقريبيًا سريعًا (ANN) بكفاءة عالية.</a:t>
             </a:r>
           </a:p>
           <a:p>
-            <a:pPr algn="r" rtl="0">
+            <a:pPr algn="l" rtl="0">
               <a:spcBef>
                 <a:spcPts val="200"/>
               </a:spcBef>
@@ -6810,8 +7519,6 @@
                   <a:srgbClr val="666666"/>
                 </a:solidFill>
                 <a:latin typeface="Calibri"/>
-                <a:cs typeface="Arial"/>
-                <a:ea typeface="Calibri"/>
               </a:rPr>
               <a:t>• HNSW index provides fast approximate nearest-neighbor (ANN) search.</a:t>
             </a:r>
@@ -6847,8 +7554,6 @@
                   <a:srgbClr val="666666"/>
                 </a:solidFill>
                 <a:latin typeface="Arial"/>
-                <a:cs typeface="Arial"/>
-                <a:ea typeface="Calibri"/>
               </a:rPr>
               <a:t>Module 02 — Data &amp; AI Engineering Track  |  الوحدة الثانية</a:t>
             </a:r>
@@ -6884,158 +7589,8 @@
                   <a:srgbClr val="666666"/>
                 </a:solidFill>
                 <a:latin typeface="Calibri"/>
-                <a:cs typeface="Arial"/>
-                <a:ea typeface="Calibri"/>
-              </a:rPr>
-              <a:t>V09  •  3/14</a:t>
-            </a:r>
-          </a:p>
-        </p:txBody>
-      </p:sp>
-      <p:sp>
-        <p:nvSpPr>
-          <p:cNvPr id="7" name="TextBox 6"/>
-          <p:cNvSpPr txBox="1"/>
-          <p:nvPr/>
-        </p:nvSpPr>
-        <p:spPr>
-          <a:xfrm>
-            <a:off x="640080" y="6400800"/>
-            <a:ext cx="8686800" cy="320040"/>
-          </a:xfrm>
-          <a:prstGeom prst="rect">
-            <a:avLst/>
-          </a:prstGeom>
-          <a:noFill/>
-        </p:spPr>
-        <p:txBody>
-          <a:bodyPr wrap="square">
-            <a:spAutoFit/>
-          </a:bodyPr>
-          <a:lstStyle/>
-          <a:p>
-            <a:pPr algn="r" rtl="1"/>
-            <a:r>
-              <a:rPr sz="1000" b="0">
-                <a:solidFill>
-                  <a:srgbClr val="666666"/>
-                </a:solidFill>
-                <a:latin typeface="Arial"/>
-                <a:cs typeface="Arial"/>
-                <a:ea typeface="Calibri"/>
-              </a:rPr>
-              <a:t>Module 02 — Data &amp; AI Engineering Track  |  الوحدة الثانية</a:t>
-            </a:r>
-          </a:p>
-        </p:txBody>
-      </p:sp>
-      <p:sp>
-        <p:nvSpPr>
-          <p:cNvPr id="8" name="TextBox 7"/>
-          <p:cNvSpPr txBox="1"/>
-          <p:nvPr/>
-        </p:nvSpPr>
-        <p:spPr>
-          <a:xfrm>
-            <a:off x="9601200" y="6400800"/>
-            <a:ext cx="1920240" cy="320040"/>
-          </a:xfrm>
-          <a:prstGeom prst="rect">
-            <a:avLst/>
-          </a:prstGeom>
-          <a:noFill/>
-        </p:spPr>
-        <p:txBody>
-          <a:bodyPr wrap="square">
-            <a:spAutoFit/>
-          </a:bodyPr>
-          <a:lstStyle/>
-          <a:p>
-            <a:pPr algn="l" rtl="0"/>
-            <a:r>
-              <a:rPr sz="1000" b="0">
-                <a:solidFill>
-                  <a:srgbClr val="666666"/>
-                </a:solidFill>
-                <a:latin typeface="Calibri"/>
-                <a:cs typeface="Arial"/>
-                <a:ea typeface="Calibri"/>
-              </a:rPr>
-              <a:t>09_  •  3/14</a:t>
-            </a:r>
-          </a:p>
-        </p:txBody>
-      </p:sp>
-      <p:sp>
-        <p:nvSpPr>
-          <p:cNvPr id="9" name="TextBox 8"/>
-          <p:cNvSpPr txBox="1"/>
-          <p:nvPr/>
-        </p:nvSpPr>
-        <p:spPr>
-          <a:xfrm>
-            <a:off x="640080" y="6400800"/>
-            <a:ext cx="8686800" cy="320040"/>
-          </a:xfrm>
-          <a:prstGeom prst="rect">
-            <a:avLst/>
-          </a:prstGeom>
-          <a:noFill/>
-        </p:spPr>
-        <p:txBody>
-          <a:bodyPr wrap="square">
-            <a:spAutoFit/>
-          </a:bodyPr>
-          <a:lstStyle/>
-          <a:p>
-            <a:pPr algn="r" rtl="1"/>
-            <a:r>
-              <a:rPr sz="1000" b="0">
-                <a:solidFill>
-                  <a:srgbClr val="666666"/>
-                </a:solidFill>
-                <a:latin typeface="Arial"/>
-                <a:cs typeface="Arial"/>
-                <a:ea typeface="Calibri"/>
-              </a:rPr>
-              <a:t>Module 02 — Data &amp; AI Engineering Track  |  الوحدة الثانية</a:t>
-            </a:r>
-          </a:p>
-        </p:txBody>
-      </p:sp>
-      <p:sp>
-        <p:nvSpPr>
-          <p:cNvPr id="10" name="TextBox 9"/>
-          <p:cNvSpPr txBox="1"/>
-          <p:nvPr/>
-        </p:nvSpPr>
-        <p:spPr>
-          <a:xfrm>
-            <a:off x="9601200" y="6400800"/>
-            <a:ext cx="1920240" cy="320040"/>
-          </a:xfrm>
-          <a:prstGeom prst="rect">
-            <a:avLst/>
-          </a:prstGeom>
-          <a:noFill/>
-        </p:spPr>
-        <p:txBody>
-          <a:bodyPr wrap="square">
-            <a:spAutoFit/>
-          </a:bodyPr>
-          <a:lstStyle/>
-          <a:p>
-            <a:pPr algn="l" rtl="0"/>
-            <a:r>
-              <a:rPr sz="1000" b="0">
-                <a:solidFill>
-                  <a:srgbClr val="666666"/>
-                </a:solidFill>
-                <a:latin typeface="Calibri"/>
-                <a:cs typeface="Arial"/>
-                <a:ea typeface="Calibri"/>
-              </a:rPr>
-              <a:t>09_  •  3/14</a:t>
+              </a:rPr>
+              <a:t>V09  •  3/15</a:t>
             </a:r>
           </a:p>
         </p:txBody>
@@ -7068,59 +7623,22 @@
       <p:grpSpPr/>
       <p:sp>
         <p:nvSpPr>
-          <p:cNvPr id="2" name="TextBox 1"/>
-          <p:cNvSpPr txBox="1"/>
-          <p:nvPr/>
-        </p:nvSpPr>
-        <p:spPr>
-          <a:xfrm>
-            <a:off x="640080" y="137160"/>
-            <a:ext cx="10972800" cy="640080"/>
+          <p:cNvPr id="2" name="Rectangle 1"/>
+          <p:cNvSpPr/>
+          <p:nvPr/>
+        </p:nvSpPr>
+        <p:spPr>
+          <a:xfrm>
+            <a:off x="0" y="0"/>
+            <a:ext cx="12191695" cy="1005840"/>
           </a:xfrm>
           <a:prstGeom prst="rect">
             <a:avLst/>
           </a:prstGeom>
-          <a:noFill/>
-        </p:spPr>
-        <p:txBody>
-          <a:bodyPr wrap="none">
-            <a:spAutoFit/>
-          </a:bodyPr>
-          <a:lstStyle/>
-          <a:p>
-            <a:pPr algn="r" rtl="1"/>
-            <a:r>
-              <a:rPr sz="3000" b="1">
-                <a:solidFill>
-                  <a:srgbClr val="1F3B5C"/>
-                </a:solidFill>
-                <a:latin typeface="Arial"/>
-                <a:cs typeface="Arial"/>
-                <a:ea typeface="Calibri"/>
-              </a:rPr>
-              <a:t>خط أنابيب RAG / RAG Pipeline</a:t>
-            </a:r>
-          </a:p>
-        </p:txBody>
-      </p:sp>
-      <p:sp>
-        <p:nvSpPr>
-          <p:cNvPr id="3" name="Rounded Rectangle 2"/>
-          <p:cNvSpPr/>
-          <p:nvPr/>
-        </p:nvSpPr>
-        <p:spPr>
-          <a:xfrm>
-            <a:off x="548640" y="2011680"/>
-            <a:ext cx="1965960" cy="1280160"/>
-          </a:xfrm>
-          <a:prstGeom prst="roundRect">
-            <a:avLst/>
-          </a:prstGeom>
           <a:solidFill>
-            <a:srgbClr val="DCE6F1"/>
+            <a:srgbClr val="FFFFFF"/>
           </a:solidFill>
-          <a:ln w="12700">
+          <a:ln w="25400">
             <a:solidFill>
               <a:srgbClr val="1F4E79"/>
             </a:solidFill>
@@ -7142,75 +7660,6 @@
           </a:fontRef>
         </p:style>
         <p:txBody>
-          <a:bodyPr rtlCol="0" anchor="ctr" wrap="square"/>
-          <a:lstStyle/>
-          <a:p>
-            <a:pPr algn="ctr" rtl="1"/>
-            <a:r>
-              <a:rPr sz="1600" b="1">
-                <a:solidFill>
-                  <a:srgbClr val="333333"/>
-                </a:solidFill>
-                <a:latin typeface="Arial"/>
-                <a:cs typeface="Arial"/>
-                <a:ea typeface="Calibri"/>
-              </a:rPr>
-              <a:t>1) الفهرسة</a:t>
-            </a:r>
-          </a:p>
-          <a:p>
-            <a:pPr algn="ctr" rtl="0"/>
-            <a:r>
-              <a:rPr sz="1200">
-                <a:solidFill>
-                  <a:srgbClr val="666666"/>
-                </a:solidFill>
-                <a:latin typeface="Calibri"/>
-                <a:cs typeface="Arial"/>
-                <a:ea typeface="Calibri"/>
-              </a:rPr>
-              <a:t>Indexing</a:t>
-            </a:r>
-          </a:p>
-        </p:txBody>
-      </p:sp>
-      <p:sp>
-        <p:nvSpPr>
-          <p:cNvPr id="4" name="Left Arrow 3"/>
-          <p:cNvSpPr/>
-          <p:nvPr/>
-        </p:nvSpPr>
-        <p:spPr>
-          <a:xfrm>
-            <a:off x="2532888" y="2514600"/>
-            <a:ext cx="219456" cy="274320"/>
-          </a:xfrm>
-          <a:prstGeom prst="leftArrow">
-            <a:avLst/>
-          </a:prstGeom>
-          <a:solidFill>
-            <a:srgbClr val="1F4E79"/>
-          </a:solidFill>
-          <a:ln>
-            <a:noFill/>
-          </a:ln>
-          <a:effectLst/>
-        </p:spPr>
-        <p:style>
-          <a:lnRef idx="1">
-            <a:schemeClr val="accent1"/>
-          </a:lnRef>
-          <a:fillRef idx="3">
-            <a:schemeClr val="accent1"/>
-          </a:fillRef>
-          <a:effectRef idx="2">
-            <a:schemeClr val="accent1"/>
-          </a:effectRef>
-          <a:fontRef idx="minor">
-            <a:schemeClr val="lt1"/>
-          </a:fontRef>
-        </p:style>
-        <p:txBody>
           <a:bodyPr rtlCol="0" anchor="ctr"/>
           <a:lstStyle/>
           <a:p>
@@ -7220,715 +7669,14 @@
       </p:sp>
       <p:sp>
         <p:nvSpPr>
-          <p:cNvPr id="5" name="Rounded Rectangle 4"/>
-          <p:cNvSpPr/>
-          <p:nvPr/>
-        </p:nvSpPr>
-        <p:spPr>
-          <a:xfrm>
-            <a:off x="2770632" y="2011680"/>
-            <a:ext cx="1965960" cy="1280160"/>
-          </a:xfrm>
-          <a:prstGeom prst="roundRect">
-            <a:avLst/>
-          </a:prstGeom>
-          <a:solidFill>
-            <a:srgbClr val="E2EFDA"/>
-          </a:solidFill>
-          <a:ln w="12700">
-            <a:solidFill>
-              <a:srgbClr val="1F4E79"/>
-            </a:solidFill>
-          </a:ln>
-          <a:effectLst/>
-        </p:spPr>
-        <p:style>
-          <a:lnRef idx="1">
-            <a:schemeClr val="accent1"/>
-          </a:lnRef>
-          <a:fillRef idx="3">
-            <a:schemeClr val="accent1"/>
-          </a:fillRef>
-          <a:effectRef idx="2">
-            <a:schemeClr val="accent1"/>
-          </a:effectRef>
-          <a:fontRef idx="minor">
-            <a:schemeClr val="lt1"/>
-          </a:fontRef>
-        </p:style>
-        <p:txBody>
-          <a:bodyPr rtlCol="0" anchor="ctr" wrap="square"/>
-          <a:lstStyle/>
-          <a:p>
-            <a:pPr algn="ctr" rtl="1"/>
-            <a:r>
-              <a:rPr sz="1600" b="1">
-                <a:solidFill>
-                  <a:srgbClr val="333333"/>
-                </a:solidFill>
-                <a:latin typeface="Arial"/>
-                <a:cs typeface="Arial"/>
-                <a:ea typeface="Calibri"/>
-              </a:rPr>
-              <a:t>2) الاسترجاع</a:t>
-            </a:r>
-          </a:p>
-          <a:p>
-            <a:pPr algn="ctr" rtl="0"/>
-            <a:r>
-              <a:rPr sz="1200">
-                <a:solidFill>
-                  <a:srgbClr val="666666"/>
-                </a:solidFill>
-                <a:latin typeface="Calibri"/>
-                <a:cs typeface="Arial"/>
-                <a:ea typeface="Calibri"/>
-              </a:rPr>
-              <a:t>Retrieval</a:t>
-            </a:r>
-          </a:p>
-        </p:txBody>
-      </p:sp>
-      <p:sp>
-        <p:nvSpPr>
-          <p:cNvPr id="6" name="Left Arrow 5"/>
-          <p:cNvSpPr/>
-          <p:nvPr/>
-        </p:nvSpPr>
-        <p:spPr>
-          <a:xfrm>
-            <a:off x="4754880" y="2514600"/>
-            <a:ext cx="219456" cy="274320"/>
-          </a:xfrm>
-          <a:prstGeom prst="leftArrow">
-            <a:avLst/>
-          </a:prstGeom>
-          <a:solidFill>
-            <a:srgbClr val="1F4E79"/>
-          </a:solidFill>
-          <a:ln>
-            <a:noFill/>
-          </a:ln>
-          <a:effectLst/>
-        </p:spPr>
-        <p:style>
-          <a:lnRef idx="1">
-            <a:schemeClr val="accent1"/>
-          </a:lnRef>
-          <a:fillRef idx="3">
-            <a:schemeClr val="accent1"/>
-          </a:fillRef>
-          <a:effectRef idx="2">
-            <a:schemeClr val="accent1"/>
-          </a:effectRef>
-          <a:fontRef idx="minor">
-            <a:schemeClr val="lt1"/>
-          </a:fontRef>
-        </p:style>
-        <p:txBody>
-          <a:bodyPr rtlCol="0" anchor="ctr"/>
-          <a:lstStyle/>
-          <a:p>
-            <a:pPr algn="ctr"/>
-          </a:p>
-        </p:txBody>
-      </p:sp>
-      <p:sp>
-        <p:nvSpPr>
-          <p:cNvPr id="7" name="Rounded Rectangle 6"/>
-          <p:cNvSpPr/>
-          <p:nvPr/>
-        </p:nvSpPr>
-        <p:spPr>
-          <a:xfrm>
-            <a:off x="4992624" y="2011680"/>
-            <a:ext cx="1965960" cy="1280160"/>
-          </a:xfrm>
-          <a:prstGeom prst="roundRect">
-            <a:avLst/>
-          </a:prstGeom>
-          <a:solidFill>
-            <a:srgbClr val="FDE9D9"/>
-          </a:solidFill>
-          <a:ln w="12700">
-            <a:solidFill>
-              <a:srgbClr val="1F4E79"/>
-            </a:solidFill>
-          </a:ln>
-          <a:effectLst/>
-        </p:spPr>
-        <p:style>
-          <a:lnRef idx="1">
-            <a:schemeClr val="accent1"/>
-          </a:lnRef>
-          <a:fillRef idx="3">
-            <a:schemeClr val="accent1"/>
-          </a:fillRef>
-          <a:effectRef idx="2">
-            <a:schemeClr val="accent1"/>
-          </a:effectRef>
-          <a:fontRef idx="minor">
-            <a:schemeClr val="lt1"/>
-          </a:fontRef>
-        </p:style>
-        <p:txBody>
-          <a:bodyPr rtlCol="0" anchor="ctr" wrap="square"/>
-          <a:lstStyle/>
-          <a:p>
-            <a:pPr algn="ctr" rtl="1"/>
-            <a:r>
-              <a:rPr sz="1600" b="1">
-                <a:solidFill>
-                  <a:srgbClr val="333333"/>
-                </a:solidFill>
-                <a:latin typeface="Arial"/>
-                <a:cs typeface="Arial"/>
-                <a:ea typeface="Calibri"/>
-              </a:rPr>
-              <a:t>3) التوليد</a:t>
-            </a:r>
-          </a:p>
-          <a:p>
-            <a:pPr algn="ctr" rtl="0"/>
-            <a:r>
-              <a:rPr sz="1200">
-                <a:solidFill>
-                  <a:srgbClr val="666666"/>
-                </a:solidFill>
-                <a:latin typeface="Calibri"/>
-                <a:cs typeface="Arial"/>
-                <a:ea typeface="Calibri"/>
-              </a:rPr>
-              <a:t>Generation</a:t>
-            </a:r>
-          </a:p>
-        </p:txBody>
-      </p:sp>
-      <p:sp>
-        <p:nvSpPr>
-          <p:cNvPr id="8" name="Left Arrow 7"/>
-          <p:cNvSpPr/>
-          <p:nvPr/>
-        </p:nvSpPr>
-        <p:spPr>
-          <a:xfrm>
-            <a:off x="6976872" y="2514600"/>
-            <a:ext cx="219456" cy="274320"/>
-          </a:xfrm>
-          <a:prstGeom prst="leftArrow">
-            <a:avLst/>
-          </a:prstGeom>
-          <a:solidFill>
-            <a:srgbClr val="1F4E79"/>
-          </a:solidFill>
-          <a:ln>
-            <a:noFill/>
-          </a:ln>
-          <a:effectLst/>
-        </p:spPr>
-        <p:style>
-          <a:lnRef idx="1">
-            <a:schemeClr val="accent1"/>
-          </a:lnRef>
-          <a:fillRef idx="3">
-            <a:schemeClr val="accent1"/>
-          </a:fillRef>
-          <a:effectRef idx="2">
-            <a:schemeClr val="accent1"/>
-          </a:effectRef>
-          <a:fontRef idx="minor">
-            <a:schemeClr val="lt1"/>
-          </a:fontRef>
-        </p:style>
-        <p:txBody>
-          <a:bodyPr rtlCol="0" anchor="ctr"/>
-          <a:lstStyle/>
-          <a:p>
-            <a:pPr algn="ctr"/>
-          </a:p>
-        </p:txBody>
-      </p:sp>
-      <p:sp>
-        <p:nvSpPr>
-          <p:cNvPr id="9" name="Rounded Rectangle 8"/>
-          <p:cNvSpPr/>
-          <p:nvPr/>
-        </p:nvSpPr>
-        <p:spPr>
-          <a:xfrm>
-            <a:off x="7214616" y="2011680"/>
-            <a:ext cx="1965960" cy="1280160"/>
-          </a:xfrm>
-          <a:prstGeom prst="roundRect">
-            <a:avLst/>
-          </a:prstGeom>
-          <a:solidFill>
-            <a:srgbClr val="EDEDED"/>
-          </a:solidFill>
-          <a:ln w="12700">
-            <a:solidFill>
-              <a:srgbClr val="1F4E79"/>
-            </a:solidFill>
-          </a:ln>
-          <a:effectLst/>
-        </p:spPr>
-        <p:style>
-          <a:lnRef idx="1">
-            <a:schemeClr val="accent1"/>
-          </a:lnRef>
-          <a:fillRef idx="3">
-            <a:schemeClr val="accent1"/>
-          </a:fillRef>
-          <a:effectRef idx="2">
-            <a:schemeClr val="accent1"/>
-          </a:effectRef>
-          <a:fontRef idx="minor">
-            <a:schemeClr val="lt1"/>
-          </a:fontRef>
-        </p:style>
-        <p:txBody>
-          <a:bodyPr rtlCol="0" anchor="ctr" wrap="square"/>
-          <a:lstStyle/>
-          <a:p>
-            <a:pPr algn="ctr" rtl="1"/>
-            <a:r>
-              <a:rPr sz="1600" b="1">
-                <a:solidFill>
-                  <a:srgbClr val="333333"/>
-                </a:solidFill>
-                <a:latin typeface="Arial"/>
-                <a:cs typeface="Arial"/>
-                <a:ea typeface="Calibri"/>
-              </a:rPr>
-              <a:t>4) التقييم</a:t>
-            </a:r>
-          </a:p>
-          <a:p>
-            <a:pPr algn="ctr" rtl="0"/>
-            <a:r>
-              <a:rPr sz="1200">
-                <a:solidFill>
-                  <a:srgbClr val="666666"/>
-                </a:solidFill>
-                <a:latin typeface="Calibri"/>
-                <a:cs typeface="Arial"/>
-                <a:ea typeface="Calibri"/>
-              </a:rPr>
-              <a:t>Evaluation</a:t>
-            </a:r>
-          </a:p>
-        </p:txBody>
-      </p:sp>
-      <p:sp>
-        <p:nvSpPr>
-          <p:cNvPr id="10" name="Left Arrow 9"/>
-          <p:cNvSpPr/>
-          <p:nvPr/>
-        </p:nvSpPr>
-        <p:spPr>
-          <a:xfrm>
-            <a:off x="9198864" y="2514600"/>
-            <a:ext cx="219456" cy="274320"/>
-          </a:xfrm>
-          <a:prstGeom prst="leftArrow">
-            <a:avLst/>
-          </a:prstGeom>
-          <a:solidFill>
-            <a:srgbClr val="1F4E79"/>
-          </a:solidFill>
-          <a:ln>
-            <a:noFill/>
-          </a:ln>
-          <a:effectLst/>
-        </p:spPr>
-        <p:style>
-          <a:lnRef idx="1">
-            <a:schemeClr val="accent1"/>
-          </a:lnRef>
-          <a:fillRef idx="3">
-            <a:schemeClr val="accent1"/>
-          </a:fillRef>
-          <a:effectRef idx="2">
-            <a:schemeClr val="accent1"/>
-          </a:effectRef>
-          <a:fontRef idx="minor">
-            <a:schemeClr val="lt1"/>
-          </a:fontRef>
-        </p:style>
-        <p:txBody>
-          <a:bodyPr rtlCol="0" anchor="ctr"/>
-          <a:lstStyle/>
-          <a:p>
-            <a:pPr algn="ctr"/>
-          </a:p>
-        </p:txBody>
-      </p:sp>
-      <p:sp>
-        <p:nvSpPr>
-          <p:cNvPr id="11" name="Rounded Rectangle 10"/>
-          <p:cNvSpPr/>
-          <p:nvPr/>
-        </p:nvSpPr>
-        <p:spPr>
-          <a:xfrm>
-            <a:off x="9436608" y="2011680"/>
-            <a:ext cx="1965960" cy="1280160"/>
-          </a:xfrm>
-          <a:prstGeom prst="roundRect">
-            <a:avLst/>
-          </a:prstGeom>
-          <a:solidFill>
-            <a:srgbClr val="DCE6F1"/>
-          </a:solidFill>
-          <a:ln w="12700">
-            <a:solidFill>
-              <a:srgbClr val="1F4E79"/>
-            </a:solidFill>
-          </a:ln>
-          <a:effectLst/>
-        </p:spPr>
-        <p:style>
-          <a:lnRef idx="1">
-            <a:schemeClr val="accent1"/>
-          </a:lnRef>
-          <a:fillRef idx="3">
-            <a:schemeClr val="accent1"/>
-          </a:fillRef>
-          <a:effectRef idx="2">
-            <a:schemeClr val="accent1"/>
-          </a:effectRef>
-          <a:fontRef idx="minor">
-            <a:schemeClr val="lt1"/>
-          </a:fontRef>
-        </p:style>
-        <p:txBody>
-          <a:bodyPr rtlCol="0" anchor="ctr" wrap="square"/>
-          <a:lstStyle/>
-          <a:p>
-            <a:pPr algn="ctr" rtl="1"/>
-            <a:r>
-              <a:rPr sz="1600" b="1">
-                <a:solidFill>
-                  <a:srgbClr val="333333"/>
-                </a:solidFill>
-                <a:latin typeface="Arial"/>
-                <a:cs typeface="Arial"/>
-                <a:ea typeface="Calibri"/>
-              </a:rPr>
-              <a:t>5) التحسين</a:t>
-            </a:r>
-          </a:p>
-          <a:p>
-            <a:pPr algn="ctr" rtl="0"/>
-            <a:r>
-              <a:rPr sz="1200">
-                <a:solidFill>
-                  <a:srgbClr val="666666"/>
-                </a:solidFill>
-                <a:latin typeface="Calibri"/>
-                <a:cs typeface="Arial"/>
-                <a:ea typeface="Calibri"/>
-              </a:rPr>
-              <a:t>Optimization</a:t>
-            </a:r>
-          </a:p>
-        </p:txBody>
-      </p:sp>
-      <p:sp>
-        <p:nvSpPr>
-          <p:cNvPr id="12" name="Rounded Rectangle 11"/>
-          <p:cNvSpPr/>
-          <p:nvPr/>
-        </p:nvSpPr>
-        <p:spPr>
-          <a:xfrm>
-            <a:off x="548640" y="3749039"/>
-            <a:ext cx="1965960" cy="914400"/>
-          </a:xfrm>
-          <a:prstGeom prst="roundRect">
-            <a:avLst/>
-          </a:prstGeom>
-          <a:solidFill>
-            <a:srgbClr val="EDEDED"/>
-          </a:solidFill>
-          <a:ln w="12700">
-            <a:solidFill>
-              <a:srgbClr val="1F4E79"/>
-            </a:solidFill>
-          </a:ln>
-          <a:effectLst/>
-        </p:spPr>
-        <p:style>
-          <a:lnRef idx="1">
-            <a:schemeClr val="accent1"/>
-          </a:lnRef>
-          <a:fillRef idx="3">
-            <a:schemeClr val="accent1"/>
-          </a:fillRef>
-          <a:effectRef idx="2">
-            <a:schemeClr val="accent1"/>
-          </a:effectRef>
-          <a:fontRef idx="minor">
-            <a:schemeClr val="lt1"/>
-          </a:fontRef>
-        </p:style>
-        <p:txBody>
-          <a:bodyPr rtlCol="0" anchor="ctr" wrap="square"/>
-          <a:lstStyle/>
-          <a:p>
-            <a:pPr algn="ctr" rtl="1"/>
-            <a:r>
-              <a:rPr sz="1200" b="1">
-                <a:solidFill>
-                  <a:srgbClr val="333333"/>
-                </a:solidFill>
-                <a:latin typeface="Arial"/>
-                <a:cs typeface="Arial"/>
-                <a:ea typeface="Calibri"/>
-              </a:rPr>
-              <a:t>تقسيم تكراري + HNSW</a:t>
-            </a:r>
-          </a:p>
-        </p:txBody>
-      </p:sp>
-      <p:sp>
-        <p:nvSpPr>
-          <p:cNvPr id="13" name="Rounded Rectangle 12"/>
-          <p:cNvSpPr/>
-          <p:nvPr/>
-        </p:nvSpPr>
-        <p:spPr>
-          <a:xfrm>
-            <a:off x="2770632" y="3749039"/>
-            <a:ext cx="1965960" cy="914400"/>
-          </a:xfrm>
-          <a:prstGeom prst="roundRect">
-            <a:avLst/>
-          </a:prstGeom>
-          <a:solidFill>
-            <a:srgbClr val="EDEDED"/>
-          </a:solidFill>
-          <a:ln w="12700">
-            <a:solidFill>
-              <a:srgbClr val="1F4E79"/>
-            </a:solidFill>
-          </a:ln>
-          <a:effectLst/>
-        </p:spPr>
-        <p:style>
-          <a:lnRef idx="1">
-            <a:schemeClr val="accent1"/>
-          </a:lnRef>
-          <a:fillRef idx="3">
-            <a:schemeClr val="accent1"/>
-          </a:fillRef>
-          <a:effectRef idx="2">
-            <a:schemeClr val="accent1"/>
-          </a:effectRef>
-          <a:fontRef idx="minor">
-            <a:schemeClr val="lt1"/>
-          </a:fontRef>
-        </p:style>
-        <p:txBody>
-          <a:bodyPr rtlCol="0" anchor="ctr" wrap="square"/>
-          <a:lstStyle/>
-          <a:p>
-            <a:pPr algn="ctr" rtl="1"/>
-            <a:r>
-              <a:rPr sz="1200" b="1">
-                <a:solidFill>
-                  <a:srgbClr val="333333"/>
-                </a:solidFill>
-                <a:latin typeface="Arial"/>
-                <a:cs typeface="Arial"/>
-                <a:ea typeface="Calibri"/>
-              </a:rPr>
-              <a:t>بحث هجين + إعادة ترتيب</a:t>
-            </a:r>
-          </a:p>
-        </p:txBody>
-      </p:sp>
-      <p:sp>
-        <p:nvSpPr>
-          <p:cNvPr id="14" name="Rounded Rectangle 13"/>
-          <p:cNvSpPr/>
-          <p:nvPr/>
-        </p:nvSpPr>
-        <p:spPr>
-          <a:xfrm>
-            <a:off x="4992624" y="3749039"/>
-            <a:ext cx="1965960" cy="914400"/>
-          </a:xfrm>
-          <a:prstGeom prst="roundRect">
-            <a:avLst/>
-          </a:prstGeom>
-          <a:solidFill>
-            <a:srgbClr val="EDEDED"/>
-          </a:solidFill>
-          <a:ln w="12700">
-            <a:solidFill>
-              <a:srgbClr val="1F4E79"/>
-            </a:solidFill>
-          </a:ln>
-          <a:effectLst/>
-        </p:spPr>
-        <p:style>
-          <a:lnRef idx="1">
-            <a:schemeClr val="accent1"/>
-          </a:lnRef>
-          <a:fillRef idx="3">
-            <a:schemeClr val="accent1"/>
-          </a:fillRef>
-          <a:effectRef idx="2">
-            <a:schemeClr val="accent1"/>
-          </a:effectRef>
-          <a:fontRef idx="minor">
-            <a:schemeClr val="lt1"/>
-          </a:fontRef>
-        </p:style>
-        <p:txBody>
-          <a:bodyPr rtlCol="0" anchor="ctr" wrap="square"/>
-          <a:lstStyle/>
-          <a:p>
-            <a:pPr algn="ctr" rtl="1"/>
-            <a:r>
-              <a:rPr sz="1200" b="1">
-                <a:solidFill>
-                  <a:srgbClr val="333333"/>
-                </a:solidFill>
-                <a:latin typeface="Arial"/>
-                <a:cs typeface="Arial"/>
-                <a:ea typeface="Calibri"/>
-              </a:rPr>
-              <a:t>موجِّه مقيَّد بالمصادر</a:t>
-            </a:r>
-          </a:p>
-        </p:txBody>
-      </p:sp>
-      <p:sp>
-        <p:nvSpPr>
-          <p:cNvPr id="15" name="Rounded Rectangle 14"/>
-          <p:cNvSpPr/>
-          <p:nvPr/>
-        </p:nvSpPr>
-        <p:spPr>
-          <a:xfrm>
-            <a:off x="7214616" y="3749039"/>
-            <a:ext cx="1965960" cy="914400"/>
-          </a:xfrm>
-          <a:prstGeom prst="roundRect">
-            <a:avLst/>
-          </a:prstGeom>
-          <a:solidFill>
-            <a:srgbClr val="EDEDED"/>
-          </a:solidFill>
-          <a:ln w="12700">
-            <a:solidFill>
-              <a:srgbClr val="1F4E79"/>
-            </a:solidFill>
-          </a:ln>
-          <a:effectLst/>
-        </p:spPr>
-        <p:style>
-          <a:lnRef idx="1">
-            <a:schemeClr val="accent1"/>
-          </a:lnRef>
-          <a:fillRef idx="3">
-            <a:schemeClr val="accent1"/>
-          </a:fillRef>
-          <a:effectRef idx="2">
-            <a:schemeClr val="accent1"/>
-          </a:effectRef>
-          <a:fontRef idx="minor">
-            <a:schemeClr val="lt1"/>
-          </a:fontRef>
-        </p:style>
-        <p:txBody>
-          <a:bodyPr rtlCol="0" anchor="ctr" wrap="square"/>
-          <a:lstStyle/>
-          <a:p>
-            <a:pPr algn="ctr" rtl="1"/>
-            <a:r>
-              <a:rPr sz="1200" b="1">
-                <a:solidFill>
-                  <a:srgbClr val="333333"/>
-                </a:solidFill>
-                <a:latin typeface="Arial"/>
-                <a:cs typeface="Arial"/>
-                <a:ea typeface="Calibri"/>
-              </a:rPr>
-              <a:t>مثلث RAG (RAGAS)</a:t>
-            </a:r>
-          </a:p>
-        </p:txBody>
-      </p:sp>
-      <p:sp>
-        <p:nvSpPr>
-          <p:cNvPr id="16" name="Rounded Rectangle 15"/>
-          <p:cNvSpPr/>
-          <p:nvPr/>
-        </p:nvSpPr>
-        <p:spPr>
-          <a:xfrm>
-            <a:off x="9436608" y="3749039"/>
-            <a:ext cx="1965960" cy="914400"/>
-          </a:xfrm>
-          <a:prstGeom prst="roundRect">
-            <a:avLst/>
-          </a:prstGeom>
-          <a:solidFill>
-            <a:srgbClr val="EDEDED"/>
-          </a:solidFill>
-          <a:ln w="12700">
-            <a:solidFill>
-              <a:srgbClr val="1F4E79"/>
-            </a:solidFill>
-          </a:ln>
-          <a:effectLst/>
-        </p:spPr>
-        <p:style>
-          <a:lnRef idx="1">
-            <a:schemeClr val="accent1"/>
-          </a:lnRef>
-          <a:fillRef idx="3">
-            <a:schemeClr val="accent1"/>
-          </a:fillRef>
-          <a:effectRef idx="2">
-            <a:schemeClr val="accent1"/>
-          </a:effectRef>
-          <a:fontRef idx="minor">
-            <a:schemeClr val="lt1"/>
-          </a:fontRef>
-        </p:style>
-        <p:txBody>
-          <a:bodyPr rtlCol="0" anchor="ctr" wrap="square"/>
-          <a:lstStyle/>
-          <a:p>
-            <a:pPr algn="ctr" rtl="1"/>
-            <a:r>
-              <a:rPr sz="1200" b="1">
-                <a:solidFill>
-                  <a:srgbClr val="333333"/>
-                </a:solidFill>
-                <a:latin typeface="Arial"/>
-                <a:cs typeface="Arial"/>
-                <a:ea typeface="Calibri"/>
-              </a:rPr>
-              <a:t>تخزين مؤقت + توجيه</a:t>
-            </a:r>
-          </a:p>
-        </p:txBody>
-      </p:sp>
-      <p:sp>
-        <p:nvSpPr>
-          <p:cNvPr id="17" name="TextBox 16"/>
+          <p:cNvPr id="3" name="TextBox 2"/>
           <p:cNvSpPr txBox="1"/>
           <p:nvPr/>
         </p:nvSpPr>
         <p:spPr>
           <a:xfrm>
-            <a:off x="640080" y="6126480"/>
-            <a:ext cx="10972800" cy="548640"/>
+            <a:off x="640080" y="182880"/>
+            <a:ext cx="10972800" cy="640080"/>
           </a:xfrm>
           <a:prstGeom prst="rect">
             <a:avLst/>
@@ -7943,40 +7691,27 @@
           <a:p>
             <a:pPr algn="r" rtl="1"/>
             <a:r>
-              <a:rPr sz="1400">
-                <a:solidFill>
-                  <a:srgbClr val="666666"/>
+              <a:rPr sz="3200" b="1">
+                <a:solidFill>
+                  <a:srgbClr val="1F3B5C"/>
                 </a:solidFill>
                 <a:latin typeface="Arial"/>
-                <a:cs typeface="Arial"/>
-                <a:ea typeface="Calibri"/>
-              </a:rPr>
-              <a:t>من الفهرسة إلى التقييم — المسار التطبيقي في مختبر L03.</a:t>
-            </a:r>
-          </a:p>
-          <a:p>
-            <a:pPr algn="r" rtl="0"/>
-            <a:r>
-              <a:rPr>
-                <a:latin typeface="Calibri"/>
-                <a:cs typeface="Arial"/>
-                <a:ea typeface="Calibri"/>
-              </a:rPr>
-              <a:t>From indexing to evaluation — applied in lab L03.</a:t>
-            </a:r>
-          </a:p>
-        </p:txBody>
-      </p:sp>
-      <p:sp>
-        <p:nvSpPr>
-          <p:cNvPr id="18" name="TextBox 17"/>
+              </a:rPr>
+              <a:t>1) الفهرسة: استراتيجيات التقسيم / Indexing: Chunking</a:t>
+            </a:r>
+          </a:p>
+        </p:txBody>
+      </p:sp>
+      <p:sp>
+        <p:nvSpPr>
+          <p:cNvPr id="4" name="TextBox 3"/>
           <p:cNvSpPr txBox="1"/>
           <p:nvPr/>
         </p:nvSpPr>
         <p:spPr>
           <a:xfrm>
-            <a:off x="640080" y="6400800"/>
-            <a:ext cx="8686800" cy="320040"/>
+            <a:off x="640080" y="1280160"/>
+            <a:ext cx="10972800" cy="5212080"/>
           </a:xfrm>
           <a:prstGeom prst="rect">
             <a:avLst/>
@@ -7989,31 +7724,93 @@
           </a:bodyPr>
           <a:lstStyle/>
           <a:p>
-            <a:pPr algn="r" rtl="1"/>
-            <a:r>
-              <a:rPr sz="1000" b="0">
+            <a:pPr algn="r" rtl="1">
+              <a:spcBef>
+                <a:spcPts val="200"/>
+              </a:spcBef>
+              <a:spcAft>
+                <a:spcPts val="1000"/>
+              </a:spcAft>
+            </a:pPr>
+            <a:r>
+              <a:rPr sz="1800">
+                <a:solidFill>
+                  <a:srgbClr val="333333"/>
+                </a:solidFill>
+                <a:latin typeface="Arial"/>
+              </a:rPr>
+              <a:t>• ثابت الحجم: أبسطها مع تداخل لكنه يقطع الجُمل. دلالي: تجميع حسب تشابه الكوساينس، حساس للعتبة.</a:t>
+            </a:r>
+          </a:p>
+          <a:p>
+            <a:pPr algn="l" rtl="0">
+              <a:spcBef>
+                <a:spcPts val="200"/>
+              </a:spcBef>
+              <a:spcAft>
+                <a:spcPts val="1000"/>
+              </a:spcAft>
+            </a:pPr>
+            <a:r>
+              <a:rPr sz="1500">
                 <a:solidFill>
                   <a:srgbClr val="666666"/>
                 </a:solidFill>
+                <a:latin typeface="Calibri"/>
+              </a:rPr>
+              <a:t>• Fixed-size: simplest with overlap but breaks sentences. Semantic: cosine grouping, threshold-sensitive.</a:t>
+            </a:r>
+          </a:p>
+          <a:p>
+            <a:pPr algn="r" rtl="1">
+              <a:spcBef>
+                <a:spcPts val="200"/>
+              </a:spcBef>
+              <a:spcAft>
+                <a:spcPts val="1000"/>
+              </a:spcAft>
+            </a:pPr>
+            <a:r>
+              <a:rPr sz="1800">
+                <a:solidFill>
+                  <a:srgbClr val="333333"/>
+                </a:solidFill>
                 <a:latin typeface="Arial"/>
-                <a:cs typeface="Arial"/>
-                <a:ea typeface="Calibri"/>
-              </a:rPr>
-              <a:t>Module 02 — Data &amp; AI Engineering Track  |  الوحدة الثانية</a:t>
-            </a:r>
-          </a:p>
-        </p:txBody>
-      </p:sp>
-      <p:sp>
-        <p:nvSpPr>
-          <p:cNvPr id="19" name="TextBox 18"/>
+              </a:rPr>
+              <a:t>• تكراري (الموصى به افتراضيًا): فصل بالفقرات ثم تقسيم ما تجاوز الحد. بحسب البنية: العناوين. بالنموذج اللغوي: الأدق والأغلى.</a:t>
+            </a:r>
+          </a:p>
+          <a:p>
+            <a:pPr algn="l" rtl="0">
+              <a:spcBef>
+                <a:spcPts val="200"/>
+              </a:spcBef>
+              <a:spcAft>
+                <a:spcPts val="1000"/>
+              </a:spcAft>
+            </a:pPr>
+            <a:r>
+              <a:rPr sz="1500">
+                <a:solidFill>
+                  <a:srgbClr val="666666"/>
+                </a:solidFill>
+                <a:latin typeface="Calibri"/>
+              </a:rPr>
+              <a:t>• Recursive (recommended default): split by paragraphs then oversized chunks. Structure-based: headings. LLM-based: most accurate, most expensive.</a:t>
+            </a:r>
+          </a:p>
+        </p:txBody>
+      </p:sp>
+      <p:sp>
+        <p:nvSpPr>
+          <p:cNvPr id="5" name="TextBox 4"/>
           <p:cNvSpPr txBox="1"/>
           <p:nvPr/>
         </p:nvSpPr>
         <p:spPr>
           <a:xfrm>
-            <a:off x="9601200" y="6400800"/>
-            <a:ext cx="1920240" cy="320040"/>
+            <a:off x="640080" y="6400800"/>
+            <a:ext cx="8686800" cy="320040"/>
           </a:xfrm>
           <a:prstGeom prst="rect">
             <a:avLst/>
@@ -8026,31 +7823,29 @@
           </a:bodyPr>
           <a:lstStyle/>
           <a:p>
-            <a:pPr algn="l" rtl="0"/>
+            <a:pPr algn="r" rtl="1"/>
             <a:r>
               <a:rPr sz="1000" b="0">
                 <a:solidFill>
                   <a:srgbClr val="666666"/>
                 </a:solidFill>
-                <a:latin typeface="Calibri"/>
-                <a:cs typeface="Arial"/>
-                <a:ea typeface="Calibri"/>
-              </a:rPr>
-              <a:t>09_  •  4/14</a:t>
-            </a:r>
-          </a:p>
-        </p:txBody>
-      </p:sp>
-      <p:sp>
-        <p:nvSpPr>
-          <p:cNvPr id="20" name="TextBox 19"/>
+                <a:latin typeface="Arial"/>
+              </a:rPr>
+              <a:t>Module 02 — Data &amp; AI Engineering Track  |  الوحدة الثانية</a:t>
+            </a:r>
+          </a:p>
+        </p:txBody>
+      </p:sp>
+      <p:sp>
+        <p:nvSpPr>
+          <p:cNvPr id="6" name="TextBox 5"/>
           <p:cNvSpPr txBox="1"/>
           <p:nvPr/>
         </p:nvSpPr>
         <p:spPr>
           <a:xfrm>
-            <a:off x="640080" y="6400800"/>
-            <a:ext cx="8686800" cy="320040"/>
+            <a:off x="9601200" y="6400800"/>
+            <a:ext cx="1920240" cy="320040"/>
           </a:xfrm>
           <a:prstGeom prst="rect">
             <a:avLst/>
@@ -8063,54 +7858,15 @@
           </a:bodyPr>
           <a:lstStyle/>
           <a:p>
-            <a:pPr algn="r" rtl="1"/>
+            <a:pPr algn="l" rtl="0"/>
             <a:r>
               <a:rPr sz="1000" b="0">
                 <a:solidFill>
                   <a:srgbClr val="666666"/>
                 </a:solidFill>
-                <a:latin typeface="Arial"/>
-                <a:cs typeface="Arial"/>
-                <a:ea typeface="Calibri"/>
-              </a:rPr>
-              <a:t>Module 02 — Data &amp; AI Engineering Track  |  الوحدة الثانية</a:t>
-            </a:r>
-          </a:p>
-        </p:txBody>
-      </p:sp>
-      <p:sp>
-        <p:nvSpPr>
-          <p:cNvPr id="21" name="TextBox 20"/>
-          <p:cNvSpPr txBox="1"/>
-          <p:nvPr/>
-        </p:nvSpPr>
-        <p:spPr>
-          <a:xfrm>
-            <a:off x="9601200" y="6400800"/>
-            <a:ext cx="1920240" cy="320040"/>
-          </a:xfrm>
-          <a:prstGeom prst="rect">
-            <a:avLst/>
-          </a:prstGeom>
-          <a:noFill/>
-        </p:spPr>
-        <p:txBody>
-          <a:bodyPr wrap="square">
-            <a:spAutoFit/>
-          </a:bodyPr>
-          <a:lstStyle/>
-          <a:p>
-            <a:pPr algn="l" rtl="0"/>
-            <a:r>
-              <a:rPr sz="1000" b="0">
-                <a:solidFill>
-                  <a:srgbClr val="666666"/>
-                </a:solidFill>
                 <a:latin typeface="Calibri"/>
-                <a:cs typeface="Arial"/>
-                <a:ea typeface="Calibri"/>
-              </a:rPr>
-              <a:t>09_  •  4/14</a:t>
+              </a:rPr>
+              <a:t>V09  •  5/15</a:t>
             </a:r>
           </a:p>
         </p:txBody>
@@ -8216,10 +7972,8 @@
                   <a:srgbClr val="1F3B5C"/>
                 </a:solidFill>
                 <a:latin typeface="Arial"/>
-                <a:cs typeface="Arial"/>
-                <a:ea typeface="Calibri"/>
-              </a:rPr>
-              <a:t>1) الفهرسة: استراتيجيات التقسيم / Indexing: Chunking</a:t>
+              </a:rPr>
+              <a:t>2) الاسترجاع / Retrieval</a:t>
             </a:r>
           </a:p>
         </p:txBody>
@@ -8255,19 +8009,17 @@
               </a:spcAft>
             </a:pPr>
             <a:r>
-              <a:rPr sz="1800">
+              <a:rPr sz="1900">
                 <a:solidFill>
                   <a:srgbClr val="333333"/>
                 </a:solidFill>
                 <a:latin typeface="Arial"/>
-                <a:cs typeface="Arial"/>
-                <a:ea typeface="Calibri"/>
-              </a:rPr>
-              <a:t>• ثابت الحجم: أبسطها مع تداخل لكنه يقطع الجُمل. دلالي: تجميع حسب تشابه الكوساينس، حساس للعتبة.</a:t>
-            </a:r>
-          </a:p>
-          <a:p>
-            <a:pPr algn="r" rtl="0">
+              </a:rPr>
+              <a:t>• بحث هجين: كثيف (Dense) + متناثر (BM25) يغطي المعنى والكلمات المفتاحية معًا.</a:t>
+            </a:r>
+          </a:p>
+          <a:p>
+            <a:pPr algn="l" rtl="0">
               <a:spcBef>
                 <a:spcPts val="200"/>
               </a:spcBef>
@@ -8276,15 +8028,13 @@
               </a:spcAft>
             </a:pPr>
             <a:r>
-              <a:rPr sz="1500">
+              <a:rPr sz="1600">
                 <a:solidFill>
                   <a:srgbClr val="666666"/>
                 </a:solidFill>
                 <a:latin typeface="Calibri"/>
-                <a:cs typeface="Arial"/>
-                <a:ea typeface="Calibri"/>
-              </a:rPr>
-              <a:t>• Fixed-size: simplest with overlap but breaks sentences. Semantic: cosine grouping, threshold-sensitive.</a:t>
+              </a:rPr>
+              <a:t>• Hybrid search: dense + sparse (BM25) covers meaning and keywords.</a:t>
             </a:r>
           </a:p>
           <a:p>
@@ -8297,19 +8047,17 @@
               </a:spcAft>
             </a:pPr>
             <a:r>
-              <a:rPr sz="1800">
+              <a:rPr sz="1900">
                 <a:solidFill>
                   <a:srgbClr val="333333"/>
                 </a:solidFill>
                 <a:latin typeface="Arial"/>
-                <a:cs typeface="Arial"/>
-                <a:ea typeface="Calibri"/>
-              </a:rPr>
-              <a:t>• تكراري (الموصى به افتراضيًا): فصل بالفقرات ثم تقسيم ما تجاوز الحد. بحسب البنية: العناوين. بالنموذج اللغوي: الأدق والأغلى.</a:t>
-            </a:r>
-          </a:p>
-          <a:p>
-            <a:pPr algn="r" rtl="0">
+              </a:rPr>
+              <a:t>• إعادة ترتيب Cross-encoder وتحويل الاستعلام Multi-Query يرفعان دقة النتائج.</a:t>
+            </a:r>
+          </a:p>
+          <a:p>
+            <a:pPr algn="l" rtl="0">
               <a:spcBef>
                 <a:spcPts val="200"/>
               </a:spcBef>
@@ -8318,15 +8066,13 @@
               </a:spcAft>
             </a:pPr>
             <a:r>
-              <a:rPr sz="1500">
+              <a:rPr sz="1600">
                 <a:solidFill>
                   <a:srgbClr val="666666"/>
                 </a:solidFill>
                 <a:latin typeface="Calibri"/>
-                <a:cs typeface="Arial"/>
-                <a:ea typeface="Calibri"/>
-              </a:rPr>
-              <a:t>• Recursive (recommended default): split by paragraphs then oversized chunks. Structure-based: headings. LLM-based: most accurate, most expensive.</a:t>
+              </a:rPr>
+              <a:t>• Cross-encoder reranking and multi-query transformation improve precision.</a:t>
             </a:r>
           </a:p>
         </p:txBody>
@@ -8360,8 +8106,6 @@
                   <a:srgbClr val="666666"/>
                 </a:solidFill>
                 <a:latin typeface="Arial"/>
-                <a:cs typeface="Arial"/>
-                <a:ea typeface="Calibri"/>
               </a:rPr>
               <a:t>Module 02 — Data &amp; AI Engineering Track  |  الوحدة الثانية</a:t>
             </a:r>
@@ -8397,158 +8141,8 @@
                   <a:srgbClr val="666666"/>
                 </a:solidFill>
                 <a:latin typeface="Calibri"/>
-                <a:cs typeface="Arial"/>
-                <a:ea typeface="Calibri"/>
-              </a:rPr>
-              <a:t>V09  •  4/14</a:t>
-            </a:r>
-          </a:p>
-        </p:txBody>
-      </p:sp>
-      <p:sp>
-        <p:nvSpPr>
-          <p:cNvPr id="7" name="TextBox 6"/>
-          <p:cNvSpPr txBox="1"/>
-          <p:nvPr/>
-        </p:nvSpPr>
-        <p:spPr>
-          <a:xfrm>
-            <a:off x="640080" y="6400800"/>
-            <a:ext cx="8686800" cy="320040"/>
-          </a:xfrm>
-          <a:prstGeom prst="rect">
-            <a:avLst/>
-          </a:prstGeom>
-          <a:noFill/>
-        </p:spPr>
-        <p:txBody>
-          <a:bodyPr wrap="square">
-            <a:spAutoFit/>
-          </a:bodyPr>
-          <a:lstStyle/>
-          <a:p>
-            <a:pPr algn="r" rtl="1"/>
-            <a:r>
-              <a:rPr sz="1000" b="0">
-                <a:solidFill>
-                  <a:srgbClr val="666666"/>
-                </a:solidFill>
-                <a:latin typeface="Arial"/>
-                <a:cs typeface="Arial"/>
-                <a:ea typeface="Calibri"/>
-              </a:rPr>
-              <a:t>Module 02 — Data &amp; AI Engineering Track  |  الوحدة الثانية</a:t>
-            </a:r>
-          </a:p>
-        </p:txBody>
-      </p:sp>
-      <p:sp>
-        <p:nvSpPr>
-          <p:cNvPr id="8" name="TextBox 7"/>
-          <p:cNvSpPr txBox="1"/>
-          <p:nvPr/>
-        </p:nvSpPr>
-        <p:spPr>
-          <a:xfrm>
-            <a:off x="9601200" y="6400800"/>
-            <a:ext cx="1920240" cy="320040"/>
-          </a:xfrm>
-          <a:prstGeom prst="rect">
-            <a:avLst/>
-          </a:prstGeom>
-          <a:noFill/>
-        </p:spPr>
-        <p:txBody>
-          <a:bodyPr wrap="square">
-            <a:spAutoFit/>
-          </a:bodyPr>
-          <a:lstStyle/>
-          <a:p>
-            <a:pPr algn="l" rtl="0"/>
-            <a:r>
-              <a:rPr sz="1000" b="0">
-                <a:solidFill>
-                  <a:srgbClr val="666666"/>
-                </a:solidFill>
-                <a:latin typeface="Calibri"/>
-                <a:cs typeface="Arial"/>
-                <a:ea typeface="Calibri"/>
-              </a:rPr>
-              <a:t>09_  •  5/14</a:t>
-            </a:r>
-          </a:p>
-        </p:txBody>
-      </p:sp>
-      <p:sp>
-        <p:nvSpPr>
-          <p:cNvPr id="9" name="TextBox 8"/>
-          <p:cNvSpPr txBox="1"/>
-          <p:nvPr/>
-        </p:nvSpPr>
-        <p:spPr>
-          <a:xfrm>
-            <a:off x="640080" y="6400800"/>
-            <a:ext cx="8686800" cy="320040"/>
-          </a:xfrm>
-          <a:prstGeom prst="rect">
-            <a:avLst/>
-          </a:prstGeom>
-          <a:noFill/>
-        </p:spPr>
-        <p:txBody>
-          <a:bodyPr wrap="square">
-            <a:spAutoFit/>
-          </a:bodyPr>
-          <a:lstStyle/>
-          <a:p>
-            <a:pPr algn="r" rtl="1"/>
-            <a:r>
-              <a:rPr sz="1000" b="0">
-                <a:solidFill>
-                  <a:srgbClr val="666666"/>
-                </a:solidFill>
-                <a:latin typeface="Arial"/>
-                <a:cs typeface="Arial"/>
-                <a:ea typeface="Calibri"/>
-              </a:rPr>
-              <a:t>Module 02 — Data &amp; AI Engineering Track  |  الوحدة الثانية</a:t>
-            </a:r>
-          </a:p>
-        </p:txBody>
-      </p:sp>
-      <p:sp>
-        <p:nvSpPr>
-          <p:cNvPr id="10" name="TextBox 9"/>
-          <p:cNvSpPr txBox="1"/>
-          <p:nvPr/>
-        </p:nvSpPr>
-        <p:spPr>
-          <a:xfrm>
-            <a:off x="9601200" y="6400800"/>
-            <a:ext cx="1920240" cy="320040"/>
-          </a:xfrm>
-          <a:prstGeom prst="rect">
-            <a:avLst/>
-          </a:prstGeom>
-          <a:noFill/>
-        </p:spPr>
-        <p:txBody>
-          <a:bodyPr wrap="square">
-            <a:spAutoFit/>
-          </a:bodyPr>
-          <a:lstStyle/>
-          <a:p>
-            <a:pPr algn="l" rtl="0"/>
-            <a:r>
-              <a:rPr sz="1000" b="0">
-                <a:solidFill>
-                  <a:srgbClr val="666666"/>
-                </a:solidFill>
-                <a:latin typeface="Calibri"/>
-                <a:cs typeface="Arial"/>
-                <a:ea typeface="Calibri"/>
-              </a:rPr>
-              <a:t>09_  •  5/14</a:t>
+              </a:rPr>
+              <a:t>V09  •  7/15</a:t>
             </a:r>
           </a:p>
         </p:txBody>
@@ -8581,59 +8175,22 @@
       <p:grpSpPr/>
       <p:sp>
         <p:nvSpPr>
-          <p:cNvPr id="2" name="TextBox 1"/>
-          <p:cNvSpPr txBox="1"/>
-          <p:nvPr/>
-        </p:nvSpPr>
-        <p:spPr>
-          <a:xfrm>
-            <a:off x="640080" y="137160"/>
-            <a:ext cx="10972800" cy="640080"/>
+          <p:cNvPr id="2" name="Rectangle 1"/>
+          <p:cNvSpPr/>
+          <p:nvPr/>
+        </p:nvSpPr>
+        <p:spPr>
+          <a:xfrm>
+            <a:off x="0" y="0"/>
+            <a:ext cx="12191695" cy="1005840"/>
           </a:xfrm>
           <a:prstGeom prst="rect">
             <a:avLst/>
           </a:prstGeom>
-          <a:noFill/>
-        </p:spPr>
-        <p:txBody>
-          <a:bodyPr wrap="none">
-            <a:spAutoFit/>
-          </a:bodyPr>
-          <a:lstStyle/>
-          <a:p>
-            <a:pPr algn="r" rtl="1"/>
-            <a:r>
-              <a:rPr sz="3000" b="1">
-                <a:solidFill>
-                  <a:srgbClr val="1F3B5C"/>
-                </a:solidFill>
-                <a:latin typeface="Arial"/>
-                <a:cs typeface="Arial"/>
-                <a:ea typeface="Calibri"/>
-              </a:rPr>
-              <a:t>استراتيجيات تقسيم النصوص / Chunking Strategies</a:t>
-            </a:r>
-          </a:p>
-        </p:txBody>
-      </p:sp>
-      <p:sp>
-        <p:nvSpPr>
-          <p:cNvPr id="3" name="Rounded Rectangle 2"/>
-          <p:cNvSpPr/>
-          <p:nvPr/>
-        </p:nvSpPr>
-        <p:spPr>
-          <a:xfrm>
-            <a:off x="822960" y="1234440"/>
-            <a:ext cx="2560320" cy="777240"/>
-          </a:xfrm>
-          <a:prstGeom prst="roundRect">
-            <a:avLst/>
-          </a:prstGeom>
           <a:solidFill>
-            <a:srgbClr val="EDEDED"/>
+            <a:srgbClr val="FFFFFF"/>
           </a:solidFill>
-          <a:ln w="12700">
+          <a:ln w="25400">
             <a:solidFill>
               <a:srgbClr val="1F4E79"/>
             </a:solidFill>
@@ -8655,617 +8212,23 @@
           </a:fontRef>
         </p:style>
         <p:txBody>
-          <a:bodyPr rtlCol="0" anchor="ctr" wrap="square"/>
-          <a:lstStyle/>
-          <a:p>
-            <a:pPr algn="ctr" rtl="1"/>
-            <a:r>
-              <a:rPr sz="1500" b="1">
-                <a:solidFill>
-                  <a:srgbClr val="333333"/>
-                </a:solidFill>
-                <a:latin typeface="Arial"/>
-                <a:cs typeface="Arial"/>
-                <a:ea typeface="Calibri"/>
-              </a:rPr>
-              <a:t>ثابت الحجم</a:t>
-            </a:r>
-          </a:p>
-          <a:p>
-            <a:pPr algn="ctr" rtl="0"/>
-            <a:r>
-              <a:rPr sz="1100">
-                <a:solidFill>
-                  <a:srgbClr val="666666"/>
-                </a:solidFill>
-                <a:latin typeface="Calibri"/>
-                <a:cs typeface="Arial"/>
-                <a:ea typeface="Calibri"/>
-              </a:rPr>
-              <a:t>Fixed-size</a:t>
-            </a:r>
-          </a:p>
-        </p:txBody>
-      </p:sp>
-      <p:sp>
-        <p:nvSpPr>
-          <p:cNvPr id="4" name="Rounded Rectangle 3"/>
-          <p:cNvSpPr/>
-          <p:nvPr/>
-        </p:nvSpPr>
-        <p:spPr>
-          <a:xfrm>
-            <a:off x="3566160" y="1234440"/>
-            <a:ext cx="5669280" cy="777240"/>
-          </a:xfrm>
-          <a:prstGeom prst="roundRect">
-            <a:avLst/>
-          </a:prstGeom>
-          <a:solidFill>
-            <a:srgbClr val="EDEDED"/>
-          </a:solidFill>
-          <a:ln w="12700">
-            <a:solidFill>
-              <a:srgbClr val="1F4E79"/>
-            </a:solidFill>
-          </a:ln>
-          <a:effectLst/>
-        </p:spPr>
-        <p:style>
-          <a:lnRef idx="1">
-            <a:schemeClr val="accent1"/>
-          </a:lnRef>
-          <a:fillRef idx="3">
-            <a:schemeClr val="accent1"/>
-          </a:fillRef>
-          <a:effectRef idx="2">
-            <a:schemeClr val="accent1"/>
-          </a:effectRef>
-          <a:fontRef idx="minor">
-            <a:schemeClr val="lt1"/>
-          </a:fontRef>
-        </p:style>
-        <p:txBody>
-          <a:bodyPr rtlCol="0" anchor="ctr" wrap="square"/>
-          <a:lstStyle/>
-          <a:p>
-            <a:pPr algn="ctr" rtl="1"/>
-            <a:r>
-              <a:rPr sz="1300" b="1">
-                <a:solidFill>
-                  <a:srgbClr val="333333"/>
-                </a:solidFill>
-                <a:latin typeface="Arial"/>
-                <a:cs typeface="Arial"/>
-                <a:ea typeface="Calibri"/>
-              </a:rPr>
-              <a:t>أبسطها — يقطع الجُمل</a:t>
-            </a:r>
-          </a:p>
-        </p:txBody>
-      </p:sp>
-      <p:sp>
-        <p:nvSpPr>
-          <p:cNvPr id="5" name="Rounded Rectangle 4"/>
-          <p:cNvSpPr/>
-          <p:nvPr/>
-        </p:nvSpPr>
-        <p:spPr>
-          <a:xfrm>
-            <a:off x="822960" y="2148840"/>
-            <a:ext cx="2560320" cy="777240"/>
-          </a:xfrm>
-          <a:prstGeom prst="roundRect">
-            <a:avLst/>
-          </a:prstGeom>
-          <a:solidFill>
-            <a:srgbClr val="EDEDED"/>
-          </a:solidFill>
-          <a:ln w="12700">
-            <a:solidFill>
-              <a:srgbClr val="1F4E79"/>
-            </a:solidFill>
-          </a:ln>
-          <a:effectLst/>
-        </p:spPr>
-        <p:style>
-          <a:lnRef idx="1">
-            <a:schemeClr val="accent1"/>
-          </a:lnRef>
-          <a:fillRef idx="3">
-            <a:schemeClr val="accent1"/>
-          </a:fillRef>
-          <a:effectRef idx="2">
-            <a:schemeClr val="accent1"/>
-          </a:effectRef>
-          <a:fontRef idx="minor">
-            <a:schemeClr val="lt1"/>
-          </a:fontRef>
-        </p:style>
-        <p:txBody>
-          <a:bodyPr rtlCol="0" anchor="ctr" wrap="square"/>
-          <a:lstStyle/>
-          <a:p>
-            <a:pPr algn="ctr" rtl="1"/>
-            <a:r>
-              <a:rPr sz="1500" b="1">
-                <a:solidFill>
-                  <a:srgbClr val="333333"/>
-                </a:solidFill>
-                <a:latin typeface="Arial"/>
-                <a:cs typeface="Arial"/>
-                <a:ea typeface="Calibri"/>
-              </a:rPr>
-              <a:t>دلالي</a:t>
-            </a:r>
-          </a:p>
-          <a:p>
-            <a:pPr algn="ctr" rtl="0"/>
-            <a:r>
-              <a:rPr sz="1100">
-                <a:solidFill>
-                  <a:srgbClr val="666666"/>
-                </a:solidFill>
-                <a:latin typeface="Calibri"/>
-                <a:cs typeface="Arial"/>
-                <a:ea typeface="Calibri"/>
-              </a:rPr>
-              <a:t>Semantic</a:t>
-            </a:r>
-          </a:p>
-        </p:txBody>
-      </p:sp>
-      <p:sp>
-        <p:nvSpPr>
-          <p:cNvPr id="6" name="Rounded Rectangle 5"/>
-          <p:cNvSpPr/>
-          <p:nvPr/>
-        </p:nvSpPr>
-        <p:spPr>
-          <a:xfrm>
-            <a:off x="3566160" y="2148840"/>
-            <a:ext cx="5669280" cy="777240"/>
-          </a:xfrm>
-          <a:prstGeom prst="roundRect">
-            <a:avLst/>
-          </a:prstGeom>
-          <a:solidFill>
-            <a:srgbClr val="EDEDED"/>
-          </a:solidFill>
-          <a:ln w="12700">
-            <a:solidFill>
-              <a:srgbClr val="1F4E79"/>
-            </a:solidFill>
-          </a:ln>
-          <a:effectLst/>
-        </p:spPr>
-        <p:style>
-          <a:lnRef idx="1">
-            <a:schemeClr val="accent1"/>
-          </a:lnRef>
-          <a:fillRef idx="3">
-            <a:schemeClr val="accent1"/>
-          </a:fillRef>
-          <a:effectRef idx="2">
-            <a:schemeClr val="accent1"/>
-          </a:effectRef>
-          <a:fontRef idx="minor">
-            <a:schemeClr val="lt1"/>
-          </a:fontRef>
-        </p:style>
-        <p:txBody>
-          <a:bodyPr rtlCol="0" anchor="ctr" wrap="square"/>
-          <a:lstStyle/>
-          <a:p>
-            <a:pPr algn="ctr" rtl="1"/>
-            <a:r>
-              <a:rPr sz="1300" b="1">
-                <a:solidFill>
-                  <a:srgbClr val="333333"/>
-                </a:solidFill>
-                <a:latin typeface="Arial"/>
-                <a:cs typeface="Arial"/>
-                <a:ea typeface="Calibri"/>
-              </a:rPr>
-              <a:t>تماسك أفضل — حساس للعتبة</a:t>
-            </a:r>
-          </a:p>
-        </p:txBody>
-      </p:sp>
-      <p:sp>
-        <p:nvSpPr>
-          <p:cNvPr id="7" name="Rounded Rectangle 6"/>
-          <p:cNvSpPr/>
-          <p:nvPr/>
-        </p:nvSpPr>
-        <p:spPr>
-          <a:xfrm>
-            <a:off x="822960" y="3063240"/>
-            <a:ext cx="2560320" cy="777240"/>
-          </a:xfrm>
-          <a:prstGeom prst="roundRect">
-            <a:avLst/>
-          </a:prstGeom>
-          <a:solidFill>
-            <a:srgbClr val="E2EFDA"/>
-          </a:solidFill>
-          <a:ln w="12700">
-            <a:solidFill>
-              <a:srgbClr val="1F4E79"/>
-            </a:solidFill>
-          </a:ln>
-          <a:effectLst/>
-        </p:spPr>
-        <p:style>
-          <a:lnRef idx="1">
-            <a:schemeClr val="accent1"/>
-          </a:lnRef>
-          <a:fillRef idx="3">
-            <a:schemeClr val="accent1"/>
-          </a:fillRef>
-          <a:effectRef idx="2">
-            <a:schemeClr val="accent1"/>
-          </a:effectRef>
-          <a:fontRef idx="minor">
-            <a:schemeClr val="lt1"/>
-          </a:fontRef>
-        </p:style>
-        <p:txBody>
-          <a:bodyPr rtlCol="0" anchor="ctr" wrap="square"/>
-          <a:lstStyle/>
-          <a:p>
-            <a:pPr algn="ctr" rtl="1"/>
-            <a:r>
-              <a:rPr sz="1500" b="1">
-                <a:solidFill>
-                  <a:srgbClr val="333333"/>
-                </a:solidFill>
-                <a:latin typeface="Arial"/>
-                <a:cs typeface="Arial"/>
-                <a:ea typeface="Calibri"/>
-              </a:rPr>
-              <a:t>تكراري ★</a:t>
-            </a:r>
-          </a:p>
-          <a:p>
-            <a:pPr algn="ctr" rtl="0"/>
-            <a:r>
-              <a:rPr sz="1100">
-                <a:solidFill>
-                  <a:srgbClr val="666666"/>
-                </a:solidFill>
-                <a:latin typeface="Calibri"/>
-                <a:cs typeface="Arial"/>
-                <a:ea typeface="Calibri"/>
-              </a:rPr>
-              <a:t>Recursive</a:t>
-            </a:r>
-          </a:p>
-        </p:txBody>
-      </p:sp>
-      <p:sp>
-        <p:nvSpPr>
-          <p:cNvPr id="8" name="Rounded Rectangle 7"/>
-          <p:cNvSpPr/>
-          <p:nvPr/>
-        </p:nvSpPr>
-        <p:spPr>
-          <a:xfrm>
-            <a:off x="3566160" y="3063240"/>
-            <a:ext cx="5669280" cy="777240"/>
-          </a:xfrm>
-          <a:prstGeom prst="roundRect">
-            <a:avLst/>
-          </a:prstGeom>
-          <a:solidFill>
-            <a:srgbClr val="EDEDED"/>
-          </a:solidFill>
-          <a:ln w="12700">
-            <a:solidFill>
-              <a:srgbClr val="1F4E79"/>
-            </a:solidFill>
-          </a:ln>
-          <a:effectLst/>
-        </p:spPr>
-        <p:style>
-          <a:lnRef idx="1">
-            <a:schemeClr val="accent1"/>
-          </a:lnRef>
-          <a:fillRef idx="3">
-            <a:schemeClr val="accent1"/>
-          </a:fillRef>
-          <a:effectRef idx="2">
-            <a:schemeClr val="accent1"/>
-          </a:effectRef>
-          <a:fontRef idx="minor">
-            <a:schemeClr val="lt1"/>
-          </a:fontRef>
-        </p:style>
-        <p:txBody>
-          <a:bodyPr rtlCol="0" anchor="ctr" wrap="square"/>
-          <a:lstStyle/>
-          <a:p>
-            <a:pPr algn="ctr" rtl="1"/>
-            <a:r>
-              <a:rPr sz="1300" b="1">
-                <a:solidFill>
-                  <a:srgbClr val="333333"/>
-                </a:solidFill>
-                <a:latin typeface="Arial"/>
-                <a:cs typeface="Arial"/>
-                <a:ea typeface="Calibri"/>
-              </a:rPr>
-              <a:t>الموصى به افتراضيًا</a:t>
-            </a:r>
-          </a:p>
-        </p:txBody>
-      </p:sp>
-      <p:sp>
-        <p:nvSpPr>
-          <p:cNvPr id="9" name="Rounded Rectangle 8"/>
-          <p:cNvSpPr/>
-          <p:nvPr/>
-        </p:nvSpPr>
-        <p:spPr>
-          <a:xfrm>
-            <a:off x="822960" y="3977640"/>
-            <a:ext cx="2560320" cy="777240"/>
-          </a:xfrm>
-          <a:prstGeom prst="roundRect">
-            <a:avLst/>
-          </a:prstGeom>
-          <a:solidFill>
-            <a:srgbClr val="EDEDED"/>
-          </a:solidFill>
-          <a:ln w="12700">
-            <a:solidFill>
-              <a:srgbClr val="1F4E79"/>
-            </a:solidFill>
-          </a:ln>
-          <a:effectLst/>
-        </p:spPr>
-        <p:style>
-          <a:lnRef idx="1">
-            <a:schemeClr val="accent1"/>
-          </a:lnRef>
-          <a:fillRef idx="3">
-            <a:schemeClr val="accent1"/>
-          </a:fillRef>
-          <a:effectRef idx="2">
-            <a:schemeClr val="accent1"/>
-          </a:effectRef>
-          <a:fontRef idx="minor">
-            <a:schemeClr val="lt1"/>
-          </a:fontRef>
-        </p:style>
-        <p:txBody>
-          <a:bodyPr rtlCol="0" anchor="ctr" wrap="square"/>
-          <a:lstStyle/>
-          <a:p>
-            <a:pPr algn="ctr" rtl="1"/>
-            <a:r>
-              <a:rPr sz="1500" b="1">
-                <a:solidFill>
-                  <a:srgbClr val="333333"/>
-                </a:solidFill>
-                <a:latin typeface="Arial"/>
-                <a:cs typeface="Arial"/>
-                <a:ea typeface="Calibri"/>
-              </a:rPr>
-              <a:t>بحسب البنية</a:t>
-            </a:r>
-          </a:p>
-          <a:p>
-            <a:pPr algn="ctr" rtl="0"/>
-            <a:r>
-              <a:rPr sz="1100">
-                <a:solidFill>
-                  <a:srgbClr val="666666"/>
-                </a:solidFill>
-                <a:latin typeface="Calibri"/>
-                <a:cs typeface="Arial"/>
-                <a:ea typeface="Calibri"/>
-              </a:rPr>
-              <a:t>Structure-based</a:t>
-            </a:r>
-          </a:p>
-        </p:txBody>
-      </p:sp>
-      <p:sp>
-        <p:nvSpPr>
-          <p:cNvPr id="10" name="Rounded Rectangle 9"/>
-          <p:cNvSpPr/>
-          <p:nvPr/>
-        </p:nvSpPr>
-        <p:spPr>
-          <a:xfrm>
-            <a:off x="3566160" y="3977640"/>
-            <a:ext cx="5669280" cy="777240"/>
-          </a:xfrm>
-          <a:prstGeom prst="roundRect">
-            <a:avLst/>
-          </a:prstGeom>
-          <a:solidFill>
-            <a:srgbClr val="EDEDED"/>
-          </a:solidFill>
-          <a:ln w="12700">
-            <a:solidFill>
-              <a:srgbClr val="1F4E79"/>
-            </a:solidFill>
-          </a:ln>
-          <a:effectLst/>
-        </p:spPr>
-        <p:style>
-          <a:lnRef idx="1">
-            <a:schemeClr val="accent1"/>
-          </a:lnRef>
-          <a:fillRef idx="3">
-            <a:schemeClr val="accent1"/>
-          </a:fillRef>
-          <a:effectRef idx="2">
-            <a:schemeClr val="accent1"/>
-          </a:effectRef>
-          <a:fontRef idx="minor">
-            <a:schemeClr val="lt1"/>
-          </a:fontRef>
-        </p:style>
-        <p:txBody>
-          <a:bodyPr rtlCol="0" anchor="ctr" wrap="square"/>
-          <a:lstStyle/>
-          <a:p>
-            <a:pPr algn="ctr" rtl="1"/>
-            <a:r>
-              <a:rPr sz="1300" b="1">
-                <a:solidFill>
-                  <a:srgbClr val="333333"/>
-                </a:solidFill>
-                <a:latin typeface="Arial"/>
-                <a:cs typeface="Arial"/>
-                <a:ea typeface="Calibri"/>
-              </a:rPr>
-              <a:t>عناوين وأقسام — يُدمج مع التكراري</a:t>
-            </a:r>
-          </a:p>
-        </p:txBody>
-      </p:sp>
-      <p:sp>
-        <p:nvSpPr>
-          <p:cNvPr id="11" name="Rounded Rectangle 10"/>
-          <p:cNvSpPr/>
-          <p:nvPr/>
-        </p:nvSpPr>
-        <p:spPr>
-          <a:xfrm>
-            <a:off x="822960" y="4892040"/>
-            <a:ext cx="2560320" cy="777240"/>
-          </a:xfrm>
-          <a:prstGeom prst="roundRect">
-            <a:avLst/>
-          </a:prstGeom>
-          <a:solidFill>
-            <a:srgbClr val="EDEDED"/>
-          </a:solidFill>
-          <a:ln w="12700">
-            <a:solidFill>
-              <a:srgbClr val="1F4E79"/>
-            </a:solidFill>
-          </a:ln>
-          <a:effectLst/>
-        </p:spPr>
-        <p:style>
-          <a:lnRef idx="1">
-            <a:schemeClr val="accent1"/>
-          </a:lnRef>
-          <a:fillRef idx="3">
-            <a:schemeClr val="accent1"/>
-          </a:fillRef>
-          <a:effectRef idx="2">
-            <a:schemeClr val="accent1"/>
-          </a:effectRef>
-          <a:fontRef idx="minor">
-            <a:schemeClr val="lt1"/>
-          </a:fontRef>
-        </p:style>
-        <p:txBody>
-          <a:bodyPr rtlCol="0" anchor="ctr" wrap="square"/>
-          <a:lstStyle/>
-          <a:p>
-            <a:pPr algn="ctr" rtl="1"/>
-            <a:r>
-              <a:rPr sz="1500" b="1">
-                <a:solidFill>
-                  <a:srgbClr val="333333"/>
-                </a:solidFill>
-                <a:latin typeface="Arial"/>
-                <a:cs typeface="Arial"/>
-                <a:ea typeface="Calibri"/>
-              </a:rPr>
-              <a:t>بالنموذج اللغوي</a:t>
-            </a:r>
-          </a:p>
-          <a:p>
-            <a:pPr algn="ctr" rtl="0"/>
-            <a:r>
-              <a:rPr sz="1100">
-                <a:solidFill>
-                  <a:srgbClr val="666666"/>
-                </a:solidFill>
-                <a:latin typeface="Calibri"/>
-                <a:cs typeface="Arial"/>
-                <a:ea typeface="Calibri"/>
-              </a:rPr>
-              <a:t>LLM-based</a:t>
-            </a:r>
-          </a:p>
-        </p:txBody>
-      </p:sp>
-      <p:sp>
-        <p:nvSpPr>
-          <p:cNvPr id="12" name="Rounded Rectangle 11"/>
-          <p:cNvSpPr/>
-          <p:nvPr/>
-        </p:nvSpPr>
-        <p:spPr>
-          <a:xfrm>
-            <a:off x="3566160" y="4892040"/>
-            <a:ext cx="5669280" cy="777240"/>
-          </a:xfrm>
-          <a:prstGeom prst="roundRect">
-            <a:avLst/>
-          </a:prstGeom>
-          <a:solidFill>
-            <a:srgbClr val="EDEDED"/>
-          </a:solidFill>
-          <a:ln w="12700">
-            <a:solidFill>
-              <a:srgbClr val="1F4E79"/>
-            </a:solidFill>
-          </a:ln>
-          <a:effectLst/>
-        </p:spPr>
-        <p:style>
-          <a:lnRef idx="1">
-            <a:schemeClr val="accent1"/>
-          </a:lnRef>
-          <a:fillRef idx="3">
-            <a:schemeClr val="accent1"/>
-          </a:fillRef>
-          <a:effectRef idx="2">
-            <a:schemeClr val="accent1"/>
-          </a:effectRef>
-          <a:fontRef idx="minor">
-            <a:schemeClr val="lt1"/>
-          </a:fontRef>
-        </p:style>
-        <p:txBody>
-          <a:bodyPr rtlCol="0" anchor="ctr" wrap="square"/>
-          <a:lstStyle/>
-          <a:p>
-            <a:pPr algn="ctr" rtl="1"/>
-            <a:r>
-              <a:rPr sz="1300" b="1">
-                <a:solidFill>
-                  <a:srgbClr val="333333"/>
-                </a:solidFill>
-                <a:latin typeface="Arial"/>
-                <a:cs typeface="Arial"/>
-                <a:ea typeface="Calibri"/>
-              </a:rPr>
-              <a:t>الأدق — الأغلى حسابيًا</a:t>
-            </a:r>
-          </a:p>
-        </p:txBody>
-      </p:sp>
-      <p:sp>
-        <p:nvSpPr>
-          <p:cNvPr id="13" name="TextBox 12"/>
+          <a:bodyPr rtlCol="0" anchor="ctr"/>
+          <a:lstStyle/>
+          <a:p>
+            <a:pPr algn="ctr"/>
+          </a:p>
+        </p:txBody>
+      </p:sp>
+      <p:sp>
+        <p:nvSpPr>
+          <p:cNvPr id="3" name="TextBox 2"/>
           <p:cNvSpPr txBox="1"/>
           <p:nvPr/>
         </p:nvSpPr>
         <p:spPr>
           <a:xfrm>
-            <a:off x="640080" y="6126480"/>
-            <a:ext cx="10972800" cy="548640"/>
+            <a:off x="640080" y="182880"/>
+            <a:ext cx="10972800" cy="640080"/>
           </a:xfrm>
           <a:prstGeom prst="rect">
             <a:avLst/>
@@ -9280,40 +8243,27 @@
           <a:p>
             <a:pPr algn="r" rtl="1"/>
             <a:r>
-              <a:rPr sz="1400">
-                <a:solidFill>
-                  <a:srgbClr val="666666"/>
+              <a:rPr sz="3200" b="1">
+                <a:solidFill>
+                  <a:srgbClr val="1F3B5C"/>
                 </a:solidFill>
                 <a:latin typeface="Arial"/>
-                <a:cs typeface="Arial"/>
-                <a:ea typeface="Calibri"/>
-              </a:rPr>
-              <a:t>★ التقسيم التكراري: فصل بالفقرات ثم تقسيم ما تجاوز الحد الأقصى.</a:t>
-            </a:r>
-          </a:p>
-          <a:p>
-            <a:pPr algn="r" rtl="0"/>
-            <a:r>
-              <a:rPr>
-                <a:latin typeface="Calibri"/>
-                <a:cs typeface="Arial"/>
-                <a:ea typeface="Calibri"/>
-              </a:rPr>
-              <a:t>★ Recursive: split by paragraphs, then oversized chunks.</a:t>
-            </a:r>
-          </a:p>
-        </p:txBody>
-      </p:sp>
-      <p:sp>
-        <p:nvSpPr>
-          <p:cNvPr id="14" name="TextBox 13"/>
+              </a:rPr>
+              <a:t>3) التوليد / Generation</a:t>
+            </a:r>
+          </a:p>
+        </p:txBody>
+      </p:sp>
+      <p:sp>
+        <p:nvSpPr>
+          <p:cNvPr id="4" name="TextBox 3"/>
           <p:cNvSpPr txBox="1"/>
           <p:nvPr/>
         </p:nvSpPr>
         <p:spPr>
           <a:xfrm>
-            <a:off x="640080" y="6400800"/>
-            <a:ext cx="8686800" cy="320040"/>
+            <a:off x="640080" y="1280160"/>
+            <a:ext cx="10972800" cy="5212080"/>
           </a:xfrm>
           <a:prstGeom prst="rect">
             <a:avLst/>
@@ -9326,31 +8276,55 @@
           </a:bodyPr>
           <a:lstStyle/>
           <a:p>
-            <a:pPr algn="r" rtl="1"/>
-            <a:r>
-              <a:rPr sz="1000" b="0">
+            <a:pPr algn="r" rtl="1">
+              <a:spcBef>
+                <a:spcPts val="200"/>
+              </a:spcBef>
+              <a:spcAft>
+                <a:spcPts val="1000"/>
+              </a:spcAft>
+            </a:pPr>
+            <a:r>
+              <a:rPr sz="1900">
+                <a:solidFill>
+                  <a:srgbClr val="333333"/>
+                </a:solidFill>
+                <a:latin typeface="Arial"/>
+              </a:rPr>
+              <a:t>• موجِّه مقيَّد بالمصادر المسترجعة (Grounded Prompting) مع الاستشهاد: «أجب فقط من السياق المرفق».</a:t>
+            </a:r>
+          </a:p>
+          <a:p>
+            <a:pPr algn="l" rtl="0">
+              <a:spcBef>
+                <a:spcPts val="200"/>
+              </a:spcBef>
+              <a:spcAft>
+                <a:spcPts val="1000"/>
+              </a:spcAft>
+            </a:pPr>
+            <a:r>
+              <a:rPr sz="1600">
                 <a:solidFill>
                   <a:srgbClr val="666666"/>
                 </a:solidFill>
-                <a:latin typeface="Arial"/>
-                <a:cs typeface="Arial"/>
-                <a:ea typeface="Calibri"/>
-              </a:rPr>
-              <a:t>Module 02 — Data &amp; AI Engineering Track  |  الوحدة الثانية</a:t>
-            </a:r>
-          </a:p>
-        </p:txBody>
-      </p:sp>
-      <p:sp>
-        <p:nvSpPr>
-          <p:cNvPr id="15" name="TextBox 14"/>
+                <a:latin typeface="Calibri"/>
+              </a:rPr>
+              <a:t>• Grounded prompting strictly on retrieved sources with citations: 'answer only from the provided context'.</a:t>
+            </a:r>
+          </a:p>
+        </p:txBody>
+      </p:sp>
+      <p:sp>
+        <p:nvSpPr>
+          <p:cNvPr id="5" name="TextBox 4"/>
           <p:cNvSpPr txBox="1"/>
           <p:nvPr/>
         </p:nvSpPr>
         <p:spPr>
           <a:xfrm>
-            <a:off x="9601200" y="6400800"/>
-            <a:ext cx="1920240" cy="320040"/>
+            <a:off x="640080" y="6400800"/>
+            <a:ext cx="8686800" cy="320040"/>
           </a:xfrm>
           <a:prstGeom prst="rect">
             <a:avLst/>
@@ -9363,31 +8337,29 @@
           </a:bodyPr>
           <a:lstStyle/>
           <a:p>
-            <a:pPr algn="l" rtl="0"/>
+            <a:pPr algn="r" rtl="1"/>
             <a:r>
               <a:rPr sz="1000" b="0">
                 <a:solidFill>
                   <a:srgbClr val="666666"/>
                 </a:solidFill>
-                <a:latin typeface="Calibri"/>
-                <a:cs typeface="Arial"/>
-                <a:ea typeface="Calibri"/>
-              </a:rPr>
-              <a:t>09_  •  6/14</a:t>
-            </a:r>
-          </a:p>
-        </p:txBody>
-      </p:sp>
-      <p:sp>
-        <p:nvSpPr>
-          <p:cNvPr id="16" name="TextBox 15"/>
+                <a:latin typeface="Arial"/>
+              </a:rPr>
+              <a:t>Module 02 — Data &amp; AI Engineering Track  |  الوحدة الثانية</a:t>
+            </a:r>
+          </a:p>
+        </p:txBody>
+      </p:sp>
+      <p:sp>
+        <p:nvSpPr>
+          <p:cNvPr id="6" name="TextBox 5"/>
           <p:cNvSpPr txBox="1"/>
           <p:nvPr/>
         </p:nvSpPr>
         <p:spPr>
           <a:xfrm>
-            <a:off x="640080" y="6400800"/>
-            <a:ext cx="8686800" cy="320040"/>
+            <a:off x="9601200" y="6400800"/>
+            <a:ext cx="1920240" cy="320040"/>
           </a:xfrm>
           <a:prstGeom prst="rect">
             <a:avLst/>
@@ -9400,54 +8372,15 @@
           </a:bodyPr>
           <a:lstStyle/>
           <a:p>
-            <a:pPr algn="r" rtl="1"/>
+            <a:pPr algn="l" rtl="0"/>
             <a:r>
               <a:rPr sz="1000" b="0">
                 <a:solidFill>
                   <a:srgbClr val="666666"/>
                 </a:solidFill>
-                <a:latin typeface="Arial"/>
-                <a:cs typeface="Arial"/>
-                <a:ea typeface="Calibri"/>
-              </a:rPr>
-              <a:t>Module 02 — Data &amp; AI Engineering Track  |  الوحدة الثانية</a:t>
-            </a:r>
-          </a:p>
-        </p:txBody>
-      </p:sp>
-      <p:sp>
-        <p:nvSpPr>
-          <p:cNvPr id="17" name="TextBox 16"/>
-          <p:cNvSpPr txBox="1"/>
-          <p:nvPr/>
-        </p:nvSpPr>
-        <p:spPr>
-          <a:xfrm>
-            <a:off x="9601200" y="6400800"/>
-            <a:ext cx="1920240" cy="320040"/>
-          </a:xfrm>
-          <a:prstGeom prst="rect">
-            <a:avLst/>
-          </a:prstGeom>
-          <a:noFill/>
-        </p:spPr>
-        <p:txBody>
-          <a:bodyPr wrap="square">
-            <a:spAutoFit/>
-          </a:bodyPr>
-          <a:lstStyle/>
-          <a:p>
-            <a:pPr algn="l" rtl="0"/>
-            <a:r>
-              <a:rPr sz="1000" b="0">
-                <a:solidFill>
-                  <a:srgbClr val="666666"/>
-                </a:solidFill>
                 <a:latin typeface="Calibri"/>
-                <a:cs typeface="Arial"/>
-                <a:ea typeface="Calibri"/>
-              </a:rPr>
-              <a:t>09_  •  6/14</a:t>
+              </a:rPr>
+              <a:t>V09  •  8/15</a:t>
             </a:r>
           </a:p>
         </p:txBody>
@@ -9553,10 +8486,8 @@
                   <a:srgbClr val="1F3B5C"/>
                 </a:solidFill>
                 <a:latin typeface="Arial"/>
-                <a:cs typeface="Arial"/>
-                <a:ea typeface="Calibri"/>
-              </a:rPr>
-              <a:t>2) الاسترجاع / Retrieval</a:t>
+              </a:rPr>
+              <a:t>4) التقييم + 5) التحسين / Evaluation + Optimization</a:t>
             </a:r>
           </a:p>
         </p:txBody>
@@ -9592,19 +8523,17 @@
               </a:spcAft>
             </a:pPr>
             <a:r>
-              <a:rPr sz="1900">
+              <a:rPr sz="1800">
                 <a:solidFill>
                   <a:srgbClr val="333333"/>
                 </a:solidFill>
                 <a:latin typeface="Arial"/>
-                <a:cs typeface="Arial"/>
-                <a:ea typeface="Calibri"/>
-              </a:rPr>
-              <a:t>• بحث هجين: كثيف (Dense) + متناثر (BM25) يغطي المعنى والكلمات المفتاحية معًا.</a:t>
-            </a:r>
-          </a:p>
-          <a:p>
-            <a:pPr algn="r" rtl="0">
+              </a:rPr>
+              <a:t>• مثلث RAG: الوفاء (Faithfulness)، ملاءمة الإجابة (Answer Relevancy)، دقة السياق (Context Precision) — بإطار RAGAS.</a:t>
+            </a:r>
+          </a:p>
+          <a:p>
+            <a:pPr algn="l" rtl="0">
               <a:spcBef>
                 <a:spcPts val="200"/>
               </a:spcBef>
@@ -9613,15 +8542,13 @@
               </a:spcAft>
             </a:pPr>
             <a:r>
-              <a:rPr sz="1600">
+              <a:rPr sz="1500">
                 <a:solidFill>
                   <a:srgbClr val="666666"/>
                 </a:solidFill>
                 <a:latin typeface="Calibri"/>
-                <a:cs typeface="Arial"/>
-                <a:ea typeface="Calibri"/>
-              </a:rPr>
-              <a:t>• Hybrid search: dense + sparse (BM25) covers meaning and keywords.</a:t>
+              </a:rPr>
+              <a:t>• RAG triad: faithfulness, answer relevancy, context precision — measured with RAGAS.</a:t>
             </a:r>
           </a:p>
           <a:p>
@@ -9634,19 +8561,17 @@
               </a:spcAft>
             </a:pPr>
             <a:r>
-              <a:rPr sz="1900">
+              <a:rPr sz="1800">
                 <a:solidFill>
                   <a:srgbClr val="333333"/>
                 </a:solidFill>
                 <a:latin typeface="Arial"/>
-                <a:cs typeface="Arial"/>
-                <a:ea typeface="Calibri"/>
-              </a:rPr>
-              <a:t>• إعادة ترتيب Cross-encoder وتحويل الاستعلام Multi-Query يرفعان دقة النتائج.</a:t>
-            </a:r>
-          </a:p>
-          <a:p>
-            <a:pPr algn="r" rtl="0">
+              </a:rPr>
+              <a:t>• التحسين: تخزين دلالي مؤقت، توجيه الطلبات بين النماذج، ومراقبة مستمرة.</a:t>
+            </a:r>
+          </a:p>
+          <a:p>
+            <a:pPr algn="l" rtl="0">
               <a:spcBef>
                 <a:spcPts val="200"/>
               </a:spcBef>
@@ -9655,15 +8580,13 @@
               </a:spcAft>
             </a:pPr>
             <a:r>
-              <a:rPr sz="1600">
+              <a:rPr sz="1500">
                 <a:solidFill>
                   <a:srgbClr val="666666"/>
                 </a:solidFill>
                 <a:latin typeface="Calibri"/>
-                <a:cs typeface="Arial"/>
-                <a:ea typeface="Calibri"/>
-              </a:rPr>
-              <a:t>• Cross-encoder reranking and multi-query transformation improve precision.</a:t>
+              </a:rPr>
+              <a:t>• Optimization: semantic caching, model routing, continuous monitoring.</a:t>
             </a:r>
           </a:p>
         </p:txBody>
@@ -9697,8 +8620,6 @@
                   <a:srgbClr val="666666"/>
                 </a:solidFill>
                 <a:latin typeface="Arial"/>
-                <a:cs typeface="Arial"/>
-                <a:ea typeface="Calibri"/>
               </a:rPr>
               <a:t>Module 02 — Data &amp; AI Engineering Track  |  الوحدة الثانية</a:t>
             </a:r>
@@ -9734,158 +8655,8 @@
                   <a:srgbClr val="666666"/>
                 </a:solidFill>
                 <a:latin typeface="Calibri"/>
-                <a:cs typeface="Arial"/>
-                <a:ea typeface="Calibri"/>
-              </a:rPr>
-              <a:t>V09  •  5/14</a:t>
-            </a:r>
-          </a:p>
-        </p:txBody>
-      </p:sp>
-      <p:sp>
-        <p:nvSpPr>
-          <p:cNvPr id="7" name="TextBox 6"/>
-          <p:cNvSpPr txBox="1"/>
-          <p:nvPr/>
-        </p:nvSpPr>
-        <p:spPr>
-          <a:xfrm>
-            <a:off x="640080" y="6400800"/>
-            <a:ext cx="8686800" cy="320040"/>
-          </a:xfrm>
-          <a:prstGeom prst="rect">
-            <a:avLst/>
-          </a:prstGeom>
-          <a:noFill/>
-        </p:spPr>
-        <p:txBody>
-          <a:bodyPr wrap="square">
-            <a:spAutoFit/>
-          </a:bodyPr>
-          <a:lstStyle/>
-          <a:p>
-            <a:pPr algn="r" rtl="1"/>
-            <a:r>
-              <a:rPr sz="1000" b="0">
-                <a:solidFill>
-                  <a:srgbClr val="666666"/>
-                </a:solidFill>
-                <a:latin typeface="Arial"/>
-                <a:cs typeface="Arial"/>
-                <a:ea typeface="Calibri"/>
-              </a:rPr>
-              <a:t>Module 02 — Data &amp; AI Engineering Track  |  الوحدة الثانية</a:t>
-            </a:r>
-          </a:p>
-        </p:txBody>
-      </p:sp>
-      <p:sp>
-        <p:nvSpPr>
-          <p:cNvPr id="8" name="TextBox 7"/>
-          <p:cNvSpPr txBox="1"/>
-          <p:nvPr/>
-        </p:nvSpPr>
-        <p:spPr>
-          <a:xfrm>
-            <a:off x="9601200" y="6400800"/>
-            <a:ext cx="1920240" cy="320040"/>
-          </a:xfrm>
-          <a:prstGeom prst="rect">
-            <a:avLst/>
-          </a:prstGeom>
-          <a:noFill/>
-        </p:spPr>
-        <p:txBody>
-          <a:bodyPr wrap="square">
-            <a:spAutoFit/>
-          </a:bodyPr>
-          <a:lstStyle/>
-          <a:p>
-            <a:pPr algn="l" rtl="0"/>
-            <a:r>
-              <a:rPr sz="1000" b="0">
-                <a:solidFill>
-                  <a:srgbClr val="666666"/>
-                </a:solidFill>
-                <a:latin typeface="Calibri"/>
-                <a:cs typeface="Arial"/>
-                <a:ea typeface="Calibri"/>
-              </a:rPr>
-              <a:t>09_  •  7/14</a:t>
-            </a:r>
-          </a:p>
-        </p:txBody>
-      </p:sp>
-      <p:sp>
-        <p:nvSpPr>
-          <p:cNvPr id="9" name="TextBox 8"/>
-          <p:cNvSpPr txBox="1"/>
-          <p:nvPr/>
-        </p:nvSpPr>
-        <p:spPr>
-          <a:xfrm>
-            <a:off x="640080" y="6400800"/>
-            <a:ext cx="8686800" cy="320040"/>
-          </a:xfrm>
-          <a:prstGeom prst="rect">
-            <a:avLst/>
-          </a:prstGeom>
-          <a:noFill/>
-        </p:spPr>
-        <p:txBody>
-          <a:bodyPr wrap="square">
-            <a:spAutoFit/>
-          </a:bodyPr>
-          <a:lstStyle/>
-          <a:p>
-            <a:pPr algn="r" rtl="1"/>
-            <a:r>
-              <a:rPr sz="1000" b="0">
-                <a:solidFill>
-                  <a:srgbClr val="666666"/>
-                </a:solidFill>
-                <a:latin typeface="Arial"/>
-                <a:cs typeface="Arial"/>
-                <a:ea typeface="Calibri"/>
-              </a:rPr>
-              <a:t>Module 02 — Data &amp; AI Engineering Track  |  الوحدة الثانية</a:t>
-            </a:r>
-          </a:p>
-        </p:txBody>
-      </p:sp>
-      <p:sp>
-        <p:nvSpPr>
-          <p:cNvPr id="10" name="TextBox 9"/>
-          <p:cNvSpPr txBox="1"/>
-          <p:nvPr/>
-        </p:nvSpPr>
-        <p:spPr>
-          <a:xfrm>
-            <a:off x="9601200" y="6400800"/>
-            <a:ext cx="1920240" cy="320040"/>
-          </a:xfrm>
-          <a:prstGeom prst="rect">
-            <a:avLst/>
-          </a:prstGeom>
-          <a:noFill/>
-        </p:spPr>
-        <p:txBody>
-          <a:bodyPr wrap="square">
-            <a:spAutoFit/>
-          </a:bodyPr>
-          <a:lstStyle/>
-          <a:p>
-            <a:pPr algn="l" rtl="0"/>
-            <a:r>
-              <a:rPr sz="1000" b="0">
-                <a:solidFill>
-                  <a:srgbClr val="666666"/>
-                </a:solidFill>
-                <a:latin typeface="Calibri"/>
-                <a:cs typeface="Arial"/>
-                <a:ea typeface="Calibri"/>
-              </a:rPr>
-              <a:t>09_  •  7/14</a:t>
+              </a:rPr>
+              <a:t>V09  •  10/15</a:t>
             </a:r>
           </a:p>
         </p:txBody>
@@ -9991,10 +8762,8 @@
                   <a:srgbClr val="1F3B5C"/>
                 </a:solidFill>
                 <a:latin typeface="Arial"/>
-                <a:cs typeface="Arial"/>
-                <a:ea typeface="Calibri"/>
-              </a:rPr>
-              <a:t>3) التوليد / Generation</a:t>
+              </a:rPr>
+              <a:t>الأخطاء الشائعة / Common Pitfalls</a:t>
             </a:r>
           </a:p>
         </p:txBody>
@@ -10035,14 +8804,12 @@
                   <a:srgbClr val="333333"/>
                 </a:solidFill>
                 <a:latin typeface="Arial"/>
-                <a:cs typeface="Arial"/>
-                <a:ea typeface="Calibri"/>
-              </a:rPr>
-              <a:t>• موجِّه مقيَّد بالمصادر المسترجعة (Grounded Prompting) مع الاستشهاد: «أجب فقط من السياق المرفق».</a:t>
-            </a:r>
-          </a:p>
-          <a:p>
-            <a:pPr algn="r" rtl="0">
+              </a:rPr>
+              <a:t>• تقسيم يكسر الجداول أو الأكواد؛ إهمال إعادة الترتيب فيضيع الأكثر ملاءمة.</a:t>
+            </a:r>
+          </a:p>
+          <a:p>
+            <a:pPr algn="l" rtl="0">
               <a:spcBef>
                 <a:spcPts val="200"/>
               </a:spcBef>
@@ -10056,10 +8823,46 @@
                   <a:srgbClr val="666666"/>
                 </a:solidFill>
                 <a:latin typeface="Calibri"/>
-                <a:cs typeface="Arial"/>
-                <a:ea typeface="Calibri"/>
-              </a:rPr>
-              <a:t>• Grounded prompting strictly on retrieved sources with citations: 'answer only from the provided context'.</a:t>
+              </a:rPr>
+              <a:t>• Chunking that breaks tables/code; skipping reranking loses the most relevant hits.</a:t>
+            </a:r>
+          </a:p>
+          <a:p>
+            <a:pPr algn="r" rtl="1">
+              <a:spcBef>
+                <a:spcPts val="200"/>
+              </a:spcBef>
+              <a:spcAft>
+                <a:spcPts val="1000"/>
+              </a:spcAft>
+            </a:pPr>
+            <a:r>
+              <a:rPr sz="1900">
+                <a:solidFill>
+                  <a:srgbClr val="333333"/>
+                </a:solidFill>
+                <a:latin typeface="Arial"/>
+              </a:rPr>
+              <a:t>• غياب تقييم الوفاء فيسمح بالهلوسة؛ استرجاع أعلى-ك دون حد أدنى للدرجة.</a:t>
+            </a:r>
+          </a:p>
+          <a:p>
+            <a:pPr algn="l" rtl="0">
+              <a:spcBef>
+                <a:spcPts val="200"/>
+              </a:spcBef>
+              <a:spcAft>
+                <a:spcPts val="1000"/>
+              </a:spcAft>
+            </a:pPr>
+            <a:r>
+              <a:rPr sz="1600">
+                <a:solidFill>
+                  <a:srgbClr val="666666"/>
+                </a:solidFill>
+                <a:latin typeface="Calibri"/>
+              </a:rPr>
+              <a:t>• No faithfulness evaluation allows hallucination; top-k without a score floor.</a:t>
             </a:r>
           </a:p>
         </p:txBody>
@@ -10093,8 +8896,6 @@
                   <a:srgbClr val="666666"/>
                 </a:solidFill>
                 <a:latin typeface="Arial"/>
-                <a:cs typeface="Arial"/>
-                <a:ea typeface="Calibri"/>
               </a:rPr>
               <a:t>Module 02 — Data &amp; AI Engineering Track  |  الوحدة الثانية</a:t>
             </a:r>
@@ -10130,158 +8931,8 @@
                   <a:srgbClr val="666666"/>
                 </a:solidFill>
                 <a:latin typeface="Calibri"/>
-                <a:cs typeface="Arial"/>
-                <a:ea typeface="Calibri"/>
-              </a:rPr>
-              <a:t>V09  •  6/14</a:t>
-            </a:r>
-          </a:p>
-        </p:txBody>
-      </p:sp>
-      <p:sp>
-        <p:nvSpPr>
-          <p:cNvPr id="7" name="TextBox 6"/>
-          <p:cNvSpPr txBox="1"/>
-          <p:nvPr/>
-        </p:nvSpPr>
-        <p:spPr>
-          <a:xfrm>
-            <a:off x="640080" y="6400800"/>
-            <a:ext cx="8686800" cy="320040"/>
-          </a:xfrm>
-          <a:prstGeom prst="rect">
-            <a:avLst/>
-          </a:prstGeom>
-          <a:noFill/>
-        </p:spPr>
-        <p:txBody>
-          <a:bodyPr wrap="square">
-            <a:spAutoFit/>
-          </a:bodyPr>
-          <a:lstStyle/>
-          <a:p>
-            <a:pPr algn="r" rtl="1"/>
-            <a:r>
-              <a:rPr sz="1000" b="0">
-                <a:solidFill>
-                  <a:srgbClr val="666666"/>
-                </a:solidFill>
-                <a:latin typeface="Arial"/>
-                <a:cs typeface="Arial"/>
-                <a:ea typeface="Calibri"/>
-              </a:rPr>
-              <a:t>Module 02 — Data &amp; AI Engineering Track  |  الوحدة الثانية</a:t>
-            </a:r>
-          </a:p>
-        </p:txBody>
-      </p:sp>
-      <p:sp>
-        <p:nvSpPr>
-          <p:cNvPr id="8" name="TextBox 7"/>
-          <p:cNvSpPr txBox="1"/>
-          <p:nvPr/>
-        </p:nvSpPr>
-        <p:spPr>
-          <a:xfrm>
-            <a:off x="9601200" y="6400800"/>
-            <a:ext cx="1920240" cy="320040"/>
-          </a:xfrm>
-          <a:prstGeom prst="rect">
-            <a:avLst/>
-          </a:prstGeom>
-          <a:noFill/>
-        </p:spPr>
-        <p:txBody>
-          <a:bodyPr wrap="square">
-            <a:spAutoFit/>
-          </a:bodyPr>
-          <a:lstStyle/>
-          <a:p>
-            <a:pPr algn="l" rtl="0"/>
-            <a:r>
-              <a:rPr sz="1000" b="0">
-                <a:solidFill>
-                  <a:srgbClr val="666666"/>
-                </a:solidFill>
-                <a:latin typeface="Calibri"/>
-                <a:cs typeface="Arial"/>
-                <a:ea typeface="Calibri"/>
-              </a:rPr>
-              <a:t>09_  •  8/14</a:t>
-            </a:r>
-          </a:p>
-        </p:txBody>
-      </p:sp>
-      <p:sp>
-        <p:nvSpPr>
-          <p:cNvPr id="9" name="TextBox 8"/>
-          <p:cNvSpPr txBox="1"/>
-          <p:nvPr/>
-        </p:nvSpPr>
-        <p:spPr>
-          <a:xfrm>
-            <a:off x="640080" y="6400800"/>
-            <a:ext cx="8686800" cy="320040"/>
-          </a:xfrm>
-          <a:prstGeom prst="rect">
-            <a:avLst/>
-          </a:prstGeom>
-          <a:noFill/>
-        </p:spPr>
-        <p:txBody>
-          <a:bodyPr wrap="square">
-            <a:spAutoFit/>
-          </a:bodyPr>
-          <a:lstStyle/>
-          <a:p>
-            <a:pPr algn="r" rtl="1"/>
-            <a:r>
-              <a:rPr sz="1000" b="0">
-                <a:solidFill>
-                  <a:srgbClr val="666666"/>
-                </a:solidFill>
-                <a:latin typeface="Arial"/>
-                <a:cs typeface="Arial"/>
-                <a:ea typeface="Calibri"/>
-              </a:rPr>
-              <a:t>Module 02 — Data &amp; AI Engineering Track  |  الوحدة الثانية</a:t>
-            </a:r>
-          </a:p>
-        </p:txBody>
-      </p:sp>
-      <p:sp>
-        <p:nvSpPr>
-          <p:cNvPr id="10" name="TextBox 9"/>
-          <p:cNvSpPr txBox="1"/>
-          <p:nvPr/>
-        </p:nvSpPr>
-        <p:spPr>
-          <a:xfrm>
-            <a:off x="9601200" y="6400800"/>
-            <a:ext cx="1920240" cy="320040"/>
-          </a:xfrm>
-          <a:prstGeom prst="rect">
-            <a:avLst/>
-          </a:prstGeom>
-          <a:noFill/>
-        </p:spPr>
-        <p:txBody>
-          <a:bodyPr wrap="square">
-            <a:spAutoFit/>
-          </a:bodyPr>
-          <a:lstStyle/>
-          <a:p>
-            <a:pPr algn="l" rtl="0"/>
-            <a:r>
-              <a:rPr sz="1000" b="0">
-                <a:solidFill>
-                  <a:srgbClr val="666666"/>
-                </a:solidFill>
-                <a:latin typeface="Calibri"/>
-                <a:cs typeface="Arial"/>
-                <a:ea typeface="Calibri"/>
-              </a:rPr>
-              <a:t>09_  •  8/14</a:t>
+              </a:rPr>
+              <a:t>V09  •  12/15</a:t>
             </a:r>
           </a:p>
         </p:txBody>
@@ -10387,10 +9038,8 @@
                   <a:srgbClr val="1F3B5C"/>
                 </a:solidFill>
                 <a:latin typeface="Arial"/>
-                <a:cs typeface="Arial"/>
-                <a:ea typeface="Calibri"/>
-              </a:rPr>
-              <a:t>4) التقييم + 5) التحسين / Evaluation + Optimization</a:t>
+              </a:rPr>
+              <a:t>اختبار قصير / Quick Quiz</a:t>
             </a:r>
           </a:p>
         </p:txBody>
@@ -10426,19 +9075,17 @@
               </a:spcAft>
             </a:pPr>
             <a:r>
-              <a:rPr sz="1800">
+              <a:rPr sz="2000">
                 <a:solidFill>
                   <a:srgbClr val="333333"/>
                 </a:solidFill>
                 <a:latin typeface="Arial"/>
-                <a:cs typeface="Arial"/>
-                <a:ea typeface="Calibri"/>
-              </a:rPr>
-              <a:t>• مثلث RAG: الوفاء (Faithfulness)، ملاءمة الإجابة (Answer Relevancy)، دقة السياق (Context Precision) — بإطار RAGAS.</a:t>
-            </a:r>
-          </a:p>
-          <a:p>
-            <a:pPr algn="r" rtl="0">
+              </a:rPr>
+              <a:t>• 1. ما استراتيجية التقسيم الموصى بها افتراضيًا؟</a:t>
+            </a:r>
+          </a:p>
+          <a:p>
+            <a:pPr algn="l" rtl="0">
               <a:spcBef>
                 <a:spcPts val="200"/>
               </a:spcBef>
@@ -10447,15 +9094,13 @@
               </a:spcAft>
             </a:pPr>
             <a:r>
-              <a:rPr sz="1500">
+              <a:rPr sz="1700">
                 <a:solidFill>
                   <a:srgbClr val="666666"/>
                 </a:solidFill>
                 <a:latin typeface="Calibri"/>
-                <a:cs typeface="Arial"/>
-                <a:ea typeface="Calibri"/>
-              </a:rPr>
-              <a:t>• RAG triad: faithfulness, answer relevancy, context precision — measured with RAGAS.</a:t>
+              </a:rPr>
+              <a:t>• Which chunking strategy is the recommended default?</a:t>
             </a:r>
           </a:p>
           <a:p>
@@ -10468,19 +9113,17 @@
               </a:spcAft>
             </a:pPr>
             <a:r>
-              <a:rPr sz="1800">
+              <a:rPr sz="2000">
                 <a:solidFill>
                   <a:srgbClr val="333333"/>
                 </a:solidFill>
                 <a:latin typeface="Arial"/>
-                <a:cs typeface="Arial"/>
-                <a:ea typeface="Calibri"/>
-              </a:rPr>
-              <a:t>• التحسين: تخزين دلالي مؤقت، توجيه الطلبات بين النماذج، ومراقبة مستمرة.</a:t>
-            </a:r>
-          </a:p>
-          <a:p>
-            <a:pPr algn="r" rtl="0">
+              </a:rPr>
+              <a:t>• 2. لماذا نجمع البحث الكثيف مع BM25؟</a:t>
+            </a:r>
+          </a:p>
+          <a:p>
+            <a:pPr algn="l" rtl="0">
               <a:spcBef>
                 <a:spcPts val="200"/>
               </a:spcBef>
@@ -10489,15 +9132,127 @@
               </a:spcAft>
             </a:pPr>
             <a:r>
-              <a:rPr sz="1500">
+              <a:rPr sz="1700">
                 <a:solidFill>
                   <a:srgbClr val="666666"/>
                 </a:solidFill>
                 <a:latin typeface="Calibri"/>
-                <a:cs typeface="Arial"/>
-                <a:ea typeface="Calibri"/>
-              </a:rPr>
-              <a:t>• Optimization: semantic caching, model routing, continuous monitoring.</a:t>
+              </a:rPr>
+              <a:t>• Why combine dense search with BM25?</a:t>
+            </a:r>
+          </a:p>
+          <a:p>
+            <a:pPr algn="r" rtl="1">
+              <a:spcBef>
+                <a:spcPts val="200"/>
+              </a:spcBef>
+              <a:spcAft>
+                <a:spcPts val="1000"/>
+              </a:spcAft>
+            </a:pPr>
+            <a:r>
+              <a:rPr sz="2000">
+                <a:solidFill>
+                  <a:srgbClr val="333333"/>
+                </a:solidFill>
+                <a:latin typeface="Arial"/>
+              </a:rPr>
+              <a:t>• 3. ما مكونات مثلث تقييم RAG الثلاثة؟</a:t>
+            </a:r>
+          </a:p>
+          <a:p>
+            <a:pPr algn="l" rtl="0">
+              <a:spcBef>
+                <a:spcPts val="200"/>
+              </a:spcBef>
+              <a:spcAft>
+                <a:spcPts val="1000"/>
+              </a:spcAft>
+            </a:pPr>
+            <a:r>
+              <a:rPr sz="1700">
+                <a:solidFill>
+                  <a:srgbClr val="666666"/>
+                </a:solidFill>
+                <a:latin typeface="Calibri"/>
+              </a:rPr>
+              <a:t>• Name the three parts of the RAG evaluation triad.</a:t>
+            </a:r>
+          </a:p>
+          <a:p>
+            <a:pPr algn="r" rtl="1">
+              <a:spcBef>
+                <a:spcPts val="200"/>
+              </a:spcBef>
+              <a:spcAft>
+                <a:spcPts val="1000"/>
+              </a:spcAft>
+            </a:pPr>
+            <a:r>
+              <a:rPr sz="2000">
+                <a:solidFill>
+                  <a:srgbClr val="333333"/>
+                </a:solidFill>
+                <a:latin typeface="Arial"/>
+              </a:rPr>
+              <a:t>• 4. ما وظيفة إعادة الترتيب Cross-encoder؟</a:t>
+            </a:r>
+          </a:p>
+          <a:p>
+            <a:pPr algn="l" rtl="0">
+              <a:spcBef>
+                <a:spcPts val="200"/>
+              </a:spcBef>
+              <a:spcAft>
+                <a:spcPts val="1000"/>
+              </a:spcAft>
+            </a:pPr>
+            <a:r>
+              <a:rPr sz="1700">
+                <a:solidFill>
+                  <a:srgbClr val="666666"/>
+                </a:solidFill>
+                <a:latin typeface="Calibri"/>
+              </a:rPr>
+              <a:t>• What does cross-encoder reranking do?</a:t>
+            </a:r>
+          </a:p>
+          <a:p>
+            <a:pPr algn="r" rtl="1">
+              <a:spcBef>
+                <a:spcPts val="200"/>
+              </a:spcBef>
+              <a:spcAft>
+                <a:spcPts val="1000"/>
+              </a:spcAft>
+            </a:pPr>
+            <a:r>
+              <a:rPr sz="2000">
+                <a:solidFill>
+                  <a:srgbClr val="333333"/>
+                </a:solidFill>
+                <a:latin typeface="Arial"/>
+              </a:rPr>
+              <a:t>• 5. كيف يقلل التخزين الدلالي المؤقت التكلفة؟</a:t>
+            </a:r>
+          </a:p>
+          <a:p>
+            <a:pPr algn="l" rtl="0">
+              <a:spcBef>
+                <a:spcPts val="200"/>
+              </a:spcBef>
+              <a:spcAft>
+                <a:spcPts val="1000"/>
+              </a:spcAft>
+            </a:pPr>
+            <a:r>
+              <a:rPr sz="1700">
+                <a:solidFill>
+                  <a:srgbClr val="666666"/>
+                </a:solidFill>
+                <a:latin typeface="Calibri"/>
+              </a:rPr>
+              <a:t>• How does semantic caching cut cost?</a:t>
             </a:r>
           </a:p>
         </p:txBody>
@@ -10531,8 +9286,6 @@
                   <a:srgbClr val="666666"/>
                 </a:solidFill>
                 <a:latin typeface="Arial"/>
-                <a:cs typeface="Arial"/>
-                <a:ea typeface="Calibri"/>
               </a:rPr>
               <a:t>Module 02 — Data &amp; AI Engineering Track  |  الوحدة الثانية</a:t>
             </a:r>
@@ -10568,158 +9321,8 @@
                   <a:srgbClr val="666666"/>
                 </a:solidFill>
                 <a:latin typeface="Calibri"/>
-                <a:cs typeface="Arial"/>
-                <a:ea typeface="Calibri"/>
-              </a:rPr>
-              <a:t>V09  •  7/14</a:t>
-            </a:r>
-          </a:p>
-        </p:txBody>
-      </p:sp>
-      <p:sp>
-        <p:nvSpPr>
-          <p:cNvPr id="7" name="TextBox 6"/>
-          <p:cNvSpPr txBox="1"/>
-          <p:nvPr/>
-        </p:nvSpPr>
-        <p:spPr>
-          <a:xfrm>
-            <a:off x="640080" y="6400800"/>
-            <a:ext cx="8686800" cy="320040"/>
-          </a:xfrm>
-          <a:prstGeom prst="rect">
-            <a:avLst/>
-          </a:prstGeom>
-          <a:noFill/>
-        </p:spPr>
-        <p:txBody>
-          <a:bodyPr wrap="square">
-            <a:spAutoFit/>
-          </a:bodyPr>
-          <a:lstStyle/>
-          <a:p>
-            <a:pPr algn="r" rtl="1"/>
-            <a:r>
-              <a:rPr sz="1000" b="0">
-                <a:solidFill>
-                  <a:srgbClr val="666666"/>
-                </a:solidFill>
-                <a:latin typeface="Arial"/>
-                <a:cs typeface="Arial"/>
-                <a:ea typeface="Calibri"/>
-              </a:rPr>
-              <a:t>Module 02 — Data &amp; AI Engineering Track  |  الوحدة الثانية</a:t>
-            </a:r>
-          </a:p>
-        </p:txBody>
-      </p:sp>
-      <p:sp>
-        <p:nvSpPr>
-          <p:cNvPr id="8" name="TextBox 7"/>
-          <p:cNvSpPr txBox="1"/>
-          <p:nvPr/>
-        </p:nvSpPr>
-        <p:spPr>
-          <a:xfrm>
-            <a:off x="9601200" y="6400800"/>
-            <a:ext cx="1920240" cy="320040"/>
-          </a:xfrm>
-          <a:prstGeom prst="rect">
-            <a:avLst/>
-          </a:prstGeom>
-          <a:noFill/>
-        </p:spPr>
-        <p:txBody>
-          <a:bodyPr wrap="square">
-            <a:spAutoFit/>
-          </a:bodyPr>
-          <a:lstStyle/>
-          <a:p>
-            <a:pPr algn="l" rtl="0"/>
-            <a:r>
-              <a:rPr sz="1000" b="0">
-                <a:solidFill>
-                  <a:srgbClr val="666666"/>
-                </a:solidFill>
-                <a:latin typeface="Calibri"/>
-                <a:cs typeface="Arial"/>
-                <a:ea typeface="Calibri"/>
-              </a:rPr>
-              <a:t>09_  •  9/14</a:t>
-            </a:r>
-          </a:p>
-        </p:txBody>
-      </p:sp>
-      <p:sp>
-        <p:nvSpPr>
-          <p:cNvPr id="9" name="TextBox 8"/>
-          <p:cNvSpPr txBox="1"/>
-          <p:nvPr/>
-        </p:nvSpPr>
-        <p:spPr>
-          <a:xfrm>
-            <a:off x="640080" y="6400800"/>
-            <a:ext cx="8686800" cy="320040"/>
-          </a:xfrm>
-          <a:prstGeom prst="rect">
-            <a:avLst/>
-          </a:prstGeom>
-          <a:noFill/>
-        </p:spPr>
-        <p:txBody>
-          <a:bodyPr wrap="square">
-            <a:spAutoFit/>
-          </a:bodyPr>
-          <a:lstStyle/>
-          <a:p>
-            <a:pPr algn="r" rtl="1"/>
-            <a:r>
-              <a:rPr sz="1000" b="0">
-                <a:solidFill>
-                  <a:srgbClr val="666666"/>
-                </a:solidFill>
-                <a:latin typeface="Arial"/>
-                <a:cs typeface="Arial"/>
-                <a:ea typeface="Calibri"/>
-              </a:rPr>
-              <a:t>Module 02 — Data &amp; AI Engineering Track  |  الوحدة الثانية</a:t>
-            </a:r>
-          </a:p>
-        </p:txBody>
-      </p:sp>
-      <p:sp>
-        <p:nvSpPr>
-          <p:cNvPr id="10" name="TextBox 9"/>
-          <p:cNvSpPr txBox="1"/>
-          <p:nvPr/>
-        </p:nvSpPr>
-        <p:spPr>
-          <a:xfrm>
-            <a:off x="9601200" y="6400800"/>
-            <a:ext cx="1920240" cy="320040"/>
-          </a:xfrm>
-          <a:prstGeom prst="rect">
-            <a:avLst/>
-          </a:prstGeom>
-          <a:noFill/>
-        </p:spPr>
-        <p:txBody>
-          <a:bodyPr wrap="square">
-            <a:spAutoFit/>
-          </a:bodyPr>
-          <a:lstStyle/>
-          <a:p>
-            <a:pPr algn="l" rtl="0"/>
-            <a:r>
-              <a:rPr sz="1000" b="0">
-                <a:solidFill>
-                  <a:srgbClr val="666666"/>
-                </a:solidFill>
-                <a:latin typeface="Calibri"/>
-                <a:cs typeface="Arial"/>
-                <a:ea typeface="Calibri"/>
-              </a:rPr>
-              <a:t>09_  •  9/14</a:t>
+              </a:rPr>
+              <a:t>V09  •  13/15</a:t>
             </a:r>
           </a:p>
         </p:txBody>
